--- a/output/presentations/astana-walks.pptx
+++ b/output/presentations/astana-walks.pptx
@@ -2,21 +2,22 @@
 <file path=ppt/presentation.xml><?xml version="1.0" encoding="utf-8"?>
 <p:presentation xmlns:p="http://schemas.openxmlformats.org/presentationml/2006/main">
   <p:sldMasterIdLst>
-    <p:sldMasterId xmlns:r="http://schemas.openxmlformats.org/officeDocument/2006/relationships" id="2147483648" r:id="Rce73501ee8aa47a7"/>
+    <p:sldMasterId xmlns:r="http://schemas.openxmlformats.org/officeDocument/2006/relationships" id="2147483648" r:id="R81721dbcb59f4ed3"/>
   </p:sldMasterIdLst>
   <p:notesMasterIdLst>
-    <p:notesMasterId xmlns:r="http://schemas.openxmlformats.org/officeDocument/2006/relationships" r:id="R677ddb085dd94979"/>
+    <p:notesMasterId xmlns:r="http://schemas.openxmlformats.org/officeDocument/2006/relationships" r:id="R7b9768ecd9034ee1"/>
   </p:notesMasterIdLst>
   <p:sldIdLst>
-    <p:sldId xmlns:r="http://schemas.openxmlformats.org/officeDocument/2006/relationships" id="256" r:id="R2ea89f59fffb4341"/>
-    <p:sldId xmlns:r="http://schemas.openxmlformats.org/officeDocument/2006/relationships" id="257" r:id="R2884f84a1e1645ce"/>
-    <p:sldId xmlns:r="http://schemas.openxmlformats.org/officeDocument/2006/relationships" id="258" r:id="Rec64a8bb4ca84a54"/>
-    <p:sldId xmlns:r="http://schemas.openxmlformats.org/officeDocument/2006/relationships" id="259" r:id="R58b9010c739148b7"/>
-    <p:sldId xmlns:r="http://schemas.openxmlformats.org/officeDocument/2006/relationships" id="260" r:id="R8c98c4ee136c4468"/>
-    <p:sldId xmlns:r="http://schemas.openxmlformats.org/officeDocument/2006/relationships" id="261" r:id="Rcfbdd09151d14849"/>
-    <p:sldId xmlns:r="http://schemas.openxmlformats.org/officeDocument/2006/relationships" id="262" r:id="R1918b2c469e3467d"/>
-    <p:sldId xmlns:r="http://schemas.openxmlformats.org/officeDocument/2006/relationships" id="263" r:id="R3f2569718bde48e9"/>
-    <p:sldId xmlns:r="http://schemas.openxmlformats.org/officeDocument/2006/relationships" id="264" r:id="R0528a5415ab444c7"/>
+    <p:sldId xmlns:r="http://schemas.openxmlformats.org/officeDocument/2006/relationships" id="256" r:id="R4c462ac7ce754e2e"/>
+    <p:sldId xmlns:r="http://schemas.openxmlformats.org/officeDocument/2006/relationships" id="257" r:id="R1cdfd47e214d41e3"/>
+    <p:sldId xmlns:r="http://schemas.openxmlformats.org/officeDocument/2006/relationships" id="258" r:id="R63b1e67466b04161"/>
+    <p:sldId xmlns:r="http://schemas.openxmlformats.org/officeDocument/2006/relationships" id="259" r:id="R1c08ae3cfd824346"/>
+    <p:sldId xmlns:r="http://schemas.openxmlformats.org/officeDocument/2006/relationships" id="260" r:id="R9ad51ebed64e481c"/>
+    <p:sldId xmlns:r="http://schemas.openxmlformats.org/officeDocument/2006/relationships" id="261" r:id="Rc7f2c822f7b44a57"/>
+    <p:sldId xmlns:r="http://schemas.openxmlformats.org/officeDocument/2006/relationships" id="262" r:id="Ra02485f6a0774ae5"/>
+    <p:sldId xmlns:r="http://schemas.openxmlformats.org/officeDocument/2006/relationships" id="263" r:id="Rc433028e13974cae"/>
+    <p:sldId xmlns:r="http://schemas.openxmlformats.org/officeDocument/2006/relationships" id="264" r:id="R57d57c4a5cbf4cdc"/>
+    <p:sldId xmlns:r="http://schemas.openxmlformats.org/officeDocument/2006/relationships" id="265" r:id="R07374f3e5fd7498a"/>
   </p:sldIdLst>
   <p:sldSz cx="12192000" cy="6858000"/>
   <p:notesSz cx="6858000" cy="9144000"/>
@@ -450,7 +451,7 @@
           <a:lstStyle xmlns:a="http://schemas.openxmlformats.org/drawingml/2006/main"/>
           <a:p xmlns:a="http://schemas.openxmlformats.org/drawingml/2006/main">
             <a:r>
-              <a:t>Здравствуйте. Мы представляем Astana Walks, помощника для коротких прогулок в Астане. Он решает первую задачу НИЦ Smart City: учитывает стартовую точку, интересы и время человека, ищет подходящие городские места и объясняет рекомендации. Наш пользователь может быть жителем, гостем города или туристом, у которого есть свободный час. Ему нужен небольшой понятный план, а не ещё один длинный список заведений. Начнём с обычной ситуации возле EXPO.</a:t>
+              <a:t>Здравствуйте. Astana Walks помогает жителю или гостю Астаны выбрать короткую прогулку. Мы решаем первую задачу НИЦ Smart City: учитываем старт, интересы и свободное время, находим до трёх городских мест и объясняем выбор. Вместо длинного списка человек получает небольшой план с возвращением, источниками и понятными ограничениями. Начнём с ситуации возле EXPO.</a:t>
             </a:r>
           </a:p>
           <a:p xmlns:a="http://schemas.openxmlformats.org/drawingml/2006/main">
@@ -471,6 +472,111 @@
           <a:p xmlns:a="http://schemas.openxmlformats.org/drawingml/2006/main">
             <a:r>
               <a:t>https://github.com/ltybcs/astana-walks-ai</a:t>
+            </a:r>
+          </a:p>
+        </p:txBody>
+      </p:sp>
+      <p:sp>
+        <p:nvSpPr>
+          <p:cNvPr id="4" name="Slide Number Placeholder 3"/>
+          <p:cNvSpPr>
+            <a:spLocks xmlns:a="http://schemas.openxmlformats.org/drawingml/2006/main" noGrp="1"/>
+          </p:cNvSpPr>
+          <p:nvPr>
+            <p:ph type="sldNum" idx="5"/>
+          </p:nvPr>
+        </p:nvSpPr>
+        <p:spPr/>
+        <p:txBody>
+          <a:bodyPr xmlns:a="http://schemas.openxmlformats.org/drawingml/2006/main"/>
+          <a:lstStyle xmlns:a="http://schemas.openxmlformats.org/drawingml/2006/main"/>
+          <a:p xmlns:a="http://schemas.openxmlformats.org/drawingml/2006/main"/>
+        </p:txBody>
+      </p:sp>
+    </p:spTree>
+  </p:cSld>
+  <p:clrMapOvr>
+    <a:masterClrMapping xmlns:a="http://schemas.openxmlformats.org/drawingml/2006/main"/>
+  </p:clrMapOvr>
+</p:notes>
+</file>
+
+<file path=ppt/notesSlides/notesSlide10.xml><?xml version="1.0" encoding="utf-8"?>
+<p:notes xmlns:p="http://schemas.openxmlformats.org/presentationml/2006/main">
+  <p:cSld>
+    <p:spTree>
+      <p:nvGrpSpPr>
+        <p:cNvPr id="1" name=""/>
+        <p:cNvGrpSpPr/>
+        <p:nvPr/>
+      </p:nvGrpSpPr>
+      <p:grpSpPr>
+        <a:xfrm xmlns:a="http://schemas.openxmlformats.org/drawingml/2006/main"/>
+      </p:grpSpPr>
+      <p:sp>
+        <p:nvSpPr>
+          <p:cNvPr id="2" name="Slide Image Placeholder 1"/>
+          <p:cNvSpPr>
+            <a:spLocks xmlns:a="http://schemas.openxmlformats.org/drawingml/2006/main" noGrp="1"/>
+          </p:cNvSpPr>
+          <p:nvPr>
+            <p:ph type="sldImg" idx="0"/>
+          </p:nvPr>
+        </p:nvSpPr>
+        <p:spPr/>
+      </p:sp>
+      <p:sp>
+        <p:nvSpPr>
+          <p:cNvPr id="3" name="Notes Placeholder 2"/>
+          <p:cNvSpPr>
+            <a:spLocks xmlns:a="http://schemas.openxmlformats.org/drawingml/2006/main" noGrp="1"/>
+          </p:cNvSpPr>
+          <p:nvPr>
+            <p:ph type="body" idx="1"/>
+          </p:nvPr>
+        </p:nvSpPr>
+        <p:spPr/>
+        <p:txBody>
+          <a:bodyPr xmlns:a="http://schemas.openxmlformats.org/drawingml/2006/main"/>
+          <a:lstStyle xmlns:a="http://schemas.openxmlformats.org/drawingml/2006/main"/>
+          <a:p xmlns:a="http://schemas.openxmlformats.org/drawingml/2006/main">
+            <a:r>
+              <a:t>Для передачи подготовлены исходники, данные с происхождением, сценарии, ограничения и материалы запуска. Прежний снимок сохранён отдельно от расширенной версии. YouTube-публикацию пользователь решил выполнить самостоятельно позже, поэтому ссылка не подменяется вымышленным адресом. Временный сайт зависит от включённого компьютера и туннеля. Проект остаётся прототипом: путь приблизителен, полевой проверки и гарантии безопасности нет. Спасибо, готовы показать фактический сценарий.</a:t>
+            </a:r>
+          </a:p>
+          <a:p xmlns:a="http://schemas.openxmlformats.org/drawingml/2006/main">
+            <a:r>
+              <a:t/>
+            </a:r>
+          </a:p>
+          <a:p xmlns:a="http://schemas.openxmlformats.org/drawingml/2006/main">
+            <a:r>
+              <a:t>Источники и доказательства:</a:t>
+            </a:r>
+          </a:p>
+          <a:p xmlns:a="http://schemas.openxmlformats.org/drawingml/2006/main">
+            <a:r>
+              <a:t>https://github.com/ltybcs/astana-walks-ai</a:t>
+            </a:r>
+          </a:p>
+          <a:p xmlns:a="http://schemas.openxmlformats.org/drawingml/2006/main">
+            <a:r>
+              <a:t>https://entire-burn-cricket-ashley.trycloudflare.com/</a:t>
+            </a:r>
+          </a:p>
+          <a:p xmlns:a="http://schemas.openxmlformats.org/drawingml/2006/main">
+            <a:r>
+              <a:t>output/https-check.json</a:t>
+            </a:r>
+          </a:p>
+          <a:p xmlns:a="http://schemas.openxmlformats.org/drawingml/2006/main">
+            <a:r>
+              <a:t>Пользователь выбрал самостоятельную загрузку позже; публикация YouTube не подтверждена.</a:t>
+            </a:r>
+          </a:p>
+          <a:p xmlns:a="http://schemas.openxmlformats.org/drawingml/2006/main">
+            <a:r>
+              <a:t>Снимок материалов: 2026-10-20T03:12:28+05:00</a:t>
             </a:r>
           </a:p>
         </p:txBody>
@@ -540,7 +646,7 @@
           <a:lstStyle xmlns:a="http://schemas.openxmlformats.org/drawingml/2006/main"/>
           <a:p xmlns:a="http://schemas.openxmlformats.org/drawingml/2006/main">
             <a:r>
-              <a:t>В этом проверочном сценарии человек говорит: «У меня 45 минут возле Mega, хочу короткую прогулку». Он выбирает старт возле EXPO и располагает 45 минутами. Система предлагает 1 место: NU Park. Расчётный план занимает 42 минут вместе с возвращением. Мы включаем возврат, чтобы короткая прогулка не закончилась далеко от исходной точки. Расстояние рассчитываем приближённо и прямо об этом сообщаем. Реальные переходы, ограждения и состояние тротуаров пока требуют отдельной проверки.</a:t>
+              <a:t>Пользователь говорит: «У меня 45 минут возле Mega, хочу короткую прогулку». Старт в этом примере смоделирован. При бюджете 45 минут найдены NU Park. Расчётный план занимает 42 минут вместе с возвращением. Посещение и обратная дорога входят в бюджет. Расстояние пока геометрическое: мы прямо предупреждаем, что переходы, ограды и состояние тротуаров могут изменить реальный путь.</a:t>
             </a:r>
           </a:p>
           <a:p xmlns:a="http://schemas.openxmlformats.org/drawingml/2006/main">
@@ -630,7 +736,7 @@
           <a:lstStyle xmlns:a="http://schemas.openxmlformats.org/drawingml/2006/main"/>
           <a:p xmlns:a="http://schemas.openxmlformats.org/drawingml/2006/main">
             <a:r>
-              <a:t>Так выглядит фактический ответ работающего приложения. Пользователь задаёт интересы, время и смоделированный старт, затем получает до трёх рекомендаций. У каждого места видно, почему оно подходит, сколько займёт посещение и что можно там сделать. Рядом находится ссылка на источник. Мы различаем факт из каталога и предложенную идею действия. Например, внешний осмотр архитектуры можно предложить, но нельзя объявить текущую выставку без подтверждения. Пользователь также видит предупреждения и фактический режим генерации. Интерфейс ориентирован на телефон, его можно установить как PWA. Для установки на реальном телефоне нужен HTTPS. Офлайн доступна только оболочка. Подбор требует сервера, ответы API в кэш не попадают. Пользователь подтвердил установку на телефон (Android, Chrome) и запуск по иконке. Работу без сети на этом устройстве мы не проверяли.</a:t>
+              <a:t>На фактическом снимке UI план занимает 44 минуты: здесь выбрана другая публичная точка старта, чем в проверке на 42 минуты. В карточке видны объяснение, идея действия, расчётное время, источник и режим генерации. Сведения POI отделены от предложенного действия. Мобильный интерфейс поддерживает установку PWA. Оболочка доступна без сети, но новый подбор требует backend, а ответы API не кэшируются. Установку предыдущей версии на Android с Chrome и запуск по иконке пользователь подтвердил ранее. Новые функции и работу без сети на физическом телефоне отдельно не проверяли.</a:t>
             </a:r>
           </a:p>
           <a:p xmlns:a="http://schemas.openxmlformats.org/drawingml/2006/main">
@@ -655,12 +761,32 @@
           </a:p>
           <a:p xmlns:a="http://schemas.openxmlformats.org/drawingml/2006/main">
             <a:r>
-              <a:t>Режим на момент сборки: llama.cpp b11739 (CPU, loopback) / Qwen3-4B-Instruct-2507 Q4_K_M (Unsloth) / astana-local</a:t>
+              <a:t>Режим показанного сценария: RAG + LLM</a:t>
+            </a:r>
+          </a:p>
+          <a:p xmlns:a="http://schemas.openxmlformats.org/drawingml/2006/main">
+            <a:r>
+              <a:t>UI: 44 мин; evaluator: 42 мин. Разные публичные старты.</a:t>
+            </a:r>
+          </a:p>
+          <a:p xmlns:a="http://schemas.openxmlformats.org/drawingml/2006/main">
+            <a:r>
+              <a:t>output/ui-check.json</a:t>
+            </a:r>
+          </a:p>
+          <a:p xmlns:a="http://schemas.openxmlformats.org/drawingml/2006/main">
+            <a:r>
+              <a:t>Настроенная генерация: llama.cpp b11739 (CPU, loopback) / Qwen3-4B-Instruct-2507 Q4_K_M (Unsloth) / astana-local</a:t>
             </a:r>
           </a:p>
           <a:p xmlns:a="http://schemas.openxmlformats.org/drawingml/2006/main">
             <a:r>
               <a:t>output/live-explanations.json</a:t>
+            </a:r>
+          </a:p>
+          <a:p xmlns:a="http://schemas.openxmlformats.org/drawingml/2006/main">
+            <a:r>
+              <a:t>Полное проверенное объяснение: Парк соответствует интересу в прогулке на воздухе</a:t>
             </a:r>
           </a:p>
           <a:p xmlns:a="http://schemas.openxmlformats.org/drawingml/2006/main">
@@ -740,7 +866,7 @@
           <a:lstStyle xmlns:a="http://schemas.openxmlformats.org/drawingml/2006/main"/>
           <a:p xmlns:a="http://schemas.openxmlformats.org/drawingml/2006/main">
             <a:r>
-              <a:t>RAG начинается с данных. Автоматический сборщик получает публичные точки из набора Astana POI / OpenStreetMap, нормализует их и сохраняет происхождение. Затем поиск BM25 сопоставляет текст интересов с описаниями и категориями. Мы учитываем расстояние, время суток и обязательные ограничения. Планировщик выбирает достижимую последовательность мест и рассчитывает возврат. Модель Qwen3-4B-Instruct-2507 Q4_K_M (Unsloth) / astana-local получила только найденные POI и сформировала объяснения. После генерации приложение проверяет ссылки на найденные места и ограничения плана. При отказе провайдера оно показывает локальный ответ и честно меняет название режима.</a:t>
+              <a:t>Теперь у приложения есть настоящая уличная карта Leaflet с подложкой OpenStreetMap. На ней видны места каталога, начало и пронумерованные остановки. Карту можно перемещать и масштабировать, а источник открыть из маркера. Линии соединяют остановки по прямой: это схема плана, а не пешеходная навигация. При недоступности подложки остаются точки и список. Внешний сервис тайлов получает IP и область просмотра.</a:t>
             </a:r>
           </a:p>
           <a:p xmlns:a="http://schemas.openxmlformats.org/drawingml/2006/main">
@@ -755,22 +881,27 @@
           </a:p>
           <a:p xmlns:a="http://schemas.openxmlformats.org/drawingml/2006/main">
             <a:r>
-              <a:t>app/retrieval.py</a:t>
-            </a:r>
-          </a:p>
-          <a:p xmlns:a="http://schemas.openxmlformats.org/drawingml/2006/main">
-            <a:r>
-              <a:t>app/generation.py</a:t>
-            </a:r>
-          </a:p>
-          <a:p xmlns:a="http://schemas.openxmlformats.org/drawingml/2006/main">
-            <a:r>
-              <a:t>app/llm.py</a:t>
-            </a:r>
-          </a:p>
-          <a:p xmlns:a="http://schemas.openxmlformats.org/drawingml/2006/main">
-            <a:r>
-              <a:t>Actual report: output/evaluation-live.json. 5/5 main scenarios, 87/87 tests. 4/4 eligible scenarios validated, 4 provider calls in main scenarios.</a:t>
+              <a:t>output/map-desktop.jpg</a:t>
+            </a:r>
+          </a:p>
+          <a:p xmlns:a="http://schemas.openxmlformats.org/drawingml/2006/main">
+            <a:r>
+              <a:t>data/poi.astana.json</a:t>
+            </a:r>
+          </a:p>
+          <a:p xmlns:a="http://schemas.openxmlformats.org/drawingml/2006/main">
+            <a:r>
+              <a:t>© OpenStreetMap contributors</a:t>
+            </a:r>
+          </a:p>
+          <a:p xmlns:a="http://schemas.openxmlformats.org/drawingml/2006/main">
+            <a:r>
+              <a:t>web/map.js</a:t>
+            </a:r>
+          </a:p>
+          <a:p xmlns:a="http://schemas.openxmlformats.org/drawingml/2006/main">
+            <a:r>
+              <a:t>Прямые отрезки не являются дорожным графом; тайлы требуют сети.</a:t>
             </a:r>
           </a:p>
         </p:txBody>
@@ -840,7 +971,7 @@
           <a:lstStyle xmlns:a="http://schemas.openxmlformats.org/drawingml/2006/main"/>
           <a:p xmlns:a="http://schemas.openxmlformats.org/drawingml/2006/main">
             <a:r>
-              <a:t>В текущем наборе 738 реальных POI. Дата сбора: 20.10.2026. У объектов есть название, координаты, категория и короткое описание. Если источник содержит часы работы или подтверждённые свойства, мы сохраняем их вместе с ID источника и ссылкой. Автоматический сбор воспроизводим через скрипт и сохранённый снимок данных. Это сведения источника, а не наша полевая проверка каждого места. Поэтому отсутствие информации остаётся неизвестностью. Атрибуция: © OpenStreetMap contributors. Условия данных: ODbL 1.0.</a:t>
+              <a:t>RAG начинается с автоматически собранных публичных POI. BM25 и категории сопоставляют интересы с описаниями, затем планировщик учитывает расстояние, возврат и обязательные ограничения. Модель получает только найденные публичные факты и признаки интересов. После генерации проверяются идентификаторы, структура и известные рискованные утверждения. В записанных основных сценариях LLM принята в 4 из 4 непустых основных сценариев. Локальный fallback использован в 0 случаях. Основные ответы повторно проверены новым guard без генерации; семейный пресет сгенерирован отдельно. Это не новый полный последовательный прогон. Пустая выдача при отсутствии подтверждённой розетки не требует вызова модели. Проверка структуры не гарантирует смысловую достоверность каждой будущей фразы.</a:t>
             </a:r>
           </a:p>
           <a:p xmlns:a="http://schemas.openxmlformats.org/drawingml/2006/main">
@@ -855,27 +986,22 @@
           </a:p>
           <a:p xmlns:a="http://schemas.openxmlformats.org/drawingml/2006/main">
             <a:r>
-              <a:t>data/poi.astana.json</a:t>
-            </a:r>
-          </a:p>
-          <a:p xmlns:a="http://schemas.openxmlformats.org/drawingml/2006/main">
-            <a:r>
-              <a:t>https://www.openstreetmap.org/copyright</a:t>
-            </a:r>
-          </a:p>
-          <a:p xmlns:a="http://schemas.openxmlformats.org/drawingml/2006/main">
-            <a:r>
-              <a:t>© OpenStreetMap contributors</a:t>
-            </a:r>
-          </a:p>
-          <a:p xmlns:a="http://schemas.openxmlformats.org/drawingml/2006/main">
-            <a:r>
-              <a:t>ODbL 1.0</a:t>
-            </a:r>
-          </a:p>
-          <a:p xmlns:a="http://schemas.openxmlformats.org/drawingml/2006/main">
-            <a:r>
-              <a:t>SHA-256 набора: eb5ebd1a3bd13bbae5ce5005a663a3ac0a0dbcb94b9dabfaa4d774f9610bee08</a:t>
+              <a:t>app/retrieval.py</a:t>
+            </a:r>
+          </a:p>
+          <a:p xmlns:a="http://schemas.openxmlformats.org/drawingml/2006/main">
+            <a:r>
+              <a:t>app/generation.py</a:t>
+            </a:r>
+          </a:p>
+          <a:p xmlns:a="http://schemas.openxmlformats.org/drawingml/2006/main">
+            <a:r>
+              <a:t>app/llm.py</a:t>
+            </a:r>
+          </a:p>
+          <a:p xmlns:a="http://schemas.openxmlformats.org/drawingml/2006/main">
+            <a:r>
+              <a:t>Actual report: output/evaluation-live.json. 5/5 main scenarios, 131/131 tests. 4/4 eligible scenarios validated, 4 recorded provider calls in main scenarios. Свидетельства получены в разное время: 4 основных ответа повторно проверены новым guard без генерации, семейный пресет сгенерирован отдельно (1 вызов). Принято 5 ответов; всего наблюдалось 6 уникальных вызовов, включая исторический отказ. Это не новый последовательный прогон всех генераций.</a:t>
             </a:r>
           </a:p>
         </p:txBody>
@@ -945,7 +1071,7 @@
           <a:lstStyle xmlns:a="http://schemas.openxmlformats.org/drawingml/2006/main"/>
           <a:p xmlns:a="http://schemas.openxmlformats.org/drawingml/2006/main">
             <a:r>
-              <a:t>Мы проверили 5 сценариев из условия хакатона. Автоматический набор содержит 87 пройденных тестов. В сценариях проверяем число рекомендаций, бюджет времени с возвратом, наличие источников и соблюдение явных ограничений. Прогулка возле EXPO должна давать конкретные достижимые места. Запрос про розетку требует подтверждения источника. Тишина остаётся неизвестной, а явное требование только тихого места включает строгий фильтр. Детский сценарий не должен обещать безопасность без данных. Для туриста учитывается прогулка, но не дорога в аэропорт. Ночью неизвестные часы не превращаются в обещание открытого заведения.</a:t>
+              <a:t>В поставляемом снимке 1267 реальных OSM POI, собранных 20.10.2026. Для 1010 мест часы не указаны. Мы сохраняем источник, дату, исходный снимок и лицензию. Обновление OSM включается по согласию: срок свежести составляет сутки, а при сетевой ошибке сохраняется последний целый набор. Отдельный живой поиск 2ГИС возвращает одну страницу до десяти карточек по выбранной категории. Лимит — двадцать попыток за скользящие сутки, включая ошибки. Эти карточки не сохраняются и не смешиваются с OSM или RAG.</a:t>
             </a:r>
           </a:p>
           <a:p xmlns:a="http://schemas.openxmlformats.org/drawingml/2006/main">
@@ -960,17 +1086,37 @@
           </a:p>
           <a:p xmlns:a="http://schemas.openxmlformats.org/drawingml/2006/main">
             <a:r>
-              <a:t>output/evaluation.json</a:t>
-            </a:r>
-          </a:p>
-          <a:p xmlns:a="http://schemas.openxmlformats.org/drawingml/2006/main">
-            <a:r>
-              <a:t>output/evaluation.json</a:t>
-            </a:r>
-          </a:p>
-          <a:p xmlns:a="http://schemas.openxmlformats.org/drawingml/2006/main">
-            <a:r>
-              <a:t>Проверки фиксируют поведение прототипа. Они не измеряют удовлетворённость жителей и безопасность городских маршрутов.</a:t>
+              <a:t>data/poi.astana.json</a:t>
+            </a:r>
+          </a:p>
+          <a:p xmlns:a="http://schemas.openxmlformats.org/drawingml/2006/main">
+            <a:r>
+              <a:t>https://www.openstreetmap.org/copyright</a:t>
+            </a:r>
+          </a:p>
+          <a:p xmlns:a="http://schemas.openxmlformats.org/drawingml/2006/main">
+            <a:r>
+              <a:t>© OpenStreetMap contributors</a:t>
+            </a:r>
+          </a:p>
+          <a:p xmlns:a="http://schemas.openxmlformats.org/drawingml/2006/main">
+            <a:r>
+              <a:t>ODbL 1.0</a:t>
+            </a:r>
+          </a:p>
+          <a:p xmlns:a="http://schemas.openxmlformats.org/drawingml/2006/main">
+            <a:r>
+              <a:t>SHA-256 набора: 07dc0a3eb3a9b76b1c8121253cf5c5f1f46d67d991c5eb6b7823d45fccc0aa1e</a:t>
+            </a:r>
+          </a:p>
+          <a:p xmlns:a="http://schemas.openxmlformats.org/drawingml/2006/main">
+            <a:r>
+              <a:t>app/data_refresh.py</a:t>
+            </a:r>
+          </a:p>
+          <a:p xmlns:a="http://schemas.openxmlformats.org/drawingml/2006/main">
+            <a:r>
+              <a:t>app/dgis_live.py</a:t>
             </a:r>
           </a:p>
         </p:txBody>
@@ -1040,7 +1186,7 @@
           <a:lstStyle xmlns:a="http://schemas.openxmlformats.org/drawingml/2006/main"/>
           <a:p xmlns:a="http://schemas.openxmlformats.org/drawingml/2006/main">
             <a:r>
-              <a:t>Локация нужна только для текущего ответа. Приложение не создаёт аккаунт, историю прогулок или аналитический профиль. Оно не сохраняет запросы и точные координаты в журнале или localStorage. Во внешнюю модель можно передать только признаки интересов и отобранные публичные POI. Исходный пользовательский текст, координаты старта, расстояния и расчётные времена в этот запрос не включаем. Ключ находится только на backend. Ссылки на источники, неизвестные свойства и честные предупреждения помогают человеку оценить совет самостоятельно.</a:t>
+              <a:t>Отчёт содержит пять основных сценариев и 131 пройденных автоматических тестов. Проверяются бюджет с возвратом, источники, число рекомендаций и явные ограничения. Тишина не считается доказанной по категории кафе. Розетка требует источника. Детская категория не доказывает безопасность, а ночной запрос не делает неизвестные часы круглосуточными. Дополнительный семейный UI-пресет записан отдельно. Формальный pass и ручное чтение объяснений отвечают на разные вопросы.</a:t>
             </a:r>
           </a:p>
           <a:p xmlns:a="http://schemas.openxmlformats.org/drawingml/2006/main">
@@ -1055,22 +1201,17 @@
           </a:p>
           <a:p xmlns:a="http://schemas.openxmlformats.org/drawingml/2006/main">
             <a:r>
-              <a:t>docs/PRIVACY.md</a:t>
-            </a:r>
-          </a:p>
-          <a:p xmlns:a="http://schemas.openxmlformats.org/drawingml/2006/main">
-            <a:r>
-              <a:t>app/server.py</a:t>
-            </a:r>
-          </a:p>
-          <a:p xmlns:a="http://schemas.openxmlformats.org/drawingml/2006/main">
-            <a:r>
-              <a:t>app/llm.py</a:t>
-            </a:r>
-          </a:p>
-          <a:p xmlns:a="http://schemas.openxmlformats.org/drawingml/2006/main">
-            <a:r>
-              <a:t>LLM получает признаки интересов и найденные публичные POI: name, category, description, features. Исходный запрос, origin, координаты, расчётные времена, расстояния и opening_hours не передаются. Числа и расписания отображаются отдельно из backend, а не генерируются в свободном тексте.</a:t>
+              <a:t>output/evaluation.json</a:t>
+            </a:r>
+          </a:p>
+          <a:p xmlns:a="http://schemas.openxmlformats.org/drawingml/2006/main">
+            <a:r>
+              <a:t>output/evaluation.json</a:t>
+            </a:r>
+          </a:p>
+          <a:p xmlns:a="http://schemas.openxmlformats.org/drawingml/2006/main">
+            <a:r>
+              <a:t>Проверки фиксируют поведение прототипа. Они не измеряют удовлетворённость жителей и безопасность городских маршрутов.</a:t>
             </a:r>
           </a:p>
         </p:txBody>
@@ -1140,7 +1281,7 @@
           <a:lstStyle xmlns:a="http://schemas.openxmlformats.org/drawingml/2006/main"/>
           <a:p xmlns:a="http://schemas.openxmlformats.org/drawingml/2006/main">
             <a:r>
-              <a:t>Бизнес-гипотеза проекта: предложить помощника отелям и туристическим стойкам, где гостю часто нужен план на небольшой промежуток времени. Это ещё не подтверждённый спрос. В пилоте мы хотим измерить долю выбранных планов и полезность объяснений. Любые будущие коммерческие рекомендации потребуют явной маркировки. Развитие начнём с пешеходной маршрутизации и более надёжной проверки часов работы. После этого проведём оценку с жителями и добавим казахский и английский языки. Эти возможности пока входят в план развития.</a:t>
+              <a:t>Приложение не создаёт аккаунт или историю прогулок и не сохраняет запросы и точные координаты в логах или localStorage. Исходный запрос и старт не передаются модели. 2ГИС получает только фиксированную категорию и границы Астаны; на диске остаются времена попыток для лимита. Уличные тайлы раскрывают область просмотра. Временное HTTPS-демо передаёт трафик через Cloudflare к локальному backend. Поэтому локальная модель не означает, что весь сетевой путь ограничен устройством пользователя.</a:t>
             </a:r>
           </a:p>
           <a:p xmlns:a="http://schemas.openxmlformats.org/drawingml/2006/main">
@@ -1155,12 +1296,27 @@
           </a:p>
           <a:p xmlns:a="http://schemas.openxmlformats.org/drawingml/2006/main">
             <a:r>
-              <a:t>docs/CONCEPT.md</a:t>
-            </a:r>
-          </a:p>
-          <a:p xmlns:a="http://schemas.openxmlformats.org/drawingml/2006/main">
-            <a:r>
-              <a:t>Бизнес-модель и пилот — гипотезы команды. Выручка и спрос не измерялись.</a:t>
+              <a:t>docs/PRIVACY.md</a:t>
+            </a:r>
+          </a:p>
+          <a:p xmlns:a="http://schemas.openxmlformats.org/drawingml/2006/main">
+            <a:r>
+              <a:t>app/server.py</a:t>
+            </a:r>
+          </a:p>
+          <a:p xmlns:a="http://schemas.openxmlformats.org/drawingml/2006/main">
+            <a:r>
+              <a:t>app/llm.py</a:t>
+            </a:r>
+          </a:p>
+          <a:p xmlns:a="http://schemas.openxmlformats.org/drawingml/2006/main">
+            <a:r>
+              <a:t>web/map.js</a:t>
+            </a:r>
+          </a:p>
+          <a:p xmlns:a="http://schemas.openxmlformats.org/drawingml/2006/main">
+            <a:r>
+              <a:t>LLM получает признаки интересов и найденные публичные POI: name, category, description, features. Исходный запрос, origin, координаты, расчётные времена, расстояния и opening_hours не передаются. Числа и расписания отображаются отдельно из backend, а не генерируются в свободном тексте.</a:t>
             </a:r>
           </a:p>
         </p:txBody>
@@ -1230,7 +1386,7 @@
           <a:lstStyle xmlns:a="http://schemas.openxmlformats.org/drawingml/2006/main"/>
           <a:p xmlns:a="http://schemas.openxmlformats.org/drawingml/2006/main">
             <a:r>
-              <a:t>В репозитории находятся работающий прототип, автоматический сборщик, зафиксированный набор POI, инструкции запуска и проверок. Мы подготовили документ сценариев и ограничений, презентацию и демонстрацию. Основные ограничения сохраняются: путь приблизительный, городские данные могут быть неполными, события и безопасность маршрута в реальном времени не проверяются. Astana Walks уже показывает, как связать интересы человека, доступное время и объяснимые рекомендации из конкретных источников. Спасибо, готовы показать сценарий и ответить на вопросы. Временный HTTPS-сайт доступен, пока работают наш компьютер и туннель.</a:t>
+              <a:t>Бизнес-гипотеза — помощник для отелей и туристических стоек, где гостю нужен план на короткое свободное время. Спрос пока не подтверждён. В пилоте измерим долю выбранных планов и полезность объяснений. Следующие шаги — маршрутизация по пешеходным дорогам, проверка свежести часов, оценка с жителями и казахский с английским. Будущие платные позиции потребуют явной маркировки.</a:t>
             </a:r>
           </a:p>
           <a:p xmlns:a="http://schemas.openxmlformats.org/drawingml/2006/main">
@@ -1245,27 +1401,12 @@
           </a:p>
           <a:p xmlns:a="http://schemas.openxmlformats.org/drawingml/2006/main">
             <a:r>
-              <a:t>https://github.com/ltybcs/astana-walks-ai</a:t>
-            </a:r>
-          </a:p>
-          <a:p xmlns:a="http://schemas.openxmlformats.org/drawingml/2006/main">
-            <a:r>
-              <a:t>https://entire-burn-cricket-ashley.trycloudflare.com/</a:t>
-            </a:r>
-          </a:p>
-          <a:p xmlns:a="http://schemas.openxmlformats.org/drawingml/2006/main">
-            <a:r>
-              <a:t>output/https-check.json</a:t>
-            </a:r>
-          </a:p>
-          <a:p xmlns:a="http://schemas.openxmlformats.org/drawingml/2006/main">
-            <a:r>
-              <a:t>Публикация YouTube не подтверждена.</a:t>
-            </a:r>
-          </a:p>
-          <a:p xmlns:a="http://schemas.openxmlformats.org/drawingml/2006/main">
-            <a:r>
-              <a:t>Снимок материалов: 2026-10-20T01:51:50+05:00</a:t>
+              <a:t>docs/CONCEPT.md</a:t>
+            </a:r>
+          </a:p>
+          <a:p xmlns:a="http://schemas.openxmlformats.org/drawingml/2006/main">
+            <a:r>
+              <a:t>Бизнес-модель и пилот — гипотезы команды. Выручка и спрос не измерялись.</a:t>
             </a:r>
           </a:p>
         </p:txBody>
@@ -1312,7 +1453,7 @@
           <p:cNvPr id="3" name="Title">
             <a:extLst xmlns:a="http://schemas.openxmlformats.org/drawingml/2006/main">
               <a:ext uri="{FF2B5EF4-FFF2-40B4-BE49-F238E27FC236}">
-                <a16:creationId xmlns:a16="http://schemas.microsoft.com/office/drawing/2014/main" id="{90E32B78-2C92-46BE-BEA7-B165F29D5D1C}"/>
+                <a16:creationId xmlns:a16="http://schemas.microsoft.com/office/drawing/2014/main" id="{107D009A-7CFC-4859-93DA-892050DBB845}"/>
               </a:ext>
             </a:extLst>
           </p:cNvPr>
@@ -1541,7 +1682,7 @@
           <p:cNvPr id="2" name="Subtitle">
             <a:extLst xmlns:a="http://schemas.openxmlformats.org/drawingml/2006/main">
               <a:ext uri="{FF2B5EF4-FFF2-40B4-BE49-F238E27FC236}">
-                <a16:creationId xmlns:a16="http://schemas.microsoft.com/office/drawing/2014/main" id="{9ED7B129-1CBF-4F38-BAAC-A031BA34B563}"/>
+                <a16:creationId xmlns:a16="http://schemas.microsoft.com/office/drawing/2014/main" id="{56581531-6E38-4E0C-93C2-37330BE132BA}"/>
               </a:ext>
             </a:extLst>
           </p:cNvPr>
@@ -1787,7 +1928,7 @@
           <p:cNvPr id="2" name="Section title">
             <a:extLst xmlns:a="http://schemas.openxmlformats.org/drawingml/2006/main">
               <a:ext uri="{FF2B5EF4-FFF2-40B4-BE49-F238E27FC236}">
-                <a16:creationId xmlns:a16="http://schemas.microsoft.com/office/drawing/2014/main" id="{58056A12-FCC6-433C-A143-06A8F29F5ED7}"/>
+                <a16:creationId xmlns:a16="http://schemas.microsoft.com/office/drawing/2014/main" id="{17BFA982-1C6E-4ECA-97FC-DBCAF2943091}"/>
               </a:ext>
             </a:extLst>
           </p:cNvPr>
@@ -2033,7 +2174,7 @@
           <p:cNvPr id="3" name="Title">
             <a:extLst xmlns:a="http://schemas.openxmlformats.org/drawingml/2006/main">
               <a:ext uri="{FF2B5EF4-FFF2-40B4-BE49-F238E27FC236}">
-                <a16:creationId xmlns:a16="http://schemas.microsoft.com/office/drawing/2014/main" id="{4EFB76A8-0592-41AD-A39F-AC6D928D7957}"/>
+                <a16:creationId xmlns:a16="http://schemas.microsoft.com/office/drawing/2014/main" id="{93C24B1A-7CCC-436A-9B88-700C7EBDBA80}"/>
               </a:ext>
             </a:extLst>
           </p:cNvPr>
@@ -2262,7 +2403,7 @@
           <p:cNvPr id="2" name="Body">
             <a:extLst xmlns:a="http://schemas.openxmlformats.org/drawingml/2006/main">
               <a:ext uri="{FF2B5EF4-FFF2-40B4-BE49-F238E27FC236}">
-                <a16:creationId xmlns:a16="http://schemas.microsoft.com/office/drawing/2014/main" id="{8139A8E5-1000-431B-8ABF-782322653A76}"/>
+                <a16:creationId xmlns:a16="http://schemas.microsoft.com/office/drawing/2014/main" id="{D8057C59-92FD-4CA7-883E-8484CF1ABEDE}"/>
               </a:ext>
             </a:extLst>
           </p:cNvPr>
@@ -2508,7 +2649,7 @@
           <p:cNvPr id="4" name="Title">
             <a:extLst xmlns:a="http://schemas.openxmlformats.org/drawingml/2006/main">
               <a:ext uri="{FF2B5EF4-FFF2-40B4-BE49-F238E27FC236}">
-                <a16:creationId xmlns:a16="http://schemas.microsoft.com/office/drawing/2014/main" id="{63D14604-29EA-4B0A-ACE3-80A55EB1E757}"/>
+                <a16:creationId xmlns:a16="http://schemas.microsoft.com/office/drawing/2014/main" id="{AC16BC51-5137-4A82-A793-229D17DE295D}"/>
               </a:ext>
             </a:extLst>
           </p:cNvPr>
@@ -2737,7 +2878,7 @@
           <p:cNvPr id="2" name="Left column">
             <a:extLst xmlns:a="http://schemas.openxmlformats.org/drawingml/2006/main">
               <a:ext uri="{FF2B5EF4-FFF2-40B4-BE49-F238E27FC236}">
-                <a16:creationId xmlns:a16="http://schemas.microsoft.com/office/drawing/2014/main" id="{957F22FC-D710-43BB-A97B-2D5AECACC1FA}"/>
+                <a16:creationId xmlns:a16="http://schemas.microsoft.com/office/drawing/2014/main" id="{D4A39316-1FD5-40C9-A86F-D1FB1B827CAD}"/>
               </a:ext>
             </a:extLst>
           </p:cNvPr>
@@ -2966,7 +3107,7 @@
           <p:cNvPr id="3" name="Right column">
             <a:extLst xmlns:a="http://schemas.openxmlformats.org/drawingml/2006/main">
               <a:ext uri="{FF2B5EF4-FFF2-40B4-BE49-F238E27FC236}">
-                <a16:creationId xmlns:a16="http://schemas.microsoft.com/office/drawing/2014/main" id="{83814E70-A210-4360-8205-C23A4BC40912}"/>
+                <a16:creationId xmlns:a16="http://schemas.microsoft.com/office/drawing/2014/main" id="{FE307B69-57D3-4F8F-BDD7-ACF80251BD80}"/>
               </a:ext>
             </a:extLst>
           </p:cNvPr>
@@ -3212,7 +3353,7 @@
           <p:cNvPr id="3" name="Title">
             <a:extLst xmlns:a="http://schemas.openxmlformats.org/drawingml/2006/main">
               <a:ext uri="{FF2B5EF4-FFF2-40B4-BE49-F238E27FC236}">
-                <a16:creationId xmlns:a16="http://schemas.microsoft.com/office/drawing/2014/main" id="{0B0B7DB2-1D71-4B79-B389-A45E607382F7}"/>
+                <a16:creationId xmlns:a16="http://schemas.microsoft.com/office/drawing/2014/main" id="{DE248D3D-C41A-411E-9BC4-9A6507467ABD}"/>
               </a:ext>
             </a:extLst>
           </p:cNvPr>
@@ -3441,7 +3582,7 @@
           <p:cNvPr id="2" name="Left column">
             <a:extLst xmlns:a="http://schemas.openxmlformats.org/drawingml/2006/main">
               <a:ext uri="{FF2B5EF4-FFF2-40B4-BE49-F238E27FC236}">
-                <a16:creationId xmlns:a16="http://schemas.microsoft.com/office/drawing/2014/main" id="{4937E863-1339-4EB9-8FE0-B2BA022FF70D}"/>
+                <a16:creationId xmlns:a16="http://schemas.microsoft.com/office/drawing/2014/main" id="{6E5CC414-F49C-4F5A-98D9-B4EB72830F76}"/>
               </a:ext>
             </a:extLst>
           </p:cNvPr>
@@ -3708,12 +3849,12 @@
   </p:cSld>
   <p:clrMap bg1="lt1" tx1="dk1" bg2="lt2" tx2="dk2" accent1="accent1" accent2="accent2" accent3="accent3" accent4="accent4" accent5="accent5" accent6="accent6" hlink="hlink" folHlink="folHlink"/>
   <p:sldLayoutIdLst>
-    <p:sldLayoutId xmlns:r="http://schemas.openxmlformats.org/officeDocument/2006/relationships" id="2147483649" r:id="R7aaa9aacb98e4aae"/>
-    <p:sldLayoutId xmlns:r="http://schemas.openxmlformats.org/officeDocument/2006/relationships" id="2147483650" r:id="R428f218594214ca0"/>
-    <p:sldLayoutId xmlns:r="http://schemas.openxmlformats.org/officeDocument/2006/relationships" id="2147483651" r:id="R7bb2361b3f7843fe"/>
-    <p:sldLayoutId xmlns:r="http://schemas.openxmlformats.org/officeDocument/2006/relationships" id="2147483652" r:id="Rf5f0d8e7691a47a6"/>
-    <p:sldLayoutId xmlns:r="http://schemas.openxmlformats.org/officeDocument/2006/relationships" id="2147483653" r:id="R9838393bc2e2400c"/>
-    <p:sldLayoutId xmlns:r="http://schemas.openxmlformats.org/officeDocument/2006/relationships" id="2147483654" r:id="Refadae30127843d6"/>
+    <p:sldLayoutId xmlns:r="http://schemas.openxmlformats.org/officeDocument/2006/relationships" id="2147483649" r:id="R804b95f7dd6a460b"/>
+    <p:sldLayoutId xmlns:r="http://schemas.openxmlformats.org/officeDocument/2006/relationships" id="2147483650" r:id="Ra903abb7c165482f"/>
+    <p:sldLayoutId xmlns:r="http://schemas.openxmlformats.org/officeDocument/2006/relationships" id="2147483651" r:id="R8129a54959ad425c"/>
+    <p:sldLayoutId xmlns:r="http://schemas.openxmlformats.org/officeDocument/2006/relationships" id="2147483652" r:id="R411e7ba65f0048a4"/>
+    <p:sldLayoutId xmlns:r="http://schemas.openxmlformats.org/officeDocument/2006/relationships" id="2147483653" r:id="Re4ddd2190577451a"/>
+    <p:sldLayoutId xmlns:r="http://schemas.openxmlformats.org/officeDocument/2006/relationships" id="2147483654" r:id="Re520e588eac9431a"/>
   </p:sldLayoutIdLst>
   <p:txStyles>
     <p:titleStyle>
@@ -4264,7 +4405,7 @@
           <p:cNvPr id="5" name="">
             <a:extLst xmlns:a="http://schemas.openxmlformats.org/drawingml/2006/main">
               <a:ext uri="{FF2B5EF4-FFF2-40B4-BE49-F238E27FC236}">
-                <a16:creationId xmlns:a16="http://schemas.microsoft.com/office/drawing/2014/main" id="{4DB08E18-3956-460D-A175-D3F9AF176C21}"/>
+                <a16:creationId xmlns:a16="http://schemas.microsoft.com/office/drawing/2014/main" id="{09DE3DE9-FE3D-445A-BFD7-F027EE4AC361}"/>
               </a:ext>
             </a:extLst>
           </p:cNvPr>
@@ -4420,7 +4561,7 @@
           <p:cNvPr id="2" name="">
             <a:extLst xmlns:a="http://schemas.openxmlformats.org/drawingml/2006/main">
               <a:ext uri="{FF2B5EF4-FFF2-40B4-BE49-F238E27FC236}">
-                <a16:creationId xmlns:a16="http://schemas.microsoft.com/office/drawing/2014/main" id="{43EEC26B-BDEE-4B52-AE7A-F1840B5B1C36}"/>
+                <a16:creationId xmlns:a16="http://schemas.microsoft.com/office/drawing/2014/main" id="{98916371-3B05-41DC-BC20-B0FE2BEC7685}"/>
               </a:ext>
             </a:extLst>
           </p:cNvPr>
@@ -4576,7 +4717,7 @@
           <p:cNvPr id="3" name="">
             <a:extLst xmlns:a="http://schemas.openxmlformats.org/drawingml/2006/main">
               <a:ext uri="{FF2B5EF4-FFF2-40B4-BE49-F238E27FC236}">
-                <a16:creationId xmlns:a16="http://schemas.microsoft.com/office/drawing/2014/main" id="{7BC0B30F-ADF2-4955-9C83-37ABE3FC6F90}"/>
+                <a16:creationId xmlns:a16="http://schemas.microsoft.com/office/drawing/2014/main" id="{BA86985D-6765-46CE-BCEE-337381F0E826}"/>
               </a:ext>
             </a:extLst>
           </p:cNvPr>
@@ -4755,7 +4896,7 @@
           <p:cNvPr id="4" name="">
             <a:extLst xmlns:a="http://schemas.openxmlformats.org/drawingml/2006/main">
               <a:ext uri="{FF2B5EF4-FFF2-40B4-BE49-F238E27FC236}">
-                <a16:creationId xmlns:a16="http://schemas.microsoft.com/office/drawing/2014/main" id="{4363EE0B-2A29-4AE7-A83E-BB474AAA794B}"/>
+                <a16:creationId xmlns:a16="http://schemas.microsoft.com/office/drawing/2014/main" id="{EB57C898-C163-4776-902B-04336069A168}"/>
               </a:ext>
             </a:extLst>
           </p:cNvPr>
@@ -4932,7 +5073,954 @@
     </p:spTree>
     <p:extLst>
       <p:ext uri="{BB962C8B-B14F-4D97-AF65-F5344CB8AC3E}">
-        <p14:creationId xmlns:p14="http://schemas.microsoft.com/office/powerpoint/2010/main" val="1269389283"/>
+        <p14:creationId xmlns:p14="http://schemas.microsoft.com/office/powerpoint/2010/main" val="1742233500"/>
+      </p:ext>
+    </p:extLst>
+  </p:cSld>
+</p:sld>
+</file>
+
+<file path=ppt/slides/slide10.xml><?xml version="1.0" encoding="utf-8"?>
+<p:sld xmlns:p="http://schemas.openxmlformats.org/presentationml/2006/main">
+  <p:cSld>
+    <p:bg>
+      <p:bgPr>
+        <a:solidFill xmlns:a="http://schemas.openxmlformats.org/drawingml/2006/main">
+          <a:srgbClr val="F4F0E5"/>
+        </a:solidFill>
+      </p:bgPr>
+    </p:bg>
+    <p:spTree>
+      <p:nvGrpSpPr>
+        <p:cNvPr id="1" name=""/>
+        <p:cNvGrpSpPr/>
+        <p:nvPr/>
+      </p:nvGrpSpPr>
+      <p:grpSpPr>
+        <a:xfrm xmlns:a="http://schemas.openxmlformats.org/drawingml/2006/main"/>
+      </p:grpSpPr>
+      <p:sp>
+        <p:nvSpPr>
+          <p:cNvPr id="6" name="">
+            <a:extLst xmlns:a="http://schemas.openxmlformats.org/drawingml/2006/main">
+              <a:ext uri="{FF2B5EF4-FFF2-40B4-BE49-F238E27FC236}">
+                <a16:creationId xmlns:a16="http://schemas.microsoft.com/office/drawing/2014/main" id="{3B89308A-ABFC-49E7-927B-B3CBBD19AC8E}"/>
+              </a:ext>
+            </a:extLst>
+          </p:cNvPr>
+          <p:cNvSpPr>
+            <a:spLocks xmlns:a="http://schemas.openxmlformats.org/drawingml/2006/main" noGrp="1"/>
+          </p:cNvSpPr>
+          <p:nvPr/>
+        </p:nvSpPr>
+        <p:spPr>
+          <a:xfrm xmlns:a="http://schemas.openxmlformats.org/drawingml/2006/main">
+            <a:off x="685800" y="504825"/>
+            <a:ext cx="10820400" cy="857250"/>
+          </a:xfrm>
+          <a:prstGeom xmlns:a="http://schemas.openxmlformats.org/drawingml/2006/main" prst="rect">
+            <a:avLst/>
+          </a:prstGeom>
+          <a:noFill xmlns:a="http://schemas.openxmlformats.org/drawingml/2006/main"/>
+          <a:ln xmlns:a="http://schemas.openxmlformats.org/drawingml/2006/main" w="0">
+            <a:noFill/>
+          </a:ln>
+        </p:spPr>
+        <p:txBody>
+          <a:bodyPr xmlns:a="http://schemas.openxmlformats.org/drawingml/2006/main" wrap="square" lIns="0" tIns="0" rIns="0" bIns="0" anchor="t"/>
+          <a:lstStyle xmlns:a="http://schemas.openxmlformats.org/drawingml/2006/main">
+            <a:defPPr algn="l">
+              <a:defRPr sz="3600" b="1">
+                <a:solidFill>
+                  <a:srgbClr val="123C3B"/>
+                </a:solidFill>
+                <a:latin typeface="Arial"/>
+                <a:ea typeface="Arial"/>
+                <a:cs typeface="Arial"/>
+              </a:defRPr>
+            </a:defPPr>
+            <a:lvl1pPr algn="l">
+              <a:defRPr sz="3600" b="1">
+                <a:solidFill>
+                  <a:srgbClr val="123C3B"/>
+                </a:solidFill>
+                <a:latin typeface="Arial"/>
+                <a:ea typeface="Arial"/>
+                <a:cs typeface="Arial"/>
+              </a:defRPr>
+            </a:lvl1pPr>
+            <a:lvl2pPr algn="l">
+              <a:defRPr sz="3600" b="1">
+                <a:solidFill>
+                  <a:srgbClr val="123C3B"/>
+                </a:solidFill>
+                <a:latin typeface="Arial"/>
+                <a:ea typeface="Arial"/>
+                <a:cs typeface="Arial"/>
+              </a:defRPr>
+            </a:lvl2pPr>
+            <a:lvl3pPr algn="l">
+              <a:defRPr sz="3600" b="1">
+                <a:solidFill>
+                  <a:srgbClr val="123C3B"/>
+                </a:solidFill>
+                <a:latin typeface="Arial"/>
+                <a:ea typeface="Arial"/>
+                <a:cs typeface="Arial"/>
+              </a:defRPr>
+            </a:lvl3pPr>
+            <a:lvl4pPr algn="l">
+              <a:defRPr sz="3600" b="1">
+                <a:solidFill>
+                  <a:srgbClr val="123C3B"/>
+                </a:solidFill>
+                <a:latin typeface="Arial"/>
+                <a:ea typeface="Arial"/>
+                <a:cs typeface="Arial"/>
+              </a:defRPr>
+            </a:lvl4pPr>
+            <a:lvl5pPr algn="l">
+              <a:defRPr sz="3600" b="1">
+                <a:solidFill>
+                  <a:srgbClr val="123C3B"/>
+                </a:solidFill>
+                <a:latin typeface="Arial"/>
+                <a:ea typeface="Arial"/>
+                <a:cs typeface="Arial"/>
+              </a:defRPr>
+            </a:lvl5pPr>
+            <a:lvl6pPr algn="l">
+              <a:defRPr sz="3600" b="1">
+                <a:solidFill>
+                  <a:srgbClr val="123C3B"/>
+                </a:solidFill>
+                <a:latin typeface="Arial"/>
+                <a:ea typeface="Arial"/>
+                <a:cs typeface="Arial"/>
+              </a:defRPr>
+            </a:lvl6pPr>
+            <a:lvl7pPr algn="l">
+              <a:defRPr sz="3600" b="1">
+                <a:solidFill>
+                  <a:srgbClr val="123C3B"/>
+                </a:solidFill>
+                <a:latin typeface="Arial"/>
+                <a:ea typeface="Arial"/>
+                <a:cs typeface="Arial"/>
+              </a:defRPr>
+            </a:lvl7pPr>
+            <a:lvl8pPr algn="l">
+              <a:defRPr sz="3600" b="1">
+                <a:solidFill>
+                  <a:srgbClr val="123C3B"/>
+                </a:solidFill>
+                <a:latin typeface="Arial"/>
+                <a:ea typeface="Arial"/>
+                <a:cs typeface="Arial"/>
+              </a:defRPr>
+            </a:lvl8pPr>
+            <a:lvl9pPr algn="l">
+              <a:defRPr sz="3600" b="1">
+                <a:solidFill>
+                  <a:srgbClr val="123C3B"/>
+                </a:solidFill>
+                <a:latin typeface="Arial"/>
+                <a:ea typeface="Arial"/>
+                <a:cs typeface="Arial"/>
+              </a:defRPr>
+            </a:lvl9pPr>
+          </a:lstStyle>
+          <a:p xmlns:a="http://schemas.openxmlformats.org/drawingml/2006/main">
+            <a:pPr algn="l">
+              <a:defRPr sz="3600" b="1">
+                <a:solidFill>
+                  <a:srgbClr val="123C3B"/>
+                </a:solidFill>
+                <a:latin typeface="Arial"/>
+                <a:ea typeface="Arial"/>
+                <a:cs typeface="Arial"/>
+              </a:defRPr>
+            </a:pPr>
+            <a:r>
+              <a:rPr sz="3600" b="1">
+                <a:solidFill>
+                  <a:srgbClr val="123C3B"/>
+                </a:solidFill>
+                <a:latin typeface="Arial"/>
+                <a:ea typeface="Arial"/>
+                <a:cs typeface="Arial"/>
+              </a:rPr>
+              <a:t>Материалы проекта</a:t>
+            </a:r>
+          </a:p>
+        </p:txBody>
+      </p:sp>
+      <p:sp>
+        <p:nvSpPr>
+          <p:cNvPr id="2" name="">
+            <a:extLst xmlns:a="http://schemas.openxmlformats.org/drawingml/2006/main">
+              <a:ext uri="{FF2B5EF4-FFF2-40B4-BE49-F238E27FC236}">
+                <a16:creationId xmlns:a16="http://schemas.microsoft.com/office/drawing/2014/main" id="{9DBBD48A-9323-44F6-B508-D3D05CF507A8}"/>
+              </a:ext>
+            </a:extLst>
+          </p:cNvPr>
+          <p:cNvSpPr>
+            <a:spLocks xmlns:a="http://schemas.openxmlformats.org/drawingml/2006/main" noGrp="1"/>
+          </p:cNvSpPr>
+          <p:nvPr/>
+        </p:nvSpPr>
+        <p:spPr>
+          <a:xfrm xmlns:a="http://schemas.openxmlformats.org/drawingml/2006/main">
+            <a:off x="11068050" y="6267450"/>
+            <a:ext cx="438150" cy="285750"/>
+          </a:xfrm>
+          <a:prstGeom xmlns:a="http://schemas.openxmlformats.org/drawingml/2006/main" prst="rect">
+            <a:avLst/>
+          </a:prstGeom>
+          <a:noFill xmlns:a="http://schemas.openxmlformats.org/drawingml/2006/main"/>
+          <a:ln xmlns:a="http://schemas.openxmlformats.org/drawingml/2006/main" w="0">
+            <a:noFill/>
+          </a:ln>
+        </p:spPr>
+        <p:txBody>
+          <a:bodyPr xmlns:a="http://schemas.openxmlformats.org/drawingml/2006/main" wrap="square" lIns="0" tIns="0" rIns="0" bIns="0" anchor="t"/>
+          <a:lstStyle xmlns:a="http://schemas.openxmlformats.org/drawingml/2006/main">
+            <a:defPPr algn="l">
+              <a:defRPr sz="1275" b="0">
+                <a:solidFill>
+                  <a:srgbClr val="55716A"/>
+                </a:solidFill>
+                <a:latin typeface="Arial"/>
+                <a:ea typeface="Arial"/>
+                <a:cs typeface="Arial"/>
+              </a:defRPr>
+            </a:defPPr>
+            <a:lvl1pPr algn="l">
+              <a:defRPr sz="1275" b="0">
+                <a:solidFill>
+                  <a:srgbClr val="55716A"/>
+                </a:solidFill>
+                <a:latin typeface="Arial"/>
+                <a:ea typeface="Arial"/>
+                <a:cs typeface="Arial"/>
+              </a:defRPr>
+            </a:lvl1pPr>
+            <a:lvl2pPr algn="l">
+              <a:defRPr sz="1275" b="0">
+                <a:solidFill>
+                  <a:srgbClr val="55716A"/>
+                </a:solidFill>
+                <a:latin typeface="Arial"/>
+                <a:ea typeface="Arial"/>
+                <a:cs typeface="Arial"/>
+              </a:defRPr>
+            </a:lvl2pPr>
+            <a:lvl3pPr algn="l">
+              <a:defRPr sz="1275" b="0">
+                <a:solidFill>
+                  <a:srgbClr val="55716A"/>
+                </a:solidFill>
+                <a:latin typeface="Arial"/>
+                <a:ea typeface="Arial"/>
+                <a:cs typeface="Arial"/>
+              </a:defRPr>
+            </a:lvl3pPr>
+            <a:lvl4pPr algn="l">
+              <a:defRPr sz="1275" b="0">
+                <a:solidFill>
+                  <a:srgbClr val="55716A"/>
+                </a:solidFill>
+                <a:latin typeface="Arial"/>
+                <a:ea typeface="Arial"/>
+                <a:cs typeface="Arial"/>
+              </a:defRPr>
+            </a:lvl4pPr>
+            <a:lvl5pPr algn="l">
+              <a:defRPr sz="1275" b="0">
+                <a:solidFill>
+                  <a:srgbClr val="55716A"/>
+                </a:solidFill>
+                <a:latin typeface="Arial"/>
+                <a:ea typeface="Arial"/>
+                <a:cs typeface="Arial"/>
+              </a:defRPr>
+            </a:lvl5pPr>
+            <a:lvl6pPr algn="l">
+              <a:defRPr sz="1275" b="0">
+                <a:solidFill>
+                  <a:srgbClr val="55716A"/>
+                </a:solidFill>
+                <a:latin typeface="Arial"/>
+                <a:ea typeface="Arial"/>
+                <a:cs typeface="Arial"/>
+              </a:defRPr>
+            </a:lvl6pPr>
+            <a:lvl7pPr algn="l">
+              <a:defRPr sz="1275" b="0">
+                <a:solidFill>
+                  <a:srgbClr val="55716A"/>
+                </a:solidFill>
+                <a:latin typeface="Arial"/>
+                <a:ea typeface="Arial"/>
+                <a:cs typeface="Arial"/>
+              </a:defRPr>
+            </a:lvl7pPr>
+            <a:lvl8pPr algn="l">
+              <a:defRPr sz="1275" b="0">
+                <a:solidFill>
+                  <a:srgbClr val="55716A"/>
+                </a:solidFill>
+                <a:latin typeface="Arial"/>
+                <a:ea typeface="Arial"/>
+                <a:cs typeface="Arial"/>
+              </a:defRPr>
+            </a:lvl8pPr>
+            <a:lvl9pPr algn="l">
+              <a:defRPr sz="1275" b="0">
+                <a:solidFill>
+                  <a:srgbClr val="55716A"/>
+                </a:solidFill>
+                <a:latin typeface="Arial"/>
+                <a:ea typeface="Arial"/>
+                <a:cs typeface="Arial"/>
+              </a:defRPr>
+            </a:lvl9pPr>
+          </a:lstStyle>
+          <a:p xmlns:a="http://schemas.openxmlformats.org/drawingml/2006/main">
+            <a:pPr algn="l">
+              <a:defRPr sz="1275" b="0">
+                <a:solidFill>
+                  <a:srgbClr val="55716A"/>
+                </a:solidFill>
+                <a:latin typeface="Arial"/>
+                <a:ea typeface="Arial"/>
+                <a:cs typeface="Arial"/>
+              </a:defRPr>
+            </a:pPr>
+            <a:r>
+              <a:rPr sz="1275" b="0">
+                <a:solidFill>
+                  <a:srgbClr val="55716A"/>
+                </a:solidFill>
+                <a:latin typeface="Arial"/>
+                <a:ea typeface="Arial"/>
+                <a:cs typeface="Arial"/>
+              </a:rPr>
+              <a:t>10</a:t>
+            </a:r>
+          </a:p>
+        </p:txBody>
+      </p:sp>
+      <p:sp>
+        <p:nvSpPr>
+          <p:cNvPr id="3" name="">
+            <a:extLst xmlns:a="http://schemas.openxmlformats.org/drawingml/2006/main">
+              <a:ext uri="{FF2B5EF4-FFF2-40B4-BE49-F238E27FC236}">
+                <a16:creationId xmlns:a16="http://schemas.microsoft.com/office/drawing/2014/main" id="{8799A5AD-6F02-4855-B4A4-A62A00EA04E8}"/>
+              </a:ext>
+            </a:extLst>
+          </p:cNvPr>
+          <p:cNvSpPr>
+            <a:spLocks xmlns:a="http://schemas.openxmlformats.org/drawingml/2006/main" noGrp="1"/>
+          </p:cNvSpPr>
+          <p:nvPr/>
+        </p:nvSpPr>
+        <p:spPr>
+          <a:xfrm xmlns:a="http://schemas.openxmlformats.org/drawingml/2006/main">
+            <a:off x="685800" y="1828800"/>
+            <a:ext cx="10572750" cy="2409825"/>
+          </a:xfrm>
+          <a:prstGeom xmlns:a="http://schemas.openxmlformats.org/drawingml/2006/main" prst="rect">
+            <a:avLst/>
+          </a:prstGeom>
+          <a:noFill xmlns:a="http://schemas.openxmlformats.org/drawingml/2006/main"/>
+          <a:ln xmlns:a="http://schemas.openxmlformats.org/drawingml/2006/main" w="0">
+            <a:noFill/>
+          </a:ln>
+        </p:spPr>
+        <p:txBody>
+          <a:bodyPr xmlns:a="http://schemas.openxmlformats.org/drawingml/2006/main" wrap="square" lIns="0" tIns="0" rIns="0" bIns="0" anchor="t"/>
+          <a:lstStyle xmlns:a="http://schemas.openxmlformats.org/drawingml/2006/main">
+            <a:defPPr algn="l">
+              <a:defRPr sz="2925" b="1">
+                <a:solidFill>
+                  <a:srgbClr val="123C3B"/>
+                </a:solidFill>
+                <a:latin typeface="Arial"/>
+                <a:ea typeface="Arial"/>
+                <a:cs typeface="Arial"/>
+              </a:defRPr>
+            </a:defPPr>
+            <a:lvl1pPr algn="l">
+              <a:defRPr sz="2925" b="1">
+                <a:solidFill>
+                  <a:srgbClr val="123C3B"/>
+                </a:solidFill>
+                <a:latin typeface="Arial"/>
+                <a:ea typeface="Arial"/>
+                <a:cs typeface="Arial"/>
+              </a:defRPr>
+            </a:lvl1pPr>
+            <a:lvl2pPr algn="l">
+              <a:defRPr sz="2925" b="1">
+                <a:solidFill>
+                  <a:srgbClr val="123C3B"/>
+                </a:solidFill>
+                <a:latin typeface="Arial"/>
+                <a:ea typeface="Arial"/>
+                <a:cs typeface="Arial"/>
+              </a:defRPr>
+            </a:lvl2pPr>
+            <a:lvl3pPr algn="l">
+              <a:defRPr sz="2925" b="1">
+                <a:solidFill>
+                  <a:srgbClr val="123C3B"/>
+                </a:solidFill>
+                <a:latin typeface="Arial"/>
+                <a:ea typeface="Arial"/>
+                <a:cs typeface="Arial"/>
+              </a:defRPr>
+            </a:lvl3pPr>
+            <a:lvl4pPr algn="l">
+              <a:defRPr sz="2925" b="1">
+                <a:solidFill>
+                  <a:srgbClr val="123C3B"/>
+                </a:solidFill>
+                <a:latin typeface="Arial"/>
+                <a:ea typeface="Arial"/>
+                <a:cs typeface="Arial"/>
+              </a:defRPr>
+            </a:lvl4pPr>
+            <a:lvl5pPr algn="l">
+              <a:defRPr sz="2925" b="1">
+                <a:solidFill>
+                  <a:srgbClr val="123C3B"/>
+                </a:solidFill>
+                <a:latin typeface="Arial"/>
+                <a:ea typeface="Arial"/>
+                <a:cs typeface="Arial"/>
+              </a:defRPr>
+            </a:lvl5pPr>
+            <a:lvl6pPr algn="l">
+              <a:defRPr sz="2925" b="1">
+                <a:solidFill>
+                  <a:srgbClr val="123C3B"/>
+                </a:solidFill>
+                <a:latin typeface="Arial"/>
+                <a:ea typeface="Arial"/>
+                <a:cs typeface="Arial"/>
+              </a:defRPr>
+            </a:lvl6pPr>
+            <a:lvl7pPr algn="l">
+              <a:defRPr sz="2925" b="1">
+                <a:solidFill>
+                  <a:srgbClr val="123C3B"/>
+                </a:solidFill>
+                <a:latin typeface="Arial"/>
+                <a:ea typeface="Arial"/>
+                <a:cs typeface="Arial"/>
+              </a:defRPr>
+            </a:lvl7pPr>
+            <a:lvl8pPr algn="l">
+              <a:defRPr sz="2925" b="1">
+                <a:solidFill>
+                  <a:srgbClr val="123C3B"/>
+                </a:solidFill>
+                <a:latin typeface="Arial"/>
+                <a:ea typeface="Arial"/>
+                <a:cs typeface="Arial"/>
+              </a:defRPr>
+            </a:lvl8pPr>
+            <a:lvl9pPr algn="l">
+              <a:defRPr sz="2925" b="1">
+                <a:solidFill>
+                  <a:srgbClr val="123C3B"/>
+                </a:solidFill>
+                <a:latin typeface="Arial"/>
+                <a:ea typeface="Arial"/>
+                <a:cs typeface="Arial"/>
+              </a:defRPr>
+            </a:lvl9pPr>
+          </a:lstStyle>
+          <a:p xmlns:a="http://schemas.openxmlformats.org/drawingml/2006/main">
+            <a:pPr algn="l">
+              <a:defRPr sz="2925" b="1">
+                <a:solidFill>
+                  <a:srgbClr val="123C3B"/>
+                </a:solidFill>
+                <a:latin typeface="Arial"/>
+                <a:ea typeface="Arial"/>
+                <a:cs typeface="Arial"/>
+              </a:defRPr>
+            </a:pPr>
+            <a:r>
+              <a:rPr sz="2925" b="1">
+                <a:solidFill>
+                  <a:srgbClr val="123C3B"/>
+                </a:solidFill>
+                <a:latin typeface="Arial"/>
+                <a:ea typeface="Arial"/>
+                <a:cs typeface="Arial"/>
+              </a:rPr>
+              <a:t>Карта, мобильный прототип и PWA</a:t>
+            </a:r>
+          </a:p>
+          <a:p xmlns:a="http://schemas.openxmlformats.org/drawingml/2006/main">
+            <a:pPr algn="l">
+              <a:defRPr sz="2925" b="1">
+                <a:solidFill>
+                  <a:srgbClr val="123C3B"/>
+                </a:solidFill>
+                <a:latin typeface="Arial"/>
+                <a:ea typeface="Arial"/>
+                <a:cs typeface="Arial"/>
+              </a:defRPr>
+            </a:pPr>
+            <a:r>
+              <a:rPr sz="2925" b="1">
+                <a:solidFill>
+                  <a:srgbClr val="123C3B"/>
+                </a:solidFill>
+                <a:latin typeface="Arial"/>
+                <a:ea typeface="Arial"/>
+                <a:cs typeface="Arial"/>
+              </a:rPr>
+              <a:t>Автосбор и снимки данных</a:t>
+            </a:r>
+          </a:p>
+          <a:p xmlns:a="http://schemas.openxmlformats.org/drawingml/2006/main">
+            <a:pPr algn="l">
+              <a:defRPr sz="2925" b="1">
+                <a:solidFill>
+                  <a:srgbClr val="123C3B"/>
+                </a:solidFill>
+                <a:latin typeface="Arial"/>
+                <a:ea typeface="Arial"/>
+                <a:cs typeface="Arial"/>
+              </a:defRPr>
+            </a:pPr>
+            <a:r>
+              <a:rPr sz="2925" b="1">
+                <a:solidFill>
+                  <a:srgbClr val="123C3B"/>
+                </a:solidFill>
+                <a:latin typeface="Arial"/>
+                <a:ea typeface="Arial"/>
+                <a:cs typeface="Arial"/>
+              </a:rPr>
+              <a:t>Сценарии, презентация и инструкции</a:t>
+            </a:r>
+          </a:p>
+          <a:p xmlns:a="http://schemas.openxmlformats.org/drawingml/2006/main">
+            <a:pPr algn="l">
+              <a:defRPr sz="2925" b="1">
+                <a:solidFill>
+                  <a:srgbClr val="123C3B"/>
+                </a:solidFill>
+                <a:latin typeface="Arial"/>
+                <a:ea typeface="Arial"/>
+                <a:cs typeface="Arial"/>
+              </a:defRPr>
+            </a:pPr>
+            <a:r>
+              <a:rPr sz="2925" b="1">
+                <a:solidFill>
+                  <a:srgbClr val="123C3B"/>
+                </a:solidFill>
+                <a:latin typeface="Arial"/>
+                <a:ea typeface="Arial"/>
+                <a:cs typeface="Arial"/>
+              </a:rPr>
+              <a:t>Видео: пользователь загрузит позже</a:t>
+            </a:r>
+          </a:p>
+        </p:txBody>
+      </p:sp>
+      <p:sp>
+        <p:nvSpPr>
+          <p:cNvPr id="4" name="">
+            <a:extLst xmlns:a="http://schemas.openxmlformats.org/drawingml/2006/main">
+              <a:ext uri="{FF2B5EF4-FFF2-40B4-BE49-F238E27FC236}">
+                <a16:creationId xmlns:a16="http://schemas.microsoft.com/office/drawing/2014/main" id="{423079FA-1293-4C55-A14C-5816E4ADF757}"/>
+              </a:ext>
+            </a:extLst>
+          </p:cNvPr>
+          <p:cNvSpPr>
+            <a:spLocks xmlns:a="http://schemas.openxmlformats.org/drawingml/2006/main" noGrp="1"/>
+          </p:cNvSpPr>
+          <p:nvPr/>
+        </p:nvSpPr>
+        <p:spPr>
+          <a:xfrm xmlns:a="http://schemas.openxmlformats.org/drawingml/2006/main">
+            <a:off x="685800" y="4495800"/>
+            <a:ext cx="10572750" cy="1371600"/>
+          </a:xfrm>
+          <a:prstGeom xmlns:a="http://schemas.openxmlformats.org/drawingml/2006/main" prst="rect">
+            <a:avLst/>
+          </a:prstGeom>
+          <a:noFill xmlns:a="http://schemas.openxmlformats.org/drawingml/2006/main"/>
+          <a:ln xmlns:a="http://schemas.openxmlformats.org/drawingml/2006/main" w="0">
+            <a:noFill/>
+          </a:ln>
+        </p:spPr>
+        <p:txBody>
+          <a:bodyPr xmlns:a="http://schemas.openxmlformats.org/drawingml/2006/main" wrap="square" lIns="0" tIns="0" rIns="0" bIns="0" anchor="t"/>
+          <a:lstStyle xmlns:a="http://schemas.openxmlformats.org/drawingml/2006/main">
+            <a:defPPr algn="l">
+              <a:defRPr sz="2025" b="0">
+                <a:solidFill>
+                  <a:srgbClr val="55716A"/>
+                </a:solidFill>
+                <a:latin typeface="Arial"/>
+                <a:ea typeface="Arial"/>
+                <a:cs typeface="Arial"/>
+              </a:defRPr>
+            </a:defPPr>
+            <a:lvl1pPr algn="l">
+              <a:defRPr sz="2025" b="0">
+                <a:solidFill>
+                  <a:srgbClr val="55716A"/>
+                </a:solidFill>
+                <a:latin typeface="Arial"/>
+                <a:ea typeface="Arial"/>
+                <a:cs typeface="Arial"/>
+              </a:defRPr>
+            </a:lvl1pPr>
+            <a:lvl2pPr algn="l">
+              <a:defRPr sz="2025" b="0">
+                <a:solidFill>
+                  <a:srgbClr val="55716A"/>
+                </a:solidFill>
+                <a:latin typeface="Arial"/>
+                <a:ea typeface="Arial"/>
+                <a:cs typeface="Arial"/>
+              </a:defRPr>
+            </a:lvl2pPr>
+            <a:lvl3pPr algn="l">
+              <a:defRPr sz="2025" b="0">
+                <a:solidFill>
+                  <a:srgbClr val="55716A"/>
+                </a:solidFill>
+                <a:latin typeface="Arial"/>
+                <a:ea typeface="Arial"/>
+                <a:cs typeface="Arial"/>
+              </a:defRPr>
+            </a:lvl3pPr>
+            <a:lvl4pPr algn="l">
+              <a:defRPr sz="2025" b="0">
+                <a:solidFill>
+                  <a:srgbClr val="55716A"/>
+                </a:solidFill>
+                <a:latin typeface="Arial"/>
+                <a:ea typeface="Arial"/>
+                <a:cs typeface="Arial"/>
+              </a:defRPr>
+            </a:lvl4pPr>
+            <a:lvl5pPr algn="l">
+              <a:defRPr sz="2025" b="0">
+                <a:solidFill>
+                  <a:srgbClr val="55716A"/>
+                </a:solidFill>
+                <a:latin typeface="Arial"/>
+                <a:ea typeface="Arial"/>
+                <a:cs typeface="Arial"/>
+              </a:defRPr>
+            </a:lvl5pPr>
+            <a:lvl6pPr algn="l">
+              <a:defRPr sz="2025" b="0">
+                <a:solidFill>
+                  <a:srgbClr val="55716A"/>
+                </a:solidFill>
+                <a:latin typeface="Arial"/>
+                <a:ea typeface="Arial"/>
+                <a:cs typeface="Arial"/>
+              </a:defRPr>
+            </a:lvl6pPr>
+            <a:lvl7pPr algn="l">
+              <a:defRPr sz="2025" b="0">
+                <a:solidFill>
+                  <a:srgbClr val="55716A"/>
+                </a:solidFill>
+                <a:latin typeface="Arial"/>
+                <a:ea typeface="Arial"/>
+                <a:cs typeface="Arial"/>
+              </a:defRPr>
+            </a:lvl7pPr>
+            <a:lvl8pPr algn="l">
+              <a:defRPr sz="2025" b="0">
+                <a:solidFill>
+                  <a:srgbClr val="55716A"/>
+                </a:solidFill>
+                <a:latin typeface="Arial"/>
+                <a:ea typeface="Arial"/>
+                <a:cs typeface="Arial"/>
+              </a:defRPr>
+            </a:lvl8pPr>
+            <a:lvl9pPr algn="l">
+              <a:defRPr sz="2025" b="0">
+                <a:solidFill>
+                  <a:srgbClr val="55716A"/>
+                </a:solidFill>
+                <a:latin typeface="Arial"/>
+                <a:ea typeface="Arial"/>
+                <a:cs typeface="Arial"/>
+              </a:defRPr>
+            </a:lvl9pPr>
+          </a:lstStyle>
+          <a:p xmlns:a="http://schemas.openxmlformats.org/drawingml/2006/main">
+            <a:pPr algn="l">
+              <a:defRPr sz="2025" b="0">
+                <a:solidFill>
+                  <a:srgbClr val="55716A"/>
+                </a:solidFill>
+                <a:latin typeface="Arial"/>
+                <a:ea typeface="Arial"/>
+                <a:cs typeface="Arial"/>
+              </a:defRPr>
+            </a:pPr>
+            <a:r>
+              <a:rPr sz="2025" b="0">
+                <a:solidFill>
+                  <a:srgbClr val="55716A"/>
+                </a:solidFill>
+                <a:latin typeface="Arial"/>
+                <a:ea typeface="Arial"/>
+                <a:cs typeface="Arial"/>
+              </a:rPr>
+              <a:t>Ограничения: приблизительный путь, неполные POI,</a:t>
+            </a:r>
+          </a:p>
+          <a:p xmlns:a="http://schemas.openxmlformats.org/drawingml/2006/main">
+            <a:pPr algn="l">
+              <a:defRPr sz="2025" b="0">
+                <a:solidFill>
+                  <a:srgbClr val="55716A"/>
+                </a:solidFill>
+                <a:latin typeface="Arial"/>
+                <a:ea typeface="Arial"/>
+                <a:cs typeface="Arial"/>
+              </a:defRPr>
+            </a:pPr>
+            <a:r>
+              <a:rPr sz="2025" b="0">
+                <a:solidFill>
+                  <a:srgbClr val="55716A"/>
+                </a:solidFill>
+                <a:latin typeface="Arial"/>
+                <a:ea typeface="Arial"/>
+                <a:cs typeface="Arial"/>
+              </a:rPr>
+              <a:t>нет текущих событий и проверки безопасности</a:t>
+            </a:r>
+          </a:p>
+          <a:p xmlns:a="http://schemas.openxmlformats.org/drawingml/2006/main">
+            <a:pPr algn="l">
+              <a:defRPr sz="2025" b="0">
+                <a:solidFill>
+                  <a:srgbClr val="55716A"/>
+                </a:solidFill>
+                <a:latin typeface="Arial"/>
+                <a:ea typeface="Arial"/>
+                <a:cs typeface="Arial"/>
+              </a:defRPr>
+            </a:pPr>
+            <a:r>
+              <a:rPr sz="2025" b="0">
+                <a:solidFill>
+                  <a:srgbClr val="55716A"/>
+                </a:solidFill>
+                <a:latin typeface="Arial"/>
+                <a:ea typeface="Arial"/>
+                <a:cs typeface="Arial"/>
+              </a:rPr>
+              <a:t>Офлайн: оболочка PWA. Подбор требует сервера</a:t>
+            </a:r>
+          </a:p>
+          <a:p xmlns:a="http://schemas.openxmlformats.org/drawingml/2006/main">
+            <a:pPr algn="l">
+              <a:defRPr sz="2025" b="0">
+                <a:solidFill>
+                  <a:srgbClr val="55716A"/>
+                </a:solidFill>
+                <a:latin typeface="Arial"/>
+                <a:ea typeface="Arial"/>
+                <a:cs typeface="Arial"/>
+              </a:defRPr>
+            </a:pPr>
+            <a:r>
+              <a:rPr sz="2025" b="0">
+                <a:solidFill>
+                  <a:srgbClr val="55716A"/>
+                </a:solidFill>
+                <a:latin typeface="Arial"/>
+                <a:ea typeface="Arial"/>
+                <a:cs typeface="Arial"/>
+              </a:rPr>
+              <a:t>Демо зависит от включённых ПК и туннеля</a:t>
+            </a:r>
+          </a:p>
+        </p:txBody>
+      </p:sp>
+      <p:sp>
+        <p:nvSpPr>
+          <p:cNvPr id="5" name="">
+            <a:extLst xmlns:a="http://schemas.openxmlformats.org/drawingml/2006/main">
+              <a:ext uri="{FF2B5EF4-FFF2-40B4-BE49-F238E27FC236}">
+                <a16:creationId xmlns:a16="http://schemas.microsoft.com/office/drawing/2014/main" id="{433703DE-DBA1-4FAB-8C66-19F193C6DF4A}"/>
+              </a:ext>
+            </a:extLst>
+          </p:cNvPr>
+          <p:cNvSpPr>
+            <a:spLocks xmlns:a="http://schemas.openxmlformats.org/drawingml/2006/main" noGrp="1"/>
+          </p:cNvSpPr>
+          <p:nvPr/>
+        </p:nvSpPr>
+        <p:spPr>
+          <a:xfrm xmlns:a="http://schemas.openxmlformats.org/drawingml/2006/main">
+            <a:off x="685800" y="6000750"/>
+            <a:ext cx="10096500" cy="419100"/>
+          </a:xfrm>
+          <a:prstGeom xmlns:a="http://schemas.openxmlformats.org/drawingml/2006/main" prst="rect">
+            <a:avLst/>
+          </a:prstGeom>
+          <a:noFill xmlns:a="http://schemas.openxmlformats.org/drawingml/2006/main"/>
+          <a:ln xmlns:a="http://schemas.openxmlformats.org/drawingml/2006/main" w="0">
+            <a:noFill/>
+          </a:ln>
+        </p:spPr>
+        <p:txBody>
+          <a:bodyPr xmlns:a="http://schemas.openxmlformats.org/drawingml/2006/main" wrap="square" lIns="0" tIns="0" rIns="0" bIns="0" anchor="t"/>
+          <a:lstStyle xmlns:a="http://schemas.openxmlformats.org/drawingml/2006/main">
+            <a:defPPr algn="l">
+              <a:defRPr sz="2025" b="0">
+                <a:solidFill>
+                  <a:srgbClr val="123C3B"/>
+                </a:solidFill>
+                <a:latin typeface="Arial"/>
+                <a:ea typeface="Arial"/>
+                <a:cs typeface="Arial"/>
+              </a:defRPr>
+            </a:defPPr>
+            <a:lvl1pPr algn="l">
+              <a:defRPr sz="2025" b="0">
+                <a:solidFill>
+                  <a:srgbClr val="123C3B"/>
+                </a:solidFill>
+                <a:latin typeface="Arial"/>
+                <a:ea typeface="Arial"/>
+                <a:cs typeface="Arial"/>
+              </a:defRPr>
+            </a:lvl1pPr>
+            <a:lvl2pPr algn="l">
+              <a:defRPr sz="2025" b="0">
+                <a:solidFill>
+                  <a:srgbClr val="123C3B"/>
+                </a:solidFill>
+                <a:latin typeface="Arial"/>
+                <a:ea typeface="Arial"/>
+                <a:cs typeface="Arial"/>
+              </a:defRPr>
+            </a:lvl2pPr>
+            <a:lvl3pPr algn="l">
+              <a:defRPr sz="2025" b="0">
+                <a:solidFill>
+                  <a:srgbClr val="123C3B"/>
+                </a:solidFill>
+                <a:latin typeface="Arial"/>
+                <a:ea typeface="Arial"/>
+                <a:cs typeface="Arial"/>
+              </a:defRPr>
+            </a:lvl3pPr>
+            <a:lvl4pPr algn="l">
+              <a:defRPr sz="2025" b="0">
+                <a:solidFill>
+                  <a:srgbClr val="123C3B"/>
+                </a:solidFill>
+                <a:latin typeface="Arial"/>
+                <a:ea typeface="Arial"/>
+                <a:cs typeface="Arial"/>
+              </a:defRPr>
+            </a:lvl4pPr>
+            <a:lvl5pPr algn="l">
+              <a:defRPr sz="2025" b="0">
+                <a:solidFill>
+                  <a:srgbClr val="123C3B"/>
+                </a:solidFill>
+                <a:latin typeface="Arial"/>
+                <a:ea typeface="Arial"/>
+                <a:cs typeface="Arial"/>
+              </a:defRPr>
+            </a:lvl5pPr>
+            <a:lvl6pPr algn="l">
+              <a:defRPr sz="2025" b="0">
+                <a:solidFill>
+                  <a:srgbClr val="123C3B"/>
+                </a:solidFill>
+                <a:latin typeface="Arial"/>
+                <a:ea typeface="Arial"/>
+                <a:cs typeface="Arial"/>
+              </a:defRPr>
+            </a:lvl6pPr>
+            <a:lvl7pPr algn="l">
+              <a:defRPr sz="2025" b="0">
+                <a:solidFill>
+                  <a:srgbClr val="123C3B"/>
+                </a:solidFill>
+                <a:latin typeface="Arial"/>
+                <a:ea typeface="Arial"/>
+                <a:cs typeface="Arial"/>
+              </a:defRPr>
+            </a:lvl7pPr>
+            <a:lvl8pPr algn="l">
+              <a:defRPr sz="2025" b="0">
+                <a:solidFill>
+                  <a:srgbClr val="123C3B"/>
+                </a:solidFill>
+                <a:latin typeface="Arial"/>
+                <a:ea typeface="Arial"/>
+                <a:cs typeface="Arial"/>
+              </a:defRPr>
+            </a:lvl8pPr>
+            <a:lvl9pPr algn="l">
+              <a:defRPr sz="2025" b="0">
+                <a:solidFill>
+                  <a:srgbClr val="123C3B"/>
+                </a:solidFill>
+                <a:latin typeface="Arial"/>
+                <a:ea typeface="Arial"/>
+                <a:cs typeface="Arial"/>
+              </a:defRPr>
+            </a:lvl9pPr>
+          </a:lstStyle>
+          <a:p xmlns:a="http://schemas.openxmlformats.org/drawingml/2006/main">
+            <a:pPr algn="l">
+              <a:defRPr sz="2025" b="0">
+                <a:solidFill>
+                  <a:srgbClr val="123C3B"/>
+                </a:solidFill>
+                <a:latin typeface="Arial"/>
+                <a:ea typeface="Arial"/>
+                <a:cs typeface="Arial"/>
+              </a:defRPr>
+            </a:pPr>
+            <a:r>
+              <a:rPr sz="2025" b="0">
+                <a:solidFill>
+                  <a:srgbClr val="123C3B"/>
+                </a:solidFill>
+                <a:latin typeface="Arial"/>
+                <a:ea typeface="Arial"/>
+                <a:cs typeface="Arial"/>
+              </a:rPr>
+              <a:t>Временно: entire-burn-cricket-ashley.trycloudflare.com</a:t>
+            </a:r>
+          </a:p>
+        </p:txBody>
+      </p:sp>
+    </p:spTree>
+    <p:extLst>
+      <p:ext uri="{BB962C8B-B14F-4D97-AF65-F5344CB8AC3E}">
+        <p14:creationId xmlns:p14="http://schemas.microsoft.com/office/powerpoint/2010/main" val="1300593295"/>
       </p:ext>
     </p:extLst>
   </p:cSld>
@@ -4963,7 +6051,7 @@
           <p:cNvPr id="8" name="">
             <a:extLst xmlns:a="http://schemas.openxmlformats.org/drawingml/2006/main">
               <a:ext uri="{FF2B5EF4-FFF2-40B4-BE49-F238E27FC236}">
-                <a16:creationId xmlns:a16="http://schemas.microsoft.com/office/drawing/2014/main" id="{D2579A9F-16C8-4B6B-B192-404FCEE3A0D9}"/>
+                <a16:creationId xmlns:a16="http://schemas.microsoft.com/office/drawing/2014/main" id="{D8AC4EB2-0800-4961-A708-FE4BEBF4CD62}"/>
               </a:ext>
             </a:extLst>
           </p:cNvPr>
@@ -5119,7 +6207,7 @@
           <p:cNvPr id="2" name="">
             <a:extLst xmlns:a="http://schemas.openxmlformats.org/drawingml/2006/main">
               <a:ext uri="{FF2B5EF4-FFF2-40B4-BE49-F238E27FC236}">
-                <a16:creationId xmlns:a16="http://schemas.microsoft.com/office/drawing/2014/main" id="{8AAD6568-3FE6-4BDA-A5DA-ED1805E23AE1}"/>
+                <a16:creationId xmlns:a16="http://schemas.microsoft.com/office/drawing/2014/main" id="{ACCBC023-2D7E-4CD5-AC1E-77D3CFA1B7CF}"/>
               </a:ext>
             </a:extLst>
           </p:cNvPr>
@@ -5275,7 +6363,7 @@
           <p:cNvPr id="3" name="">
             <a:extLst xmlns:a="http://schemas.openxmlformats.org/drawingml/2006/main">
               <a:ext uri="{FF2B5EF4-FFF2-40B4-BE49-F238E27FC236}">
-                <a16:creationId xmlns:a16="http://schemas.microsoft.com/office/drawing/2014/main" id="{D999810D-0F86-4CC7-9AF5-83821B69CA2C}"/>
+                <a16:creationId xmlns:a16="http://schemas.microsoft.com/office/drawing/2014/main" id="{CFDCA61D-72CE-407E-B865-20FD472C3D3E}"/>
               </a:ext>
             </a:extLst>
           </p:cNvPr>
@@ -5431,7 +6519,7 @@
           <p:cNvPr id="4" name="">
             <a:extLst xmlns:a="http://schemas.openxmlformats.org/drawingml/2006/main">
               <a:ext uri="{FF2B5EF4-FFF2-40B4-BE49-F238E27FC236}">
-                <a16:creationId xmlns:a16="http://schemas.microsoft.com/office/drawing/2014/main" id="{A36E7892-F71E-42AC-8D6E-230F51DF2DF0}"/>
+                <a16:creationId xmlns:a16="http://schemas.microsoft.com/office/drawing/2014/main" id="{6CF6E5CF-DF49-49E4-BB4A-63358304BF8A}"/>
               </a:ext>
             </a:extLst>
           </p:cNvPr>
@@ -5610,7 +6698,7 @@
           <p:cNvPr id="5" name="">
             <a:extLst xmlns:a="http://schemas.openxmlformats.org/drawingml/2006/main">
               <a:ext uri="{FF2B5EF4-FFF2-40B4-BE49-F238E27FC236}">
-                <a16:creationId xmlns:a16="http://schemas.microsoft.com/office/drawing/2014/main" id="{624689A4-2EF0-4148-8114-0B6C80520CF7}"/>
+                <a16:creationId xmlns:a16="http://schemas.microsoft.com/office/drawing/2014/main" id="{2F0DCB17-5A85-4E4E-9800-243D00427AB1}"/>
               </a:ext>
             </a:extLst>
           </p:cNvPr>
@@ -5766,7 +6854,7 @@
           <p:cNvPr id="6" name="">
             <a:extLst xmlns:a="http://schemas.openxmlformats.org/drawingml/2006/main">
               <a:ext uri="{FF2B5EF4-FFF2-40B4-BE49-F238E27FC236}">
-                <a16:creationId xmlns:a16="http://schemas.microsoft.com/office/drawing/2014/main" id="{83CA6F20-7F13-406C-9F9A-C25F410A196F}"/>
+                <a16:creationId xmlns:a16="http://schemas.microsoft.com/office/drawing/2014/main" id="{F75B9D5E-4223-464D-9EA4-E8EB96570DEC}"/>
               </a:ext>
             </a:extLst>
           </p:cNvPr>
@@ -5922,7 +7010,7 @@
           <p:cNvPr id="7" name="">
             <a:extLst xmlns:a="http://schemas.openxmlformats.org/drawingml/2006/main">
               <a:ext uri="{FF2B5EF4-FFF2-40B4-BE49-F238E27FC236}">
-                <a16:creationId xmlns:a16="http://schemas.microsoft.com/office/drawing/2014/main" id="{4ABCE9D0-8019-4532-A49F-156217343A2E}"/>
+                <a16:creationId xmlns:a16="http://schemas.microsoft.com/office/drawing/2014/main" id="{3A340906-EF2C-4F89-A98A-76AEC12A03E5}"/>
               </a:ext>
             </a:extLst>
           </p:cNvPr>
@@ -6099,7 +7187,7 @@
     </p:spTree>
     <p:extLst>
       <p:ext uri="{BB962C8B-B14F-4D97-AF65-F5344CB8AC3E}">
-        <p14:creationId xmlns:p14="http://schemas.microsoft.com/office/powerpoint/2010/main" val="1401065890"/>
+        <p14:creationId xmlns:p14="http://schemas.microsoft.com/office/powerpoint/2010/main" val="752618075"/>
       </p:ext>
     </p:extLst>
   </p:cSld>
@@ -6130,7 +7218,7 @@
           <p:cNvPr id="10" name="">
             <a:extLst xmlns:a="http://schemas.openxmlformats.org/drawingml/2006/main">
               <a:ext uri="{FF2B5EF4-FFF2-40B4-BE49-F238E27FC236}">
-                <a16:creationId xmlns:a16="http://schemas.microsoft.com/office/drawing/2014/main" id="{CA2A121C-AD3E-463C-8356-717AF6B89FE1}"/>
+                <a16:creationId xmlns:a16="http://schemas.microsoft.com/office/drawing/2014/main" id="{B052F7A8-90E8-4344-A6EB-00FC4B30B1C7}"/>
               </a:ext>
             </a:extLst>
           </p:cNvPr>
@@ -6286,7 +7374,7 @@
           <p:cNvPr id="2" name="">
             <a:extLst xmlns:a="http://schemas.openxmlformats.org/drawingml/2006/main">
               <a:ext uri="{FF2B5EF4-FFF2-40B4-BE49-F238E27FC236}">
-                <a16:creationId xmlns:a16="http://schemas.microsoft.com/office/drawing/2014/main" id="{D6821282-3656-4A1F-9DD9-99C4E291964B}"/>
+                <a16:creationId xmlns:a16="http://schemas.microsoft.com/office/drawing/2014/main" id="{5C1AB58C-72BA-4FE6-B6A7-31390B8251E5}"/>
               </a:ext>
             </a:extLst>
           </p:cNvPr>
@@ -6442,7 +7530,7 @@
           <p:cNvPr id="3" name="">
             <a:extLst xmlns:a="http://schemas.openxmlformats.org/drawingml/2006/main">
               <a:ext uri="{FF2B5EF4-FFF2-40B4-BE49-F238E27FC236}">
-                <a16:creationId xmlns:a16="http://schemas.microsoft.com/office/drawing/2014/main" id="{BA68D78A-765D-463B-90B4-16E714BB4CB8}"/>
+                <a16:creationId xmlns:a16="http://schemas.microsoft.com/office/drawing/2014/main" id="{B7C58010-9D4B-417E-A47F-9BD12318DFDB}"/>
               </a:ext>
             </a:extLst>
           </p:cNvPr>
@@ -6452,14 +7540,14 @@
           <p:nvPr/>
         </p:nvPicPr>
         <p:blipFill>
-          <a:blip xmlns:r="http://schemas.openxmlformats.org/officeDocument/2006/relationships" xmlns:a="http://schemas.openxmlformats.org/drawingml/2006/main" r:embed="R9f1c30e3ce8f43a3"/>
-          <a:srcRect xmlns:a="http://schemas.openxmlformats.org/drawingml/2006/main" l="34500" t="5000" r="2500" b="23000"/>
+          <a:blip xmlns:r="http://schemas.openxmlformats.org/officeDocument/2006/relationships" xmlns:a="http://schemas.openxmlformats.org/drawingml/2006/main" r:embed="R0bbbd413c9374a5d"/>
+          <a:srcRect xmlns:a="http://schemas.openxmlformats.org/drawingml/2006/main" l="32500" t="49000" r="6500" b="1500"/>
           <a:stretch xmlns:a="http://schemas.openxmlformats.org/drawingml/2006/main"/>
         </p:blipFill>
         <p:spPr>
           <a:xfrm xmlns:a="http://schemas.openxmlformats.org/drawingml/2006/main">
-            <a:off x="5986355" y="1409700"/>
-            <a:ext cx="5248490" cy="4695825"/>
+            <a:off x="5715000" y="2044387"/>
+            <a:ext cx="5791200" cy="3426452"/>
           </a:xfrm>
           <a:prstGeom xmlns:a="http://schemas.openxmlformats.org/drawingml/2006/main" prst="rect">
             <a:avLst/>
@@ -6471,7 +7559,7 @@
           <p:cNvPr id="4" name="">
             <a:extLst xmlns:a="http://schemas.openxmlformats.org/drawingml/2006/main">
               <a:ext uri="{FF2B5EF4-FFF2-40B4-BE49-F238E27FC236}">
-                <a16:creationId xmlns:a16="http://schemas.microsoft.com/office/drawing/2014/main" id="{37EA7256-E38D-4DBD-BE0A-29546EA2A75C}"/>
+                <a16:creationId xmlns:a16="http://schemas.microsoft.com/office/drawing/2014/main" id="{6C479907-7CEB-415E-A53A-A2674C72565B}"/>
               </a:ext>
             </a:extLst>
           </p:cNvPr>
@@ -6481,7 +7569,7 @@
           <p:nvPr/>
         </p:nvPicPr>
         <p:blipFill>
-          <a:blip xmlns:r="http://schemas.openxmlformats.org/officeDocument/2006/relationships" xmlns:a="http://schemas.openxmlformats.org/drawingml/2006/main" r:embed="Rf941f96edda14986"/>
+          <a:blip xmlns:r="http://schemas.openxmlformats.org/officeDocument/2006/relationships" xmlns:a="http://schemas.openxmlformats.org/drawingml/2006/main" r:embed="R84510873cd114380"/>
           <a:stretch xmlns:a="http://schemas.openxmlformats.org/drawingml/2006/main"/>
         </p:blipFill>
         <p:spPr>
@@ -6499,7 +7587,7 @@
           <p:cNvPr id="5" name="">
             <a:extLst xmlns:a="http://schemas.openxmlformats.org/drawingml/2006/main">
               <a:ext uri="{FF2B5EF4-FFF2-40B4-BE49-F238E27FC236}">
-                <a16:creationId xmlns:a16="http://schemas.microsoft.com/office/drawing/2014/main" id="{EAB822CB-4EC0-407F-B3E1-E36F0D514D8F}"/>
+                <a16:creationId xmlns:a16="http://schemas.microsoft.com/office/drawing/2014/main" id="{43418A71-E005-4119-90EC-059923E4A4FC}"/>
               </a:ext>
             </a:extLst>
           </p:cNvPr>
@@ -6678,7 +7766,7 @@
           <p:cNvPr id="6" name="">
             <a:extLst xmlns:a="http://schemas.openxmlformats.org/drawingml/2006/main">
               <a:ext uri="{FF2B5EF4-FFF2-40B4-BE49-F238E27FC236}">
-                <a16:creationId xmlns:a16="http://schemas.microsoft.com/office/drawing/2014/main" id="{9EA1CA7A-9024-4E78-A708-20C93D89E528}"/>
+                <a16:creationId xmlns:a16="http://schemas.microsoft.com/office/drawing/2014/main" id="{6BD962EB-1CFE-497D-9CB1-8DACF6F6F171}"/>
               </a:ext>
             </a:extLst>
           </p:cNvPr>
@@ -6834,7 +7922,7 @@
           <p:cNvPr id="7" name="">
             <a:extLst xmlns:a="http://schemas.openxmlformats.org/drawingml/2006/main">
               <a:ext uri="{FF2B5EF4-FFF2-40B4-BE49-F238E27FC236}">
-                <a16:creationId xmlns:a16="http://schemas.microsoft.com/office/drawing/2014/main" id="{3E9E6D72-D82F-4180-8446-F5CCFE504863}"/>
+                <a16:creationId xmlns:a16="http://schemas.microsoft.com/office/drawing/2014/main" id="{39FD079B-4C3A-463D-A48E-FDD8B92F605D}"/>
               </a:ext>
             </a:extLst>
           </p:cNvPr>
@@ -6990,7 +8078,7 @@
           <p:cNvPr id="8" name="">
             <a:extLst xmlns:a="http://schemas.openxmlformats.org/drawingml/2006/main">
               <a:ext uri="{FF2B5EF4-FFF2-40B4-BE49-F238E27FC236}">
-                <a16:creationId xmlns:a16="http://schemas.microsoft.com/office/drawing/2014/main" id="{DC5F5591-7B29-4D8E-8386-A6E9E9E5994A}"/>
+                <a16:creationId xmlns:a16="http://schemas.microsoft.com/office/drawing/2014/main" id="{1891D894-3CC3-487D-848D-35682C28CF45}"/>
               </a:ext>
             </a:extLst>
           </p:cNvPr>
@@ -7016,7 +8104,7 @@
           <a:bodyPr xmlns:a="http://schemas.openxmlformats.org/drawingml/2006/main" wrap="square" lIns="0" tIns="0" rIns="0" bIns="0" anchor="t"/>
           <a:lstStyle xmlns:a="http://schemas.openxmlformats.org/drawingml/2006/main">
             <a:defPPr algn="l">
-              <a:defRPr sz="1725" b="0">
+              <a:defRPr sz="1575" b="0">
                 <a:solidFill>
                   <a:srgbClr val="AEC8C0"/>
                 </a:solidFill>
@@ -7026,7 +8114,7 @@
               </a:defRPr>
             </a:defPPr>
             <a:lvl1pPr algn="l">
-              <a:defRPr sz="1725" b="0">
+              <a:defRPr sz="1575" b="0">
                 <a:solidFill>
                   <a:srgbClr val="AEC8C0"/>
                 </a:solidFill>
@@ -7036,7 +8124,7 @@
               </a:defRPr>
             </a:lvl1pPr>
             <a:lvl2pPr algn="l">
-              <a:defRPr sz="1725" b="0">
+              <a:defRPr sz="1575" b="0">
                 <a:solidFill>
                   <a:srgbClr val="AEC8C0"/>
                 </a:solidFill>
@@ -7046,7 +8134,7 @@
               </a:defRPr>
             </a:lvl2pPr>
             <a:lvl3pPr algn="l">
-              <a:defRPr sz="1725" b="0">
+              <a:defRPr sz="1575" b="0">
                 <a:solidFill>
                   <a:srgbClr val="AEC8C0"/>
                 </a:solidFill>
@@ -7056,7 +8144,7 @@
               </a:defRPr>
             </a:lvl3pPr>
             <a:lvl4pPr algn="l">
-              <a:defRPr sz="1725" b="0">
+              <a:defRPr sz="1575" b="0">
                 <a:solidFill>
                   <a:srgbClr val="AEC8C0"/>
                 </a:solidFill>
@@ -7066,7 +8154,7 @@
               </a:defRPr>
             </a:lvl4pPr>
             <a:lvl5pPr algn="l">
-              <a:defRPr sz="1725" b="0">
+              <a:defRPr sz="1575" b="0">
                 <a:solidFill>
                   <a:srgbClr val="AEC8C0"/>
                 </a:solidFill>
@@ -7076,7 +8164,7 @@
               </a:defRPr>
             </a:lvl5pPr>
             <a:lvl6pPr algn="l">
-              <a:defRPr sz="1725" b="0">
+              <a:defRPr sz="1575" b="0">
                 <a:solidFill>
                   <a:srgbClr val="AEC8C0"/>
                 </a:solidFill>
@@ -7086,7 +8174,7 @@
               </a:defRPr>
             </a:lvl6pPr>
             <a:lvl7pPr algn="l">
-              <a:defRPr sz="1725" b="0">
+              <a:defRPr sz="1575" b="0">
                 <a:solidFill>
                   <a:srgbClr val="AEC8C0"/>
                 </a:solidFill>
@@ -7096,7 +8184,7 @@
               </a:defRPr>
             </a:lvl7pPr>
             <a:lvl8pPr algn="l">
-              <a:defRPr sz="1725" b="0">
+              <a:defRPr sz="1575" b="0">
                 <a:solidFill>
                   <a:srgbClr val="AEC8C0"/>
                 </a:solidFill>
@@ -7106,7 +8194,7 @@
               </a:defRPr>
             </a:lvl8pPr>
             <a:lvl9pPr algn="l">
-              <a:defRPr sz="1725" b="0">
+              <a:defRPr sz="1575" b="0">
                 <a:solidFill>
                   <a:srgbClr val="AEC8C0"/>
                 </a:solidFill>
@@ -7118,7 +8206,7 @@
           </a:lstStyle>
           <a:p xmlns:a="http://schemas.openxmlformats.org/drawingml/2006/main">
             <a:pPr algn="l">
-              <a:defRPr sz="1725" b="0">
+              <a:defRPr sz="1575" b="0">
                 <a:solidFill>
                   <a:srgbClr val="AEC8C0"/>
                 </a:solidFill>
@@ -7128,7 +8216,7 @@
               </a:defRPr>
             </a:pPr>
             <a:r>
-              <a:rPr sz="1725" b="0">
+              <a:rPr sz="1575" b="0">
                 <a:solidFill>
                   <a:srgbClr val="AEC8C0"/>
                 </a:solidFill>
@@ -7136,7 +8224,7 @@
                 <a:ea typeface="Arial"/>
                 <a:cs typeface="Arial"/>
               </a:rPr>
-              <a:t>42 мин, с возвратом</a:t>
+              <a:t>UI: 44 мин, с возвратом</a:t>
             </a:r>
           </a:p>
         </p:txBody>
@@ -7146,7 +8234,7 @@
           <p:cNvPr id="9" name="">
             <a:extLst xmlns:a="http://schemas.openxmlformats.org/drawingml/2006/main">
               <a:ext uri="{FF2B5EF4-FFF2-40B4-BE49-F238E27FC236}">
-                <a16:creationId xmlns:a16="http://schemas.microsoft.com/office/drawing/2014/main" id="{48BE4EA8-3944-478F-90D7-315B37A97128}"/>
+                <a16:creationId xmlns:a16="http://schemas.microsoft.com/office/drawing/2014/main" id="{AD08E961-516C-4727-9772-FB2E3DEEDEDC}"/>
               </a:ext>
             </a:extLst>
           </p:cNvPr>
@@ -7292,7 +8380,7 @@
                 <a:ea typeface="Arial"/>
                 <a:cs typeface="Arial"/>
               </a:rPr>
-              <a:t>Установка и запуск по иконке подтверждены пользователем</a:t>
+              <a:t>UI: 44 мин; проверка: 42 мин — разные публичные точки старта</a:t>
             </a:r>
           </a:p>
         </p:txBody>
@@ -7300,7 +8388,7 @@
     </p:spTree>
     <p:extLst>
       <p:ext uri="{BB962C8B-B14F-4D97-AF65-F5344CB8AC3E}">
-        <p14:creationId xmlns:p14="http://schemas.microsoft.com/office/powerpoint/2010/main" val="1926942164"/>
+        <p14:creationId xmlns:p14="http://schemas.microsoft.com/office/powerpoint/2010/main" val="1561823019"/>
       </p:ext>
     </p:extLst>
   </p:cSld>
@@ -7328,10 +8416,10 @@
       </p:grpSpPr>
       <p:sp>
         <p:nvSpPr>
-          <p:cNvPr id="16" name="">
+          <p:cNvPr id="5" name="">
             <a:extLst xmlns:a="http://schemas.openxmlformats.org/drawingml/2006/main">
               <a:ext uri="{FF2B5EF4-FFF2-40B4-BE49-F238E27FC236}">
-                <a16:creationId xmlns:a16="http://schemas.microsoft.com/office/drawing/2014/main" id="{B55CB5AC-A4EE-436B-9C58-E3691AADC708}"/>
+                <a16:creationId xmlns:a16="http://schemas.microsoft.com/office/drawing/2014/main" id="{67060300-47ED-4157-A09E-C8B1283E13FC}"/>
               </a:ext>
             </a:extLst>
           </p:cNvPr>
@@ -7477,7 +8565,7 @@
                 <a:ea typeface="Arial"/>
                 <a:cs typeface="Arial"/>
               </a:rPr>
-              <a:t>Как работает RAG</a:t>
+              <a:t>Настоящая уличная карта</a:t>
             </a:r>
           </a:p>
         </p:txBody>
@@ -7487,7 +8575,7 @@
           <p:cNvPr id="2" name="">
             <a:extLst xmlns:a="http://schemas.openxmlformats.org/drawingml/2006/main">
               <a:ext uri="{FF2B5EF4-FFF2-40B4-BE49-F238E27FC236}">
-                <a16:creationId xmlns:a16="http://schemas.microsoft.com/office/drawing/2014/main" id="{464E7101-5B85-45A4-9C13-DC6A716A887F}"/>
+                <a16:creationId xmlns:a16="http://schemas.microsoft.com/office/drawing/2014/main" id="{917025F6-0CE7-4C4A-9C2D-44C5A733DD6A}"/>
               </a:ext>
             </a:extLst>
           </p:cNvPr>
@@ -7638,12 +8726,561 @@
           </a:p>
         </p:txBody>
       </p:sp>
+      <p:pic>
+        <p:nvPicPr>
+          <p:cNvPr id="3" name="">
+            <a:extLst xmlns:a="http://schemas.openxmlformats.org/drawingml/2006/main">
+              <a:ext uri="{FF2B5EF4-FFF2-40B4-BE49-F238E27FC236}">
+                <a16:creationId xmlns:a16="http://schemas.microsoft.com/office/drawing/2014/main" id="{0AA0FF51-3D9D-4F58-809C-F60CF35517AB}"/>
+              </a:ext>
+            </a:extLst>
+          </p:cNvPr>
+          <p:cNvPicPr>
+            <a:picLocks xmlns:a="http://schemas.openxmlformats.org/drawingml/2006/main" noChangeAspect="1"/>
+          </p:cNvPicPr>
+          <p:nvPr/>
+        </p:nvPicPr>
+        <p:blipFill>
+          <a:blip xmlns:r="http://schemas.openxmlformats.org/officeDocument/2006/relationships" xmlns:a="http://schemas.openxmlformats.org/drawingml/2006/main" r:embed="Rbf11055cfa94417e"/>
+          <a:srcRect xmlns:a="http://schemas.openxmlformats.org/drawingml/2006/main" l="32500" t="9800" r="6500" b="55200"/>
+          <a:stretch xmlns:a="http://schemas.openxmlformats.org/drawingml/2006/main"/>
+        </p:blipFill>
+        <p:spPr>
+          <a:xfrm xmlns:a="http://schemas.openxmlformats.org/drawingml/2006/main">
+            <a:off x="1018722" y="1504950"/>
+            <a:ext cx="10154556" cy="4248150"/>
+          </a:xfrm>
+          <a:prstGeom xmlns:a="http://schemas.openxmlformats.org/drawingml/2006/main" prst="rect">
+            <a:avLst/>
+          </a:prstGeom>
+        </p:spPr>
+      </p:pic>
+      <p:sp>
+        <p:nvSpPr>
+          <p:cNvPr id="4" name="">
+            <a:extLst xmlns:a="http://schemas.openxmlformats.org/drawingml/2006/main">
+              <a:ext uri="{FF2B5EF4-FFF2-40B4-BE49-F238E27FC236}">
+                <a16:creationId xmlns:a16="http://schemas.microsoft.com/office/drawing/2014/main" id="{F5C02387-D252-435C-B062-51AE03FD695D}"/>
+              </a:ext>
+            </a:extLst>
+          </p:cNvPr>
+          <p:cNvSpPr>
+            <a:spLocks xmlns:a="http://schemas.openxmlformats.org/drawingml/2006/main" noGrp="1"/>
+          </p:cNvSpPr>
+          <p:nvPr/>
+        </p:nvSpPr>
+        <p:spPr>
+          <a:xfrm xmlns:a="http://schemas.openxmlformats.org/drawingml/2006/main">
+            <a:off x="685800" y="5943600"/>
+            <a:ext cx="10001250" cy="571500"/>
+          </a:xfrm>
+          <a:prstGeom xmlns:a="http://schemas.openxmlformats.org/drawingml/2006/main" prst="rect">
+            <a:avLst/>
+          </a:prstGeom>
+          <a:noFill xmlns:a="http://schemas.openxmlformats.org/drawingml/2006/main"/>
+          <a:ln xmlns:a="http://schemas.openxmlformats.org/drawingml/2006/main" w="0">
+            <a:noFill/>
+          </a:ln>
+        </p:spPr>
+        <p:txBody>
+          <a:bodyPr xmlns:a="http://schemas.openxmlformats.org/drawingml/2006/main" wrap="square" lIns="0" tIns="0" rIns="0" bIns="0" anchor="t"/>
+          <a:lstStyle xmlns:a="http://schemas.openxmlformats.org/drawingml/2006/main">
+            <a:defPPr algn="l">
+              <a:defRPr sz="1500" b="0">
+                <a:solidFill>
+                  <a:srgbClr val="AEC8C0"/>
+                </a:solidFill>
+                <a:latin typeface="Arial"/>
+                <a:ea typeface="Arial"/>
+                <a:cs typeface="Arial"/>
+              </a:defRPr>
+            </a:defPPr>
+            <a:lvl1pPr algn="l">
+              <a:defRPr sz="1500" b="0">
+                <a:solidFill>
+                  <a:srgbClr val="AEC8C0"/>
+                </a:solidFill>
+                <a:latin typeface="Arial"/>
+                <a:ea typeface="Arial"/>
+                <a:cs typeface="Arial"/>
+              </a:defRPr>
+            </a:lvl1pPr>
+            <a:lvl2pPr algn="l">
+              <a:defRPr sz="1500" b="0">
+                <a:solidFill>
+                  <a:srgbClr val="AEC8C0"/>
+                </a:solidFill>
+                <a:latin typeface="Arial"/>
+                <a:ea typeface="Arial"/>
+                <a:cs typeface="Arial"/>
+              </a:defRPr>
+            </a:lvl2pPr>
+            <a:lvl3pPr algn="l">
+              <a:defRPr sz="1500" b="0">
+                <a:solidFill>
+                  <a:srgbClr val="AEC8C0"/>
+                </a:solidFill>
+                <a:latin typeface="Arial"/>
+                <a:ea typeface="Arial"/>
+                <a:cs typeface="Arial"/>
+              </a:defRPr>
+            </a:lvl3pPr>
+            <a:lvl4pPr algn="l">
+              <a:defRPr sz="1500" b="0">
+                <a:solidFill>
+                  <a:srgbClr val="AEC8C0"/>
+                </a:solidFill>
+                <a:latin typeface="Arial"/>
+                <a:ea typeface="Arial"/>
+                <a:cs typeface="Arial"/>
+              </a:defRPr>
+            </a:lvl4pPr>
+            <a:lvl5pPr algn="l">
+              <a:defRPr sz="1500" b="0">
+                <a:solidFill>
+                  <a:srgbClr val="AEC8C0"/>
+                </a:solidFill>
+                <a:latin typeface="Arial"/>
+                <a:ea typeface="Arial"/>
+                <a:cs typeface="Arial"/>
+              </a:defRPr>
+            </a:lvl5pPr>
+            <a:lvl6pPr algn="l">
+              <a:defRPr sz="1500" b="0">
+                <a:solidFill>
+                  <a:srgbClr val="AEC8C0"/>
+                </a:solidFill>
+                <a:latin typeface="Arial"/>
+                <a:ea typeface="Arial"/>
+                <a:cs typeface="Arial"/>
+              </a:defRPr>
+            </a:lvl6pPr>
+            <a:lvl7pPr algn="l">
+              <a:defRPr sz="1500" b="0">
+                <a:solidFill>
+                  <a:srgbClr val="AEC8C0"/>
+                </a:solidFill>
+                <a:latin typeface="Arial"/>
+                <a:ea typeface="Arial"/>
+                <a:cs typeface="Arial"/>
+              </a:defRPr>
+            </a:lvl7pPr>
+            <a:lvl8pPr algn="l">
+              <a:defRPr sz="1500" b="0">
+                <a:solidFill>
+                  <a:srgbClr val="AEC8C0"/>
+                </a:solidFill>
+                <a:latin typeface="Arial"/>
+                <a:ea typeface="Arial"/>
+                <a:cs typeface="Arial"/>
+              </a:defRPr>
+            </a:lvl8pPr>
+            <a:lvl9pPr algn="l">
+              <a:defRPr sz="1500" b="0">
+                <a:solidFill>
+                  <a:srgbClr val="AEC8C0"/>
+                </a:solidFill>
+                <a:latin typeface="Arial"/>
+                <a:ea typeface="Arial"/>
+                <a:cs typeface="Arial"/>
+              </a:defRPr>
+            </a:lvl9pPr>
+          </a:lstStyle>
+          <a:p xmlns:a="http://schemas.openxmlformats.org/drawingml/2006/main">
+            <a:pPr algn="l">
+              <a:defRPr sz="1500" b="0">
+                <a:solidFill>
+                  <a:srgbClr val="AEC8C0"/>
+                </a:solidFill>
+                <a:latin typeface="Arial"/>
+                <a:ea typeface="Arial"/>
+                <a:cs typeface="Arial"/>
+              </a:defRPr>
+            </a:pPr>
+            <a:r>
+              <a:rPr sz="1500" b="0">
+                <a:solidFill>
+                  <a:srgbClr val="AEC8C0"/>
+                </a:solidFill>
+                <a:latin typeface="Arial"/>
+                <a:ea typeface="Arial"/>
+                <a:cs typeface="Arial"/>
+              </a:rPr>
+              <a:t>Точки — из OSM. Прямые связи между остановками не являются навигацией.</a:t>
+            </a:r>
+          </a:p>
+          <a:p xmlns:a="http://schemas.openxmlformats.org/drawingml/2006/main">
+            <a:pPr algn="l">
+              <a:defRPr sz="1500" b="0">
+                <a:solidFill>
+                  <a:srgbClr val="AEC8C0"/>
+                </a:solidFill>
+                <a:latin typeface="Arial"/>
+                <a:ea typeface="Arial"/>
+                <a:cs typeface="Arial"/>
+              </a:defRPr>
+            </a:pPr>
+            <a:r>
+              <a:rPr sz="1500" b="0">
+                <a:solidFill>
+                  <a:srgbClr val="AEC8C0"/>
+                </a:solidFill>
+                <a:latin typeface="Arial"/>
+                <a:ea typeface="Arial"/>
+                <a:cs typeface="Arial"/>
+              </a:rPr>
+              <a:t>Внешний сервис тайлов получает IP и область просмотра.</a:t>
+            </a:r>
+          </a:p>
+        </p:txBody>
+      </p:sp>
+    </p:spTree>
+    <p:extLst>
+      <p:ext uri="{BB962C8B-B14F-4D97-AF65-F5344CB8AC3E}">
+        <p14:creationId xmlns:p14="http://schemas.microsoft.com/office/powerpoint/2010/main" val="1066490268"/>
+      </p:ext>
+    </p:extLst>
+  </p:cSld>
+</p:sld>
+</file>
+
+<file path=ppt/slides/slide5.xml><?xml version="1.0" encoding="utf-8"?>
+<p:sld xmlns:p="http://schemas.openxmlformats.org/presentationml/2006/main">
+  <p:cSld>
+    <p:bg>
+      <p:bgPr>
+        <a:solidFill xmlns:a="http://schemas.openxmlformats.org/drawingml/2006/main">
+          <a:srgbClr val="0A2D2E"/>
+        </a:solidFill>
+      </p:bgPr>
+    </p:bg>
+    <p:spTree>
+      <p:nvGrpSpPr>
+        <p:cNvPr id="1" name=""/>
+        <p:cNvGrpSpPr/>
+        <p:nvPr/>
+      </p:nvGrpSpPr>
+      <p:grpSpPr>
+        <a:xfrm xmlns:a="http://schemas.openxmlformats.org/drawingml/2006/main"/>
+      </p:grpSpPr>
+      <p:sp>
+        <p:nvSpPr>
+          <p:cNvPr id="17" name="">
+            <a:extLst xmlns:a="http://schemas.openxmlformats.org/drawingml/2006/main">
+              <a:ext uri="{FF2B5EF4-FFF2-40B4-BE49-F238E27FC236}">
+                <a16:creationId xmlns:a16="http://schemas.microsoft.com/office/drawing/2014/main" id="{5F1C4DAC-CDDC-47CB-A367-858941C1C314}"/>
+              </a:ext>
+            </a:extLst>
+          </p:cNvPr>
+          <p:cNvSpPr>
+            <a:spLocks xmlns:a="http://schemas.openxmlformats.org/drawingml/2006/main" noGrp="1"/>
+          </p:cNvSpPr>
+          <p:nvPr/>
+        </p:nvSpPr>
+        <p:spPr>
+          <a:xfrm xmlns:a="http://schemas.openxmlformats.org/drawingml/2006/main">
+            <a:off x="685800" y="504825"/>
+            <a:ext cx="10820400" cy="857250"/>
+          </a:xfrm>
+          <a:prstGeom xmlns:a="http://schemas.openxmlformats.org/drawingml/2006/main" prst="rect">
+            <a:avLst/>
+          </a:prstGeom>
+          <a:noFill xmlns:a="http://schemas.openxmlformats.org/drawingml/2006/main"/>
+          <a:ln xmlns:a="http://schemas.openxmlformats.org/drawingml/2006/main" w="0">
+            <a:noFill/>
+          </a:ln>
+        </p:spPr>
+        <p:txBody>
+          <a:bodyPr xmlns:a="http://schemas.openxmlformats.org/drawingml/2006/main" wrap="square" lIns="0" tIns="0" rIns="0" bIns="0" anchor="t"/>
+          <a:lstStyle xmlns:a="http://schemas.openxmlformats.org/drawingml/2006/main">
+            <a:defPPr algn="l">
+              <a:defRPr sz="3600" b="1">
+                <a:solidFill>
+                  <a:srgbClr val="F4F0E5"/>
+                </a:solidFill>
+                <a:latin typeface="Arial"/>
+                <a:ea typeface="Arial"/>
+                <a:cs typeface="Arial"/>
+              </a:defRPr>
+            </a:defPPr>
+            <a:lvl1pPr algn="l">
+              <a:defRPr sz="3600" b="1">
+                <a:solidFill>
+                  <a:srgbClr val="F4F0E5"/>
+                </a:solidFill>
+                <a:latin typeface="Arial"/>
+                <a:ea typeface="Arial"/>
+                <a:cs typeface="Arial"/>
+              </a:defRPr>
+            </a:lvl1pPr>
+            <a:lvl2pPr algn="l">
+              <a:defRPr sz="3600" b="1">
+                <a:solidFill>
+                  <a:srgbClr val="F4F0E5"/>
+                </a:solidFill>
+                <a:latin typeface="Arial"/>
+                <a:ea typeface="Arial"/>
+                <a:cs typeface="Arial"/>
+              </a:defRPr>
+            </a:lvl2pPr>
+            <a:lvl3pPr algn="l">
+              <a:defRPr sz="3600" b="1">
+                <a:solidFill>
+                  <a:srgbClr val="F4F0E5"/>
+                </a:solidFill>
+                <a:latin typeface="Arial"/>
+                <a:ea typeface="Arial"/>
+                <a:cs typeface="Arial"/>
+              </a:defRPr>
+            </a:lvl3pPr>
+            <a:lvl4pPr algn="l">
+              <a:defRPr sz="3600" b="1">
+                <a:solidFill>
+                  <a:srgbClr val="F4F0E5"/>
+                </a:solidFill>
+                <a:latin typeface="Arial"/>
+                <a:ea typeface="Arial"/>
+                <a:cs typeface="Arial"/>
+              </a:defRPr>
+            </a:lvl4pPr>
+            <a:lvl5pPr algn="l">
+              <a:defRPr sz="3600" b="1">
+                <a:solidFill>
+                  <a:srgbClr val="F4F0E5"/>
+                </a:solidFill>
+                <a:latin typeface="Arial"/>
+                <a:ea typeface="Arial"/>
+                <a:cs typeface="Arial"/>
+              </a:defRPr>
+            </a:lvl5pPr>
+            <a:lvl6pPr algn="l">
+              <a:defRPr sz="3600" b="1">
+                <a:solidFill>
+                  <a:srgbClr val="F4F0E5"/>
+                </a:solidFill>
+                <a:latin typeface="Arial"/>
+                <a:ea typeface="Arial"/>
+                <a:cs typeface="Arial"/>
+              </a:defRPr>
+            </a:lvl6pPr>
+            <a:lvl7pPr algn="l">
+              <a:defRPr sz="3600" b="1">
+                <a:solidFill>
+                  <a:srgbClr val="F4F0E5"/>
+                </a:solidFill>
+                <a:latin typeface="Arial"/>
+                <a:ea typeface="Arial"/>
+                <a:cs typeface="Arial"/>
+              </a:defRPr>
+            </a:lvl7pPr>
+            <a:lvl8pPr algn="l">
+              <a:defRPr sz="3600" b="1">
+                <a:solidFill>
+                  <a:srgbClr val="F4F0E5"/>
+                </a:solidFill>
+                <a:latin typeface="Arial"/>
+                <a:ea typeface="Arial"/>
+                <a:cs typeface="Arial"/>
+              </a:defRPr>
+            </a:lvl8pPr>
+            <a:lvl9pPr algn="l">
+              <a:defRPr sz="3600" b="1">
+                <a:solidFill>
+                  <a:srgbClr val="F4F0E5"/>
+                </a:solidFill>
+                <a:latin typeface="Arial"/>
+                <a:ea typeface="Arial"/>
+                <a:cs typeface="Arial"/>
+              </a:defRPr>
+            </a:lvl9pPr>
+          </a:lstStyle>
+          <a:p xmlns:a="http://schemas.openxmlformats.org/drawingml/2006/main">
+            <a:pPr algn="l">
+              <a:defRPr sz="3600" b="1">
+                <a:solidFill>
+                  <a:srgbClr val="F4F0E5"/>
+                </a:solidFill>
+                <a:latin typeface="Arial"/>
+                <a:ea typeface="Arial"/>
+                <a:cs typeface="Arial"/>
+              </a:defRPr>
+            </a:pPr>
+            <a:r>
+              <a:rPr sz="3600" b="1">
+                <a:solidFill>
+                  <a:srgbClr val="F4F0E5"/>
+                </a:solidFill>
+                <a:latin typeface="Arial"/>
+                <a:ea typeface="Arial"/>
+                <a:cs typeface="Arial"/>
+              </a:rPr>
+              <a:t>Как работает RAG</a:t>
+            </a:r>
+          </a:p>
+        </p:txBody>
+      </p:sp>
+      <p:sp>
+        <p:nvSpPr>
+          <p:cNvPr id="2" name="">
+            <a:extLst xmlns:a="http://schemas.openxmlformats.org/drawingml/2006/main">
+              <a:ext uri="{FF2B5EF4-FFF2-40B4-BE49-F238E27FC236}">
+                <a16:creationId xmlns:a16="http://schemas.microsoft.com/office/drawing/2014/main" id="{F3051754-C950-4CF2-A807-B371096D9D77}"/>
+              </a:ext>
+            </a:extLst>
+          </p:cNvPr>
+          <p:cNvSpPr>
+            <a:spLocks xmlns:a="http://schemas.openxmlformats.org/drawingml/2006/main" noGrp="1"/>
+          </p:cNvSpPr>
+          <p:nvPr/>
+        </p:nvSpPr>
+        <p:spPr>
+          <a:xfrm xmlns:a="http://schemas.openxmlformats.org/drawingml/2006/main">
+            <a:off x="11068050" y="6267450"/>
+            <a:ext cx="438150" cy="285750"/>
+          </a:xfrm>
+          <a:prstGeom xmlns:a="http://schemas.openxmlformats.org/drawingml/2006/main" prst="rect">
+            <a:avLst/>
+          </a:prstGeom>
+          <a:noFill xmlns:a="http://schemas.openxmlformats.org/drawingml/2006/main"/>
+          <a:ln xmlns:a="http://schemas.openxmlformats.org/drawingml/2006/main" w="0">
+            <a:noFill/>
+          </a:ln>
+        </p:spPr>
+        <p:txBody>
+          <a:bodyPr xmlns:a="http://schemas.openxmlformats.org/drawingml/2006/main" wrap="square" lIns="0" tIns="0" rIns="0" bIns="0" anchor="t"/>
+          <a:lstStyle xmlns:a="http://schemas.openxmlformats.org/drawingml/2006/main">
+            <a:defPPr algn="l">
+              <a:defRPr sz="1275" b="0">
+                <a:solidFill>
+                  <a:srgbClr val="AEC8C0"/>
+                </a:solidFill>
+                <a:latin typeface="Arial"/>
+                <a:ea typeface="Arial"/>
+                <a:cs typeface="Arial"/>
+              </a:defRPr>
+            </a:defPPr>
+            <a:lvl1pPr algn="l">
+              <a:defRPr sz="1275" b="0">
+                <a:solidFill>
+                  <a:srgbClr val="AEC8C0"/>
+                </a:solidFill>
+                <a:latin typeface="Arial"/>
+                <a:ea typeface="Arial"/>
+                <a:cs typeface="Arial"/>
+              </a:defRPr>
+            </a:lvl1pPr>
+            <a:lvl2pPr algn="l">
+              <a:defRPr sz="1275" b="0">
+                <a:solidFill>
+                  <a:srgbClr val="AEC8C0"/>
+                </a:solidFill>
+                <a:latin typeface="Arial"/>
+                <a:ea typeface="Arial"/>
+                <a:cs typeface="Arial"/>
+              </a:defRPr>
+            </a:lvl2pPr>
+            <a:lvl3pPr algn="l">
+              <a:defRPr sz="1275" b="0">
+                <a:solidFill>
+                  <a:srgbClr val="AEC8C0"/>
+                </a:solidFill>
+                <a:latin typeface="Arial"/>
+                <a:ea typeface="Arial"/>
+                <a:cs typeface="Arial"/>
+              </a:defRPr>
+            </a:lvl3pPr>
+            <a:lvl4pPr algn="l">
+              <a:defRPr sz="1275" b="0">
+                <a:solidFill>
+                  <a:srgbClr val="AEC8C0"/>
+                </a:solidFill>
+                <a:latin typeface="Arial"/>
+                <a:ea typeface="Arial"/>
+                <a:cs typeface="Arial"/>
+              </a:defRPr>
+            </a:lvl4pPr>
+            <a:lvl5pPr algn="l">
+              <a:defRPr sz="1275" b="0">
+                <a:solidFill>
+                  <a:srgbClr val="AEC8C0"/>
+                </a:solidFill>
+                <a:latin typeface="Arial"/>
+                <a:ea typeface="Arial"/>
+                <a:cs typeface="Arial"/>
+              </a:defRPr>
+            </a:lvl5pPr>
+            <a:lvl6pPr algn="l">
+              <a:defRPr sz="1275" b="0">
+                <a:solidFill>
+                  <a:srgbClr val="AEC8C0"/>
+                </a:solidFill>
+                <a:latin typeface="Arial"/>
+                <a:ea typeface="Arial"/>
+                <a:cs typeface="Arial"/>
+              </a:defRPr>
+            </a:lvl6pPr>
+            <a:lvl7pPr algn="l">
+              <a:defRPr sz="1275" b="0">
+                <a:solidFill>
+                  <a:srgbClr val="AEC8C0"/>
+                </a:solidFill>
+                <a:latin typeface="Arial"/>
+                <a:ea typeface="Arial"/>
+                <a:cs typeface="Arial"/>
+              </a:defRPr>
+            </a:lvl7pPr>
+            <a:lvl8pPr algn="l">
+              <a:defRPr sz="1275" b="0">
+                <a:solidFill>
+                  <a:srgbClr val="AEC8C0"/>
+                </a:solidFill>
+                <a:latin typeface="Arial"/>
+                <a:ea typeface="Arial"/>
+                <a:cs typeface="Arial"/>
+              </a:defRPr>
+            </a:lvl8pPr>
+            <a:lvl9pPr algn="l">
+              <a:defRPr sz="1275" b="0">
+                <a:solidFill>
+                  <a:srgbClr val="AEC8C0"/>
+                </a:solidFill>
+                <a:latin typeface="Arial"/>
+                <a:ea typeface="Arial"/>
+                <a:cs typeface="Arial"/>
+              </a:defRPr>
+            </a:lvl9pPr>
+          </a:lstStyle>
+          <a:p xmlns:a="http://schemas.openxmlformats.org/drawingml/2006/main">
+            <a:pPr algn="l">
+              <a:defRPr sz="1275" b="0">
+                <a:solidFill>
+                  <a:srgbClr val="AEC8C0"/>
+                </a:solidFill>
+                <a:latin typeface="Arial"/>
+                <a:ea typeface="Arial"/>
+                <a:cs typeface="Arial"/>
+              </a:defRPr>
+            </a:pPr>
+            <a:r>
+              <a:rPr sz="1275" b="0">
+                <a:solidFill>
+                  <a:srgbClr val="AEC8C0"/>
+                </a:solidFill>
+                <a:latin typeface="Arial"/>
+                <a:ea typeface="Arial"/>
+                <a:cs typeface="Arial"/>
+              </a:rPr>
+              <a:t>05</a:t>
+            </a:r>
+          </a:p>
+        </p:txBody>
+      </p:sp>
       <p:sp>
         <p:nvSpPr>
           <p:cNvPr id="3" name="">
             <a:extLst xmlns:a="http://schemas.openxmlformats.org/drawingml/2006/main">
               <a:ext uri="{FF2B5EF4-FFF2-40B4-BE49-F238E27FC236}">
-                <a16:creationId xmlns:a16="http://schemas.microsoft.com/office/drawing/2014/main" id="{2B7D6799-CBAB-44D5-90D7-ADDD58A17902}"/>
+                <a16:creationId xmlns:a16="http://schemas.microsoft.com/office/drawing/2014/main" id="{61F8F1B8-6490-41F9-A7BE-9851875E693D}"/>
               </a:ext>
             </a:extLst>
           </p:cNvPr>
@@ -7799,7 +9436,7 @@
           <p:cNvPr id="4" name="">
             <a:extLst xmlns:a="http://schemas.openxmlformats.org/drawingml/2006/main">
               <a:ext uri="{FF2B5EF4-FFF2-40B4-BE49-F238E27FC236}">
-                <a16:creationId xmlns:a16="http://schemas.microsoft.com/office/drawing/2014/main" id="{89C371D6-4565-4EB4-AAE3-EE20189318C5}"/>
+                <a16:creationId xmlns:a16="http://schemas.microsoft.com/office/drawing/2014/main" id="{25FE82FB-09F8-44EF-8042-C3690BE238CE}"/>
               </a:ext>
             </a:extLst>
           </p:cNvPr>
@@ -7955,7 +9592,7 @@
           <p:cNvPr id="5" name="">
             <a:extLst xmlns:a="http://schemas.openxmlformats.org/drawingml/2006/main">
               <a:ext uri="{FF2B5EF4-FFF2-40B4-BE49-F238E27FC236}">
-                <a16:creationId xmlns:a16="http://schemas.microsoft.com/office/drawing/2014/main" id="{DEB095D2-27BA-4C20-87D7-467A4ADD4169}"/>
+                <a16:creationId xmlns:a16="http://schemas.microsoft.com/office/drawing/2014/main" id="{40732D37-12FF-4B54-9E41-9BFA57DBAD9A}"/>
               </a:ext>
             </a:extLst>
           </p:cNvPr>
@@ -8157,7 +9794,7 @@
           <p:cNvPr id="6" name="">
             <a:extLst xmlns:a="http://schemas.openxmlformats.org/drawingml/2006/main">
               <a:ext uri="{FF2B5EF4-FFF2-40B4-BE49-F238E27FC236}">
-                <a16:creationId xmlns:a16="http://schemas.microsoft.com/office/drawing/2014/main" id="{C52461A4-C4F6-47E2-B236-53A48307CCD3}"/>
+                <a16:creationId xmlns:a16="http://schemas.microsoft.com/office/drawing/2014/main" id="{3FA757B8-A0A6-4456-8499-4A566B34478A}"/>
               </a:ext>
             </a:extLst>
           </p:cNvPr>
@@ -8313,7 +9950,7 @@
           <p:cNvPr id="7" name="">
             <a:extLst xmlns:a="http://schemas.openxmlformats.org/drawingml/2006/main">
               <a:ext uri="{FF2B5EF4-FFF2-40B4-BE49-F238E27FC236}">
-                <a16:creationId xmlns:a16="http://schemas.microsoft.com/office/drawing/2014/main" id="{FDF4701E-5973-4EDD-BAA1-DF6019A1AA2C}"/>
+                <a16:creationId xmlns:a16="http://schemas.microsoft.com/office/drawing/2014/main" id="{70ECC5AD-CB58-41F8-848E-7BB7DAE85C22}"/>
               </a:ext>
             </a:extLst>
           </p:cNvPr>
@@ -8469,7 +10106,7 @@
           <p:cNvPr id="8" name="">
             <a:extLst xmlns:a="http://schemas.openxmlformats.org/drawingml/2006/main">
               <a:ext uri="{FF2B5EF4-FFF2-40B4-BE49-F238E27FC236}">
-                <a16:creationId xmlns:a16="http://schemas.microsoft.com/office/drawing/2014/main" id="{D338DCA8-D64A-4E9C-920B-134A08B6E36D}"/>
+                <a16:creationId xmlns:a16="http://schemas.microsoft.com/office/drawing/2014/main" id="{C358AB71-7A5B-4B99-8342-B8DA810143B4}"/>
               </a:ext>
             </a:extLst>
           </p:cNvPr>
@@ -8671,7 +10308,7 @@
           <p:cNvPr id="9" name="">
             <a:extLst xmlns:a="http://schemas.openxmlformats.org/drawingml/2006/main">
               <a:ext uri="{FF2B5EF4-FFF2-40B4-BE49-F238E27FC236}">
-                <a16:creationId xmlns:a16="http://schemas.microsoft.com/office/drawing/2014/main" id="{DF6D9B84-F238-4633-8431-57895E35A641}"/>
+                <a16:creationId xmlns:a16="http://schemas.microsoft.com/office/drawing/2014/main" id="{CD093717-F4E0-41D1-8639-8C112107228D}"/>
               </a:ext>
             </a:extLst>
           </p:cNvPr>
@@ -8827,7 +10464,7 @@
           <p:cNvPr id="10" name="">
             <a:extLst xmlns:a="http://schemas.openxmlformats.org/drawingml/2006/main">
               <a:ext uri="{FF2B5EF4-FFF2-40B4-BE49-F238E27FC236}">
-                <a16:creationId xmlns:a16="http://schemas.microsoft.com/office/drawing/2014/main" id="{EA75D69A-CD6C-45D8-935D-04D668E5663B}"/>
+                <a16:creationId xmlns:a16="http://schemas.microsoft.com/office/drawing/2014/main" id="{6C221EFA-EE9F-4C01-818E-3CB35FBFD020}"/>
               </a:ext>
             </a:extLst>
           </p:cNvPr>
@@ -8983,7 +10620,7 @@
           <p:cNvPr id="11" name="">
             <a:extLst xmlns:a="http://schemas.openxmlformats.org/drawingml/2006/main">
               <a:ext uri="{FF2B5EF4-FFF2-40B4-BE49-F238E27FC236}">
-                <a16:creationId xmlns:a16="http://schemas.microsoft.com/office/drawing/2014/main" id="{A3E1DA93-A4D4-443E-A7C1-7157F809B304}"/>
+                <a16:creationId xmlns:a16="http://schemas.microsoft.com/office/drawing/2014/main" id="{ED66D6FA-BA36-4522-8B7B-78454514BEC8}"/>
               </a:ext>
             </a:extLst>
           </p:cNvPr>
@@ -9185,7 +10822,7 @@
           <p:cNvPr id="12" name="">
             <a:extLst xmlns:a="http://schemas.openxmlformats.org/drawingml/2006/main">
               <a:ext uri="{FF2B5EF4-FFF2-40B4-BE49-F238E27FC236}">
-                <a16:creationId xmlns:a16="http://schemas.microsoft.com/office/drawing/2014/main" id="{53DBC0D3-05E1-4D23-92D1-23B92A4A696B}"/>
+                <a16:creationId xmlns:a16="http://schemas.microsoft.com/office/drawing/2014/main" id="{678D4D56-1896-4F8A-9A6C-66C47680E71B}"/>
               </a:ext>
             </a:extLst>
           </p:cNvPr>
@@ -9341,7 +10978,7 @@
           <p:cNvPr id="13" name="">
             <a:extLst xmlns:a="http://schemas.openxmlformats.org/drawingml/2006/main">
               <a:ext uri="{FF2B5EF4-FFF2-40B4-BE49-F238E27FC236}">
-                <a16:creationId xmlns:a16="http://schemas.microsoft.com/office/drawing/2014/main" id="{61EF1BB8-B89B-462C-BA5F-0CB12E1468AC}"/>
+                <a16:creationId xmlns:a16="http://schemas.microsoft.com/office/drawing/2014/main" id="{91DB8428-CD47-4A15-A7D0-1F21790F4300}"/>
               </a:ext>
             </a:extLst>
           </p:cNvPr>
@@ -9497,7 +11134,7 @@
           <p:cNvPr id="14" name="">
             <a:extLst xmlns:a="http://schemas.openxmlformats.org/drawingml/2006/main">
               <a:ext uri="{FF2B5EF4-FFF2-40B4-BE49-F238E27FC236}">
-                <a16:creationId xmlns:a16="http://schemas.microsoft.com/office/drawing/2014/main" id="{1CD757C2-DBFB-4F90-A814-C226DAE01358}"/>
+                <a16:creationId xmlns:a16="http://schemas.microsoft.com/office/drawing/2014/main" id="{9B8F67D7-EA71-43A2-A3ED-8A326B7490AC}"/>
               </a:ext>
             </a:extLst>
           </p:cNvPr>
@@ -9699,7 +11336,7 @@
           <p:cNvPr id="15" name="">
             <a:extLst xmlns:a="http://schemas.openxmlformats.org/drawingml/2006/main">
               <a:ext uri="{FF2B5EF4-FFF2-40B4-BE49-F238E27FC236}">
-                <a16:creationId xmlns:a16="http://schemas.microsoft.com/office/drawing/2014/main" id="{B83E72B8-BD47-4E68-BB96-7B9FED6E229A}"/>
+                <a16:creationId xmlns:a16="http://schemas.microsoft.com/office/drawing/2014/main" id="{15AA109B-F19E-405A-BB85-AC31D70575C0}"/>
               </a:ext>
             </a:extLst>
           </p:cNvPr>
@@ -9710,8 +11347,8 @@
         </p:nvSpPr>
         <p:spPr>
           <a:xfrm xmlns:a="http://schemas.openxmlformats.org/drawingml/2006/main">
-            <a:off x="685800" y="5734050"/>
-            <a:ext cx="10763250" cy="457200"/>
+            <a:off x="685800" y="5619750"/>
+            <a:ext cx="10763250" cy="400050"/>
           </a:xfrm>
           <a:prstGeom xmlns:a="http://schemas.openxmlformats.org/drawingml/2006/main" prst="rect">
             <a:avLst/>
@@ -9725,7 +11362,7 @@
           <a:bodyPr xmlns:a="http://schemas.openxmlformats.org/drawingml/2006/main" wrap="square" lIns="0" tIns="0" rIns="0" bIns="0" anchor="t"/>
           <a:lstStyle xmlns:a="http://schemas.openxmlformats.org/drawingml/2006/main">
             <a:defPPr algn="l">
-              <a:defRPr sz="1875" b="0">
+              <a:defRPr sz="1800" b="0">
                 <a:solidFill>
                   <a:srgbClr val="63D3BE"/>
                 </a:solidFill>
@@ -9735,7 +11372,7 @@
               </a:defRPr>
             </a:defPPr>
             <a:lvl1pPr algn="l">
-              <a:defRPr sz="1875" b="0">
+              <a:defRPr sz="1800" b="0">
                 <a:solidFill>
                   <a:srgbClr val="63D3BE"/>
                 </a:solidFill>
@@ -9745,7 +11382,7 @@
               </a:defRPr>
             </a:lvl1pPr>
             <a:lvl2pPr algn="l">
-              <a:defRPr sz="1875" b="0">
+              <a:defRPr sz="1800" b="0">
                 <a:solidFill>
                   <a:srgbClr val="63D3BE"/>
                 </a:solidFill>
@@ -9755,7 +11392,7 @@
               </a:defRPr>
             </a:lvl2pPr>
             <a:lvl3pPr algn="l">
-              <a:defRPr sz="1875" b="0">
+              <a:defRPr sz="1800" b="0">
                 <a:solidFill>
                   <a:srgbClr val="63D3BE"/>
                 </a:solidFill>
@@ -9765,7 +11402,7 @@
               </a:defRPr>
             </a:lvl3pPr>
             <a:lvl4pPr algn="l">
-              <a:defRPr sz="1875" b="0">
+              <a:defRPr sz="1800" b="0">
                 <a:solidFill>
                   <a:srgbClr val="63D3BE"/>
                 </a:solidFill>
@@ -9775,7 +11412,7 @@
               </a:defRPr>
             </a:lvl4pPr>
             <a:lvl5pPr algn="l">
-              <a:defRPr sz="1875" b="0">
+              <a:defRPr sz="1800" b="0">
                 <a:solidFill>
                   <a:srgbClr val="63D3BE"/>
                 </a:solidFill>
@@ -9785,7 +11422,7 @@
               </a:defRPr>
             </a:lvl5pPr>
             <a:lvl6pPr algn="l">
-              <a:defRPr sz="1875" b="0">
+              <a:defRPr sz="1800" b="0">
                 <a:solidFill>
                   <a:srgbClr val="63D3BE"/>
                 </a:solidFill>
@@ -9795,7 +11432,7 @@
               </a:defRPr>
             </a:lvl6pPr>
             <a:lvl7pPr algn="l">
-              <a:defRPr sz="1875" b="0">
+              <a:defRPr sz="1800" b="0">
                 <a:solidFill>
                   <a:srgbClr val="63D3BE"/>
                 </a:solidFill>
@@ -9805,7 +11442,7 @@
               </a:defRPr>
             </a:lvl7pPr>
             <a:lvl8pPr algn="l">
-              <a:defRPr sz="1875" b="0">
+              <a:defRPr sz="1800" b="0">
                 <a:solidFill>
                   <a:srgbClr val="63D3BE"/>
                 </a:solidFill>
@@ -9815,7 +11452,7 @@
               </a:defRPr>
             </a:lvl8pPr>
             <a:lvl9pPr algn="l">
-              <a:defRPr sz="1875" b="0">
+              <a:defRPr sz="1800" b="0">
                 <a:solidFill>
                   <a:srgbClr val="63D3BE"/>
                 </a:solidFill>
@@ -9827,7 +11464,7 @@
           </a:lstStyle>
           <a:p xmlns:a="http://schemas.openxmlformats.org/drawingml/2006/main">
             <a:pPr algn="l">
-              <a:defRPr sz="1875" b="0">
+              <a:defRPr sz="1800" b="0">
                 <a:solidFill>
                   <a:srgbClr val="63D3BE"/>
                 </a:solidFill>
@@ -9837,7 +11474,7 @@
               </a:defRPr>
             </a:pPr>
             <a:r>
-              <a:rPr sz="1875" b="0">
+              <a:rPr sz="1800" b="0">
                 <a:solidFill>
                   <a:srgbClr val="63D3BE"/>
                 </a:solidFill>
@@ -9846,6 +11483,162 @@
                 <a:cs typeface="Arial"/>
               </a:rPr>
               <a:t>Генерация: Qwen3-4B-Instruct-2507 Q4_K_M (Unsloth)</a:t>
+            </a:r>
+          </a:p>
+        </p:txBody>
+      </p:sp>
+      <p:sp>
+        <p:nvSpPr>
+          <p:cNvPr id="16" name="">
+            <a:extLst xmlns:a="http://schemas.openxmlformats.org/drawingml/2006/main">
+              <a:ext uri="{FF2B5EF4-FFF2-40B4-BE49-F238E27FC236}">
+                <a16:creationId xmlns:a16="http://schemas.microsoft.com/office/drawing/2014/main" id="{6505937B-4C4B-4481-9856-1565709FF4AC}"/>
+              </a:ext>
+            </a:extLst>
+          </p:cNvPr>
+          <p:cNvSpPr>
+            <a:spLocks xmlns:a="http://schemas.openxmlformats.org/drawingml/2006/main" noGrp="1"/>
+          </p:cNvSpPr>
+          <p:nvPr/>
+        </p:nvSpPr>
+        <p:spPr>
+          <a:xfrm xmlns:a="http://schemas.openxmlformats.org/drawingml/2006/main">
+            <a:off x="685800" y="6124575"/>
+            <a:ext cx="10001250" cy="304800"/>
+          </a:xfrm>
+          <a:prstGeom xmlns:a="http://schemas.openxmlformats.org/drawingml/2006/main" prst="rect">
+            <a:avLst/>
+          </a:prstGeom>
+          <a:noFill xmlns:a="http://schemas.openxmlformats.org/drawingml/2006/main"/>
+          <a:ln xmlns:a="http://schemas.openxmlformats.org/drawingml/2006/main" w="0">
+            <a:noFill/>
+          </a:ln>
+        </p:spPr>
+        <p:txBody>
+          <a:bodyPr xmlns:a="http://schemas.openxmlformats.org/drawingml/2006/main" wrap="square" lIns="0" tIns="0" rIns="0" bIns="0" anchor="t"/>
+          <a:lstStyle xmlns:a="http://schemas.openxmlformats.org/drawingml/2006/main">
+            <a:defPPr algn="l">
+              <a:defRPr sz="1575" b="0">
+                <a:solidFill>
+                  <a:srgbClr val="AEC8C0"/>
+                </a:solidFill>
+                <a:latin typeface="Arial"/>
+                <a:ea typeface="Arial"/>
+                <a:cs typeface="Arial"/>
+              </a:defRPr>
+            </a:defPPr>
+            <a:lvl1pPr algn="l">
+              <a:defRPr sz="1575" b="0">
+                <a:solidFill>
+                  <a:srgbClr val="AEC8C0"/>
+                </a:solidFill>
+                <a:latin typeface="Arial"/>
+                <a:ea typeface="Arial"/>
+                <a:cs typeface="Arial"/>
+              </a:defRPr>
+            </a:lvl1pPr>
+            <a:lvl2pPr algn="l">
+              <a:defRPr sz="1575" b="0">
+                <a:solidFill>
+                  <a:srgbClr val="AEC8C0"/>
+                </a:solidFill>
+                <a:latin typeface="Arial"/>
+                <a:ea typeface="Arial"/>
+                <a:cs typeface="Arial"/>
+              </a:defRPr>
+            </a:lvl2pPr>
+            <a:lvl3pPr algn="l">
+              <a:defRPr sz="1575" b="0">
+                <a:solidFill>
+                  <a:srgbClr val="AEC8C0"/>
+                </a:solidFill>
+                <a:latin typeface="Arial"/>
+                <a:ea typeface="Arial"/>
+                <a:cs typeface="Arial"/>
+              </a:defRPr>
+            </a:lvl3pPr>
+            <a:lvl4pPr algn="l">
+              <a:defRPr sz="1575" b="0">
+                <a:solidFill>
+                  <a:srgbClr val="AEC8C0"/>
+                </a:solidFill>
+                <a:latin typeface="Arial"/>
+                <a:ea typeface="Arial"/>
+                <a:cs typeface="Arial"/>
+              </a:defRPr>
+            </a:lvl4pPr>
+            <a:lvl5pPr algn="l">
+              <a:defRPr sz="1575" b="0">
+                <a:solidFill>
+                  <a:srgbClr val="AEC8C0"/>
+                </a:solidFill>
+                <a:latin typeface="Arial"/>
+                <a:ea typeface="Arial"/>
+                <a:cs typeface="Arial"/>
+              </a:defRPr>
+            </a:lvl5pPr>
+            <a:lvl6pPr algn="l">
+              <a:defRPr sz="1575" b="0">
+                <a:solidFill>
+                  <a:srgbClr val="AEC8C0"/>
+                </a:solidFill>
+                <a:latin typeface="Arial"/>
+                <a:ea typeface="Arial"/>
+                <a:cs typeface="Arial"/>
+              </a:defRPr>
+            </a:lvl6pPr>
+            <a:lvl7pPr algn="l">
+              <a:defRPr sz="1575" b="0">
+                <a:solidFill>
+                  <a:srgbClr val="AEC8C0"/>
+                </a:solidFill>
+                <a:latin typeface="Arial"/>
+                <a:ea typeface="Arial"/>
+                <a:cs typeface="Arial"/>
+              </a:defRPr>
+            </a:lvl7pPr>
+            <a:lvl8pPr algn="l">
+              <a:defRPr sz="1575" b="0">
+                <a:solidFill>
+                  <a:srgbClr val="AEC8C0"/>
+                </a:solidFill>
+                <a:latin typeface="Arial"/>
+                <a:ea typeface="Arial"/>
+                <a:cs typeface="Arial"/>
+              </a:defRPr>
+            </a:lvl8pPr>
+            <a:lvl9pPr algn="l">
+              <a:defRPr sz="1575" b="0">
+                <a:solidFill>
+                  <a:srgbClr val="AEC8C0"/>
+                </a:solidFill>
+                <a:latin typeface="Arial"/>
+                <a:ea typeface="Arial"/>
+                <a:cs typeface="Arial"/>
+              </a:defRPr>
+            </a:lvl9pPr>
+          </a:lstStyle>
+          <a:p xmlns:a="http://schemas.openxmlformats.org/drawingml/2006/main">
+            <a:pPr algn="l">
+              <a:defRPr sz="1575" b="0">
+                <a:solidFill>
+                  <a:srgbClr val="AEC8C0"/>
+                </a:solidFill>
+                <a:latin typeface="Arial"/>
+                <a:ea typeface="Arial"/>
+                <a:cs typeface="Arial"/>
+              </a:defRPr>
+            </a:pPr>
+            <a:r>
+              <a:rPr sz="1575" b="0">
+                <a:solidFill>
+                  <a:srgbClr val="AEC8C0"/>
+                </a:solidFill>
+                <a:latin typeface="Arial"/>
+                <a:ea typeface="Arial"/>
+                <a:cs typeface="Arial"/>
+              </a:rPr>
+              <a:t>В свидетельствах: LLM 4/4 непустых, fallback 0</a:t>
             </a:r>
           </a:p>
         </p:txBody>
@@ -9853,14 +11646,14 @@
     </p:spTree>
     <p:extLst>
       <p:ext uri="{BB962C8B-B14F-4D97-AF65-F5344CB8AC3E}">
-        <p14:creationId xmlns:p14="http://schemas.microsoft.com/office/powerpoint/2010/main" val="462408821"/>
+        <p14:creationId xmlns:p14="http://schemas.microsoft.com/office/powerpoint/2010/main" val="945979573"/>
       </p:ext>
     </p:extLst>
   </p:cSld>
 </p:sld>
 </file>
 
-<file path=ppt/slides/slide5.xml><?xml version="1.0" encoding="utf-8"?>
+<file path=ppt/slides/slide6.xml><?xml version="1.0" encoding="utf-8"?>
 <p:sld xmlns:p="http://schemas.openxmlformats.org/presentationml/2006/main">
   <p:cSld>
     <p:bg>
@@ -9881,10 +11674,10 @@
       </p:grpSpPr>
       <p:sp>
         <p:nvSpPr>
-          <p:cNvPr id="10" name="">
+          <p:cNvPr id="11" name="">
             <a:extLst xmlns:a="http://schemas.openxmlformats.org/drawingml/2006/main">
               <a:ext uri="{FF2B5EF4-FFF2-40B4-BE49-F238E27FC236}">
-                <a16:creationId xmlns:a16="http://schemas.microsoft.com/office/drawing/2014/main" id="{08D9FF10-4EE1-4145-8377-EC70E562DEBD}"/>
+                <a16:creationId xmlns:a16="http://schemas.microsoft.com/office/drawing/2014/main" id="{2F78741A-56F8-49D2-B35A-FBAC1145E952}"/>
               </a:ext>
             </a:extLst>
           </p:cNvPr>
@@ -10030,7 +11823,7 @@
                 <a:ea typeface="Arial"/>
                 <a:cs typeface="Arial"/>
               </a:rPr>
-              <a:t>Данные и происхождение</a:t>
+              <a:t>Данные и обновление</a:t>
             </a:r>
           </a:p>
         </p:txBody>
@@ -10040,7 +11833,7 @@
           <p:cNvPr id="2" name="">
             <a:extLst xmlns:a="http://schemas.openxmlformats.org/drawingml/2006/main">
               <a:ext uri="{FF2B5EF4-FFF2-40B4-BE49-F238E27FC236}">
-                <a16:creationId xmlns:a16="http://schemas.microsoft.com/office/drawing/2014/main" id="{AE1AB482-E38D-4BB3-8B6C-ECCE5AF84911}"/>
+                <a16:creationId xmlns:a16="http://schemas.microsoft.com/office/drawing/2014/main" id="{B98E1764-1C1E-44D0-B225-E33195DCA2FE}"/>
               </a:ext>
             </a:extLst>
           </p:cNvPr>
@@ -10186,7 +11979,7 @@
                 <a:ea typeface="Arial"/>
                 <a:cs typeface="Arial"/>
               </a:rPr>
-              <a:t>05</a:t>
+              <a:t>06</a:t>
             </a:r>
           </a:p>
         </p:txBody>
@@ -10196,7 +11989,7 @@
           <p:cNvPr id="3" name="">
             <a:extLst xmlns:a="http://schemas.openxmlformats.org/drawingml/2006/main">
               <a:ext uri="{FF2B5EF4-FFF2-40B4-BE49-F238E27FC236}">
-                <a16:creationId xmlns:a16="http://schemas.microsoft.com/office/drawing/2014/main" id="{2C116A5E-ECFF-47AF-AA9F-F948BE467C07}"/>
+                <a16:creationId xmlns:a16="http://schemas.microsoft.com/office/drawing/2014/main" id="{C47D6776-9AA6-492A-80CF-6097D554845E}"/>
               </a:ext>
             </a:extLst>
           </p:cNvPr>
@@ -10342,7 +12135,7 @@
                 <a:ea typeface="Arial"/>
                 <a:cs typeface="Arial"/>
               </a:rPr>
-              <a:t>738</a:t>
+              <a:t>1267</a:t>
             </a:r>
           </a:p>
         </p:txBody>
@@ -10352,7 +12145,7 @@
           <p:cNvPr id="4" name="">
             <a:extLst xmlns:a="http://schemas.openxmlformats.org/drawingml/2006/main">
               <a:ext uri="{FF2B5EF4-FFF2-40B4-BE49-F238E27FC236}">
-                <a16:creationId xmlns:a16="http://schemas.microsoft.com/office/drawing/2014/main" id="{CD19C028-470E-48C2-A506-36C5F86168C4}"/>
+                <a16:creationId xmlns:a16="http://schemas.microsoft.com/office/drawing/2014/main" id="{B7940C94-A49F-4E38-90A5-457ACA48D5E1}"/>
               </a:ext>
             </a:extLst>
           </p:cNvPr>
@@ -10508,7 +12301,7 @@
           <p:cNvPr id="5" name="">
             <a:extLst xmlns:a="http://schemas.openxmlformats.org/drawingml/2006/main">
               <a:ext uri="{FF2B5EF4-FFF2-40B4-BE49-F238E27FC236}">
-                <a16:creationId xmlns:a16="http://schemas.microsoft.com/office/drawing/2014/main" id="{407FCE8F-545D-41B8-B240-DE8B67938CF3}"/>
+                <a16:creationId xmlns:a16="http://schemas.microsoft.com/office/drawing/2014/main" id="{76AB3726-8DEE-47D7-9BB5-6CFDC8341B6E}"/>
               </a:ext>
             </a:extLst>
           </p:cNvPr>
@@ -10519,8 +12312,8 @@
         </p:nvSpPr>
         <p:spPr>
           <a:xfrm xmlns:a="http://schemas.openxmlformats.org/drawingml/2006/main">
-            <a:off x="752475" y="4619625"/>
-            <a:ext cx="4953000" cy="609600"/>
+            <a:off x="752475" y="4257675"/>
+            <a:ext cx="4953000" cy="400050"/>
           </a:xfrm>
           <a:prstGeom xmlns:a="http://schemas.openxmlformats.org/drawingml/2006/main" prst="rect">
             <a:avLst/>
@@ -10534,7 +12327,7 @@
           <a:bodyPr xmlns:a="http://schemas.openxmlformats.org/drawingml/2006/main" wrap="square" lIns="0" tIns="0" rIns="0" bIns="0" anchor="t"/>
           <a:lstStyle xmlns:a="http://schemas.openxmlformats.org/drawingml/2006/main">
             <a:defPPr algn="l">
-              <a:defRPr sz="2025" b="0">
+              <a:defRPr sz="1800" b="0">
                 <a:solidFill>
                   <a:srgbClr val="55716A"/>
                 </a:solidFill>
@@ -10544,7 +12337,7 @@
               </a:defRPr>
             </a:defPPr>
             <a:lvl1pPr algn="l">
-              <a:defRPr sz="2025" b="0">
+              <a:defRPr sz="1800" b="0">
                 <a:solidFill>
                   <a:srgbClr val="55716A"/>
                 </a:solidFill>
@@ -10554,7 +12347,7 @@
               </a:defRPr>
             </a:lvl1pPr>
             <a:lvl2pPr algn="l">
-              <a:defRPr sz="2025" b="0">
+              <a:defRPr sz="1800" b="0">
                 <a:solidFill>
                   <a:srgbClr val="55716A"/>
                 </a:solidFill>
@@ -10564,7 +12357,7 @@
               </a:defRPr>
             </a:lvl2pPr>
             <a:lvl3pPr algn="l">
-              <a:defRPr sz="2025" b="0">
+              <a:defRPr sz="1800" b="0">
                 <a:solidFill>
                   <a:srgbClr val="55716A"/>
                 </a:solidFill>
@@ -10574,7 +12367,7 @@
               </a:defRPr>
             </a:lvl3pPr>
             <a:lvl4pPr algn="l">
-              <a:defRPr sz="2025" b="0">
+              <a:defRPr sz="1800" b="0">
                 <a:solidFill>
                   <a:srgbClr val="55716A"/>
                 </a:solidFill>
@@ -10584,7 +12377,7 @@
               </a:defRPr>
             </a:lvl4pPr>
             <a:lvl5pPr algn="l">
-              <a:defRPr sz="2025" b="0">
+              <a:defRPr sz="1800" b="0">
                 <a:solidFill>
                   <a:srgbClr val="55716A"/>
                 </a:solidFill>
@@ -10594,7 +12387,7 @@
               </a:defRPr>
             </a:lvl5pPr>
             <a:lvl6pPr algn="l">
-              <a:defRPr sz="2025" b="0">
+              <a:defRPr sz="1800" b="0">
                 <a:solidFill>
                   <a:srgbClr val="55716A"/>
                 </a:solidFill>
@@ -10604,7 +12397,7 @@
               </a:defRPr>
             </a:lvl6pPr>
             <a:lvl7pPr algn="l">
-              <a:defRPr sz="2025" b="0">
+              <a:defRPr sz="1800" b="0">
                 <a:solidFill>
                   <a:srgbClr val="55716A"/>
                 </a:solidFill>
@@ -10614,7 +12407,7 @@
               </a:defRPr>
             </a:lvl7pPr>
             <a:lvl8pPr algn="l">
-              <a:defRPr sz="2025" b="0">
+              <a:defRPr sz="1800" b="0">
                 <a:solidFill>
                   <a:srgbClr val="55716A"/>
                 </a:solidFill>
@@ -10624,7 +12417,7 @@
               </a:defRPr>
             </a:lvl8pPr>
             <a:lvl9pPr algn="l">
-              <a:defRPr sz="2025" b="0">
+              <a:defRPr sz="1800" b="0">
                 <a:solidFill>
                   <a:srgbClr val="55716A"/>
                 </a:solidFill>
@@ -10636,7 +12429,7 @@
           </a:lstStyle>
           <a:p xmlns:a="http://schemas.openxmlformats.org/drawingml/2006/main">
             <a:pPr algn="l">
-              <a:defRPr sz="2025" b="0">
+              <a:defRPr sz="1800" b="0">
                 <a:solidFill>
                   <a:srgbClr val="55716A"/>
                 </a:solidFill>
@@ -10646,7 +12439,7 @@
               </a:defRPr>
             </a:pPr>
             <a:r>
-              <a:rPr sz="2025" b="0">
+              <a:rPr sz="1800" b="0">
                 <a:solidFill>
                   <a:srgbClr val="55716A"/>
                 </a:solidFill>
@@ -10654,7 +12447,7 @@
                 <a:ea typeface="Arial"/>
                 <a:cs typeface="Arial"/>
               </a:rPr>
-              <a:t>Сбор: 20.10.2026</a:t>
+              <a:t>1010 без часов работы</a:t>
             </a:r>
           </a:p>
         </p:txBody>
@@ -10664,7 +12457,163 @@
           <p:cNvPr id="6" name="">
             <a:extLst xmlns:a="http://schemas.openxmlformats.org/drawingml/2006/main">
               <a:ext uri="{FF2B5EF4-FFF2-40B4-BE49-F238E27FC236}">
-                <a16:creationId xmlns:a16="http://schemas.microsoft.com/office/drawing/2014/main" id="{7163AE29-A78D-437F-A308-5333E8648E61}"/>
+                <a16:creationId xmlns:a16="http://schemas.microsoft.com/office/drawing/2014/main" id="{1A15F388-0597-4D4B-99D3-B283627E1C20}"/>
+              </a:ext>
+            </a:extLst>
+          </p:cNvPr>
+          <p:cNvSpPr>
+            <a:spLocks xmlns:a="http://schemas.openxmlformats.org/drawingml/2006/main" noGrp="1"/>
+          </p:cNvSpPr>
+          <p:nvPr/>
+        </p:nvSpPr>
+        <p:spPr>
+          <a:xfrm xmlns:a="http://schemas.openxmlformats.org/drawingml/2006/main">
+            <a:off x="752475" y="4819650"/>
+            <a:ext cx="4953000" cy="457200"/>
+          </a:xfrm>
+          <a:prstGeom xmlns:a="http://schemas.openxmlformats.org/drawingml/2006/main" prst="rect">
+            <a:avLst/>
+          </a:prstGeom>
+          <a:noFill xmlns:a="http://schemas.openxmlformats.org/drawingml/2006/main"/>
+          <a:ln xmlns:a="http://schemas.openxmlformats.org/drawingml/2006/main" w="0">
+            <a:noFill/>
+          </a:ln>
+        </p:spPr>
+        <p:txBody>
+          <a:bodyPr xmlns:a="http://schemas.openxmlformats.org/drawingml/2006/main" wrap="square" lIns="0" tIns="0" rIns="0" bIns="0" anchor="t"/>
+          <a:lstStyle xmlns:a="http://schemas.openxmlformats.org/drawingml/2006/main">
+            <a:defPPr algn="l">
+              <a:defRPr sz="1875" b="0">
+                <a:solidFill>
+                  <a:srgbClr val="55716A"/>
+                </a:solidFill>
+                <a:latin typeface="Arial"/>
+                <a:ea typeface="Arial"/>
+                <a:cs typeface="Arial"/>
+              </a:defRPr>
+            </a:defPPr>
+            <a:lvl1pPr algn="l">
+              <a:defRPr sz="1875" b="0">
+                <a:solidFill>
+                  <a:srgbClr val="55716A"/>
+                </a:solidFill>
+                <a:latin typeface="Arial"/>
+                <a:ea typeface="Arial"/>
+                <a:cs typeface="Arial"/>
+              </a:defRPr>
+            </a:lvl1pPr>
+            <a:lvl2pPr algn="l">
+              <a:defRPr sz="1875" b="0">
+                <a:solidFill>
+                  <a:srgbClr val="55716A"/>
+                </a:solidFill>
+                <a:latin typeface="Arial"/>
+                <a:ea typeface="Arial"/>
+                <a:cs typeface="Arial"/>
+              </a:defRPr>
+            </a:lvl2pPr>
+            <a:lvl3pPr algn="l">
+              <a:defRPr sz="1875" b="0">
+                <a:solidFill>
+                  <a:srgbClr val="55716A"/>
+                </a:solidFill>
+                <a:latin typeface="Arial"/>
+                <a:ea typeface="Arial"/>
+                <a:cs typeface="Arial"/>
+              </a:defRPr>
+            </a:lvl3pPr>
+            <a:lvl4pPr algn="l">
+              <a:defRPr sz="1875" b="0">
+                <a:solidFill>
+                  <a:srgbClr val="55716A"/>
+                </a:solidFill>
+                <a:latin typeface="Arial"/>
+                <a:ea typeface="Arial"/>
+                <a:cs typeface="Arial"/>
+              </a:defRPr>
+            </a:lvl4pPr>
+            <a:lvl5pPr algn="l">
+              <a:defRPr sz="1875" b="0">
+                <a:solidFill>
+                  <a:srgbClr val="55716A"/>
+                </a:solidFill>
+                <a:latin typeface="Arial"/>
+                <a:ea typeface="Arial"/>
+                <a:cs typeface="Arial"/>
+              </a:defRPr>
+            </a:lvl5pPr>
+            <a:lvl6pPr algn="l">
+              <a:defRPr sz="1875" b="0">
+                <a:solidFill>
+                  <a:srgbClr val="55716A"/>
+                </a:solidFill>
+                <a:latin typeface="Arial"/>
+                <a:ea typeface="Arial"/>
+                <a:cs typeface="Arial"/>
+              </a:defRPr>
+            </a:lvl6pPr>
+            <a:lvl7pPr algn="l">
+              <a:defRPr sz="1875" b="0">
+                <a:solidFill>
+                  <a:srgbClr val="55716A"/>
+                </a:solidFill>
+                <a:latin typeface="Arial"/>
+                <a:ea typeface="Arial"/>
+                <a:cs typeface="Arial"/>
+              </a:defRPr>
+            </a:lvl7pPr>
+            <a:lvl8pPr algn="l">
+              <a:defRPr sz="1875" b="0">
+                <a:solidFill>
+                  <a:srgbClr val="55716A"/>
+                </a:solidFill>
+                <a:latin typeface="Arial"/>
+                <a:ea typeface="Arial"/>
+                <a:cs typeface="Arial"/>
+              </a:defRPr>
+            </a:lvl8pPr>
+            <a:lvl9pPr algn="l">
+              <a:defRPr sz="1875" b="0">
+                <a:solidFill>
+                  <a:srgbClr val="55716A"/>
+                </a:solidFill>
+                <a:latin typeface="Arial"/>
+                <a:ea typeface="Arial"/>
+                <a:cs typeface="Arial"/>
+              </a:defRPr>
+            </a:lvl9pPr>
+          </a:lstStyle>
+          <a:p xmlns:a="http://schemas.openxmlformats.org/drawingml/2006/main">
+            <a:pPr algn="l">
+              <a:defRPr sz="1875" b="0">
+                <a:solidFill>
+                  <a:srgbClr val="55716A"/>
+                </a:solidFill>
+                <a:latin typeface="Arial"/>
+                <a:ea typeface="Arial"/>
+                <a:cs typeface="Arial"/>
+              </a:defRPr>
+            </a:pPr>
+            <a:r>
+              <a:rPr sz="1875" b="0">
+                <a:solidFill>
+                  <a:srgbClr val="55716A"/>
+                </a:solidFill>
+                <a:latin typeface="Arial"/>
+                <a:ea typeface="Arial"/>
+                <a:cs typeface="Arial"/>
+              </a:rPr>
+              <a:t>Сбор: 20.10.2026</a:t>
+            </a:r>
+          </a:p>
+        </p:txBody>
+      </p:sp>
+      <p:sp>
+        <p:nvSpPr>
+          <p:cNvPr id="7" name="">
+            <a:extLst xmlns:a="http://schemas.openxmlformats.org/drawingml/2006/main">
+              <a:ext uri="{FF2B5EF4-FFF2-40B4-BE49-F238E27FC236}">
+                <a16:creationId xmlns:a16="http://schemas.microsoft.com/office/drawing/2014/main" id="{2B53E29B-BCCF-419B-9D12-D0BA6CC967E6}"/>
               </a:ext>
             </a:extLst>
           </p:cNvPr>
@@ -10840,10 +12789,10 @@
       </p:sp>
       <p:sp>
         <p:nvSpPr>
-          <p:cNvPr id="7" name="">
+          <p:cNvPr id="8" name="">
             <a:extLst xmlns:a="http://schemas.openxmlformats.org/drawingml/2006/main">
               <a:ext uri="{FF2B5EF4-FFF2-40B4-BE49-F238E27FC236}">
-                <a16:creationId xmlns:a16="http://schemas.microsoft.com/office/drawing/2014/main" id="{4ECA18E4-F738-449A-9CD7-B738D7EC70CE}"/>
+                <a16:creationId xmlns:a16="http://schemas.microsoft.com/office/drawing/2014/main" id="{BCB3FF9F-D45C-446A-92C6-92955952EE10}"/>
               </a:ext>
             </a:extLst>
           </p:cNvPr>
@@ -10869,7 +12818,7 @@
           <a:bodyPr xmlns:a="http://schemas.openxmlformats.org/drawingml/2006/main" wrap="square" lIns="0" tIns="0" rIns="0" bIns="0" anchor="t"/>
           <a:lstStyle xmlns:a="http://schemas.openxmlformats.org/drawingml/2006/main">
             <a:defPPr algn="l">
-              <a:defRPr sz="2700" b="1">
+              <a:defRPr sz="2550" b="1">
                 <a:solidFill>
                   <a:srgbClr val="123C3B"/>
                 </a:solidFill>
@@ -10879,7 +12828,7 @@
               </a:defRPr>
             </a:defPPr>
             <a:lvl1pPr algn="l">
-              <a:defRPr sz="2700" b="1">
+              <a:defRPr sz="2550" b="1">
                 <a:solidFill>
                   <a:srgbClr val="123C3B"/>
                 </a:solidFill>
@@ -10889,7 +12838,7 @@
               </a:defRPr>
             </a:lvl1pPr>
             <a:lvl2pPr algn="l">
-              <a:defRPr sz="2700" b="1">
+              <a:defRPr sz="2550" b="1">
                 <a:solidFill>
                   <a:srgbClr val="123C3B"/>
                 </a:solidFill>
@@ -10899,7 +12848,7 @@
               </a:defRPr>
             </a:lvl2pPr>
             <a:lvl3pPr algn="l">
-              <a:defRPr sz="2700" b="1">
+              <a:defRPr sz="2550" b="1">
                 <a:solidFill>
                   <a:srgbClr val="123C3B"/>
                 </a:solidFill>
@@ -10909,7 +12858,7 @@
               </a:defRPr>
             </a:lvl3pPr>
             <a:lvl4pPr algn="l">
-              <a:defRPr sz="2700" b="1">
+              <a:defRPr sz="2550" b="1">
                 <a:solidFill>
                   <a:srgbClr val="123C3B"/>
                 </a:solidFill>
@@ -10919,7 +12868,7 @@
               </a:defRPr>
             </a:lvl4pPr>
             <a:lvl5pPr algn="l">
-              <a:defRPr sz="2700" b="1">
+              <a:defRPr sz="2550" b="1">
                 <a:solidFill>
                   <a:srgbClr val="123C3B"/>
                 </a:solidFill>
@@ -10929,7 +12878,7 @@
               </a:defRPr>
             </a:lvl5pPr>
             <a:lvl6pPr algn="l">
-              <a:defRPr sz="2700" b="1">
+              <a:defRPr sz="2550" b="1">
                 <a:solidFill>
                   <a:srgbClr val="123C3B"/>
                 </a:solidFill>
@@ -10939,7 +12888,7 @@
               </a:defRPr>
             </a:lvl6pPr>
             <a:lvl7pPr algn="l">
-              <a:defRPr sz="2700" b="1">
+              <a:defRPr sz="2550" b="1">
                 <a:solidFill>
                   <a:srgbClr val="123C3B"/>
                 </a:solidFill>
@@ -10949,7 +12898,7 @@
               </a:defRPr>
             </a:lvl7pPr>
             <a:lvl8pPr algn="l">
-              <a:defRPr sz="2700" b="1">
+              <a:defRPr sz="2550" b="1">
                 <a:solidFill>
                   <a:srgbClr val="123C3B"/>
                 </a:solidFill>
@@ -10959,7 +12908,7 @@
               </a:defRPr>
             </a:lvl8pPr>
             <a:lvl9pPr algn="l">
-              <a:defRPr sz="2700" b="1">
+              <a:defRPr sz="2550" b="1">
                 <a:solidFill>
                   <a:srgbClr val="123C3B"/>
                 </a:solidFill>
@@ -10971,7 +12920,7 @@
           </a:lstStyle>
           <a:p xmlns:a="http://schemas.openxmlformats.org/drawingml/2006/main">
             <a:pPr algn="l">
-              <a:defRPr sz="2700" b="1">
+              <a:defRPr sz="2550" b="1">
                 <a:solidFill>
                   <a:srgbClr val="123C3B"/>
                 </a:solidFill>
@@ -10981,7 +12930,7 @@
               </a:defRPr>
             </a:pPr>
             <a:r>
-              <a:rPr sz="2700" b="1">
+              <a:rPr sz="2550" b="1">
                 <a:solidFill>
                   <a:srgbClr val="123C3B"/>
                 </a:solidFill>
@@ -10996,10 +12945,10 @@
       </p:sp>
       <p:sp>
         <p:nvSpPr>
-          <p:cNvPr id="8" name="">
+          <p:cNvPr id="9" name="">
             <a:extLst xmlns:a="http://schemas.openxmlformats.org/drawingml/2006/main">
               <a:ext uri="{FF2B5EF4-FFF2-40B4-BE49-F238E27FC236}">
-                <a16:creationId xmlns:a16="http://schemas.microsoft.com/office/drawing/2014/main" id="{DA3EEA2E-3121-4AFF-BBCA-6524F65A5AB5}"/>
+                <a16:creationId xmlns:a16="http://schemas.microsoft.com/office/drawing/2014/main" id="{C8207DB8-25B3-4418-A0E0-567D63C93930}"/>
               </a:ext>
             </a:extLst>
           </p:cNvPr>
@@ -11025,7 +12974,7 @@
           <a:bodyPr xmlns:a="http://schemas.openxmlformats.org/drawingml/2006/main" wrap="square" lIns="0" tIns="0" rIns="0" bIns="0" anchor="t"/>
           <a:lstStyle xmlns:a="http://schemas.openxmlformats.org/drawingml/2006/main">
             <a:defPPr algn="l">
-              <a:defRPr sz="2175" b="0">
+              <a:defRPr sz="1875" b="0">
                 <a:solidFill>
                   <a:srgbClr val="123C3B"/>
                 </a:solidFill>
@@ -11035,7 +12984,7 @@
               </a:defRPr>
             </a:defPPr>
             <a:lvl1pPr algn="l">
-              <a:defRPr sz="2175" b="0">
+              <a:defRPr sz="1875" b="0">
                 <a:solidFill>
                   <a:srgbClr val="123C3B"/>
                 </a:solidFill>
@@ -11045,7 +12994,7 @@
               </a:defRPr>
             </a:lvl1pPr>
             <a:lvl2pPr algn="l">
-              <a:defRPr sz="2175" b="0">
+              <a:defRPr sz="1875" b="0">
                 <a:solidFill>
                   <a:srgbClr val="123C3B"/>
                 </a:solidFill>
@@ -11055,7 +13004,7 @@
               </a:defRPr>
             </a:lvl2pPr>
             <a:lvl3pPr algn="l">
-              <a:defRPr sz="2175" b="0">
+              <a:defRPr sz="1875" b="0">
                 <a:solidFill>
                   <a:srgbClr val="123C3B"/>
                 </a:solidFill>
@@ -11065,7 +13014,7 @@
               </a:defRPr>
             </a:lvl3pPr>
             <a:lvl4pPr algn="l">
-              <a:defRPr sz="2175" b="0">
+              <a:defRPr sz="1875" b="0">
                 <a:solidFill>
                   <a:srgbClr val="123C3B"/>
                 </a:solidFill>
@@ -11075,7 +13024,7 @@
               </a:defRPr>
             </a:lvl4pPr>
             <a:lvl5pPr algn="l">
-              <a:defRPr sz="2175" b="0">
+              <a:defRPr sz="1875" b="0">
                 <a:solidFill>
                   <a:srgbClr val="123C3B"/>
                 </a:solidFill>
@@ -11085,7 +13034,7 @@
               </a:defRPr>
             </a:lvl5pPr>
             <a:lvl6pPr algn="l">
-              <a:defRPr sz="2175" b="0">
+              <a:defRPr sz="1875" b="0">
                 <a:solidFill>
                   <a:srgbClr val="123C3B"/>
                 </a:solidFill>
@@ -11095,7 +13044,7 @@
               </a:defRPr>
             </a:lvl6pPr>
             <a:lvl7pPr algn="l">
-              <a:defRPr sz="2175" b="0">
+              <a:defRPr sz="1875" b="0">
                 <a:solidFill>
                   <a:srgbClr val="123C3B"/>
                 </a:solidFill>
@@ -11105,7 +13054,7 @@
               </a:defRPr>
             </a:lvl7pPr>
             <a:lvl8pPr algn="l">
-              <a:defRPr sz="2175" b="0">
+              <a:defRPr sz="1875" b="0">
                 <a:solidFill>
                   <a:srgbClr val="123C3B"/>
                 </a:solidFill>
@@ -11115,7 +13064,7 @@
               </a:defRPr>
             </a:lvl8pPr>
             <a:lvl9pPr algn="l">
-              <a:defRPr sz="2175" b="0">
+              <a:defRPr sz="1875" b="0">
                 <a:solidFill>
                   <a:srgbClr val="123C3B"/>
                 </a:solidFill>
@@ -11127,7 +13076,7 @@
           </a:lstStyle>
           <a:p xmlns:a="http://schemas.openxmlformats.org/drawingml/2006/main">
             <a:pPr algn="l">
-              <a:defRPr sz="2175" b="0">
+              <a:defRPr sz="1875" b="0">
                 <a:solidFill>
                   <a:srgbClr val="123C3B"/>
                 </a:solidFill>
@@ -11137,7 +13086,7 @@
               </a:defRPr>
             </a:pPr>
             <a:r>
-              <a:rPr sz="2175" b="0">
+              <a:rPr sz="1875" b="0">
                 <a:solidFill>
                   <a:srgbClr val="123C3B"/>
                 </a:solidFill>
@@ -11145,12 +13094,12 @@
                 <a:ea typeface="Arial"/>
                 <a:cs typeface="Arial"/>
               </a:rPr>
-              <a:t>Название, координаты, категория</a:t>
+              <a:t>Снимок OSM с датой и источниками</a:t>
             </a:r>
           </a:p>
           <a:p xmlns:a="http://schemas.openxmlformats.org/drawingml/2006/main">
             <a:pPr algn="l">
-              <a:defRPr sz="2175" b="0">
+              <a:defRPr sz="1875" b="0">
                 <a:solidFill>
                   <a:srgbClr val="123C3B"/>
                 </a:solidFill>
@@ -11160,7 +13109,7 @@
               </a:defRPr>
             </a:pPr>
             <a:r>
-              <a:rPr sz="2175" b="0">
+              <a:rPr sz="1875" b="0">
                 <a:solidFill>
                   <a:srgbClr val="123C3B"/>
                 </a:solidFill>
@@ -11168,12 +13117,12 @@
                 <a:ea typeface="Arial"/>
                 <a:cs typeface="Arial"/>
               </a:rPr>
-              <a:t>Описание и доступные теги</a:t>
+              <a:t>Обновление по согласию, TTL 24 ч</a:t>
             </a:r>
           </a:p>
           <a:p xmlns:a="http://schemas.openxmlformats.org/drawingml/2006/main">
             <a:pPr algn="l">
-              <a:defRPr sz="2175" b="0">
+              <a:defRPr sz="1875" b="0">
                 <a:solidFill>
                   <a:srgbClr val="123C3B"/>
                 </a:solidFill>
@@ -11183,7 +13132,7 @@
               </a:defRPr>
             </a:pPr>
             <a:r>
-              <a:rPr sz="2175" b="0">
+              <a:rPr sz="1875" b="0">
                 <a:solidFill>
                   <a:srgbClr val="123C3B"/>
                 </a:solidFill>
@@ -11191,17 +13140,40 @@
                 <a:ea typeface="Arial"/>
                 <a:cs typeface="Arial"/>
               </a:rPr>
-              <a:t>ID источника, ссылка и дата</a:t>
+              <a:t>При сбое — последний целый набор</a:t>
+            </a:r>
+          </a:p>
+          <a:p xmlns:a="http://schemas.openxmlformats.org/drawingml/2006/main">
+            <a:pPr algn="l">
+              <a:defRPr sz="1875" b="0">
+                <a:solidFill>
+                  <a:srgbClr val="123C3B"/>
+                </a:solidFill>
+                <a:latin typeface="Arial"/>
+                <a:ea typeface="Arial"/>
+                <a:cs typeface="Arial"/>
+              </a:defRPr>
+            </a:pPr>
+            <a:r>
+              <a:rPr sz="1875" b="0">
+                <a:solidFill>
+                  <a:srgbClr val="123C3B"/>
+                </a:solidFill>
+                <a:latin typeface="Arial"/>
+                <a:ea typeface="Arial"/>
+                <a:cs typeface="Arial"/>
+              </a:rPr>
+              <a:t>2ГИС: отдельные живые карточки</a:t>
             </a:r>
           </a:p>
         </p:txBody>
       </p:sp>
       <p:sp>
         <p:nvSpPr>
-          <p:cNvPr id="9" name="">
+          <p:cNvPr id="10" name="">
             <a:extLst xmlns:a="http://schemas.openxmlformats.org/drawingml/2006/main">
               <a:ext uri="{FF2B5EF4-FFF2-40B4-BE49-F238E27FC236}">
-                <a16:creationId xmlns:a16="http://schemas.microsoft.com/office/drawing/2014/main" id="{6FCD2105-D095-49CF-8BF6-7BC5D6EEA825}"/>
+                <a16:creationId xmlns:a16="http://schemas.microsoft.com/office/drawing/2014/main" id="{83B7B75D-F5C3-4B5E-B023-8B43F8D7DABA}"/>
               </a:ext>
             </a:extLst>
           </p:cNvPr>
@@ -11213,7 +13185,7 @@
         <p:spPr>
           <a:xfrm xmlns:a="http://schemas.openxmlformats.org/drawingml/2006/main">
             <a:off x="6248400" y="5067300"/>
-            <a:ext cx="5238750" cy="819150"/>
+            <a:ext cx="5238750" cy="952500"/>
           </a:xfrm>
           <a:prstGeom xmlns:a="http://schemas.openxmlformats.org/drawingml/2006/main" prst="rect">
             <a:avLst/>
@@ -11227,7 +13199,7 @@
           <a:bodyPr xmlns:a="http://schemas.openxmlformats.org/drawingml/2006/main" wrap="square" lIns="0" tIns="0" rIns="0" bIns="0" anchor="t"/>
           <a:lstStyle xmlns:a="http://schemas.openxmlformats.org/drawingml/2006/main">
             <a:defPPr algn="l">
-              <a:defRPr sz="2025" b="0">
+              <a:defRPr sz="1800" b="0">
                 <a:solidFill>
                   <a:srgbClr val="55716A"/>
                 </a:solidFill>
@@ -11237,7 +13209,7 @@
               </a:defRPr>
             </a:defPPr>
             <a:lvl1pPr algn="l">
-              <a:defRPr sz="2025" b="0">
+              <a:defRPr sz="1800" b="0">
                 <a:solidFill>
                   <a:srgbClr val="55716A"/>
                 </a:solidFill>
@@ -11247,7 +13219,7 @@
               </a:defRPr>
             </a:lvl1pPr>
             <a:lvl2pPr algn="l">
-              <a:defRPr sz="2025" b="0">
+              <a:defRPr sz="1800" b="0">
                 <a:solidFill>
                   <a:srgbClr val="55716A"/>
                 </a:solidFill>
@@ -11257,7 +13229,7 @@
               </a:defRPr>
             </a:lvl2pPr>
             <a:lvl3pPr algn="l">
-              <a:defRPr sz="2025" b="0">
+              <a:defRPr sz="1800" b="0">
                 <a:solidFill>
                   <a:srgbClr val="55716A"/>
                 </a:solidFill>
@@ -11267,7 +13239,7 @@
               </a:defRPr>
             </a:lvl3pPr>
             <a:lvl4pPr algn="l">
-              <a:defRPr sz="2025" b="0">
+              <a:defRPr sz="1800" b="0">
                 <a:solidFill>
                   <a:srgbClr val="55716A"/>
                 </a:solidFill>
@@ -11277,7 +13249,7 @@
               </a:defRPr>
             </a:lvl4pPr>
             <a:lvl5pPr algn="l">
-              <a:defRPr sz="2025" b="0">
+              <a:defRPr sz="1800" b="0">
                 <a:solidFill>
                   <a:srgbClr val="55716A"/>
                 </a:solidFill>
@@ -11287,7 +13259,7 @@
               </a:defRPr>
             </a:lvl5pPr>
             <a:lvl6pPr algn="l">
-              <a:defRPr sz="2025" b="0">
+              <a:defRPr sz="1800" b="0">
                 <a:solidFill>
                   <a:srgbClr val="55716A"/>
                 </a:solidFill>
@@ -11297,7 +13269,7 @@
               </a:defRPr>
             </a:lvl6pPr>
             <a:lvl7pPr algn="l">
-              <a:defRPr sz="2025" b="0">
+              <a:defRPr sz="1800" b="0">
                 <a:solidFill>
                   <a:srgbClr val="55716A"/>
                 </a:solidFill>
@@ -11307,7 +13279,7 @@
               </a:defRPr>
             </a:lvl7pPr>
             <a:lvl8pPr algn="l">
-              <a:defRPr sz="2025" b="0">
+              <a:defRPr sz="1800" b="0">
                 <a:solidFill>
                   <a:srgbClr val="55716A"/>
                 </a:solidFill>
@@ -11317,7 +13289,7 @@
               </a:defRPr>
             </a:lvl8pPr>
             <a:lvl9pPr algn="l">
-              <a:defRPr sz="2025" b="0">
+              <a:defRPr sz="1800" b="0">
                 <a:solidFill>
                   <a:srgbClr val="55716A"/>
                 </a:solidFill>
@@ -11329,7 +13301,7 @@
           </a:lstStyle>
           <a:p xmlns:a="http://schemas.openxmlformats.org/drawingml/2006/main">
             <a:pPr algn="l">
-              <a:defRPr sz="2025" b="0">
+              <a:defRPr sz="1800" b="0">
                 <a:solidFill>
                   <a:srgbClr val="55716A"/>
                 </a:solidFill>
@@ -11339,7 +13311,7 @@
               </a:defRPr>
             </a:pPr>
             <a:r>
-              <a:rPr sz="2025" b="0">
+              <a:rPr sz="1800" b="0">
                 <a:solidFill>
                   <a:srgbClr val="55716A"/>
                 </a:solidFill>
@@ -11347,12 +13319,12 @@
                 <a:ea typeface="Arial"/>
                 <a:cs typeface="Arial"/>
               </a:rPr>
-              <a:t>492 POI без часов работы</a:t>
+              <a:t>2ГИС: до 10 карточек за запрос</a:t>
             </a:r>
           </a:p>
           <a:p xmlns:a="http://schemas.openxmlformats.org/drawingml/2006/main">
             <a:pPr algn="l">
-              <a:defRPr sz="2025" b="0">
+              <a:defRPr sz="1800" b="0">
                 <a:solidFill>
                   <a:srgbClr val="55716A"/>
                 </a:solidFill>
@@ -11362,7 +13334,7 @@
               </a:defRPr>
             </a:pPr>
             <a:r>
-              <a:rPr sz="2025" b="0">
+              <a:rPr sz="1800" b="0">
                 <a:solidFill>
                   <a:srgbClr val="55716A"/>
                 </a:solidFill>
@@ -11370,7 +13342,7 @@
                 <a:ea typeface="Arial"/>
                 <a:cs typeface="Arial"/>
               </a:rPr>
-              <a:t>Неизвестное не становится обещанием</a:t>
+              <a:t>20 попыток / 24 ч, без POI-кэша</a:t>
             </a:r>
           </a:p>
         </p:txBody>
@@ -11378,14 +13350,14 @@
     </p:spTree>
     <p:extLst>
       <p:ext uri="{BB962C8B-B14F-4D97-AF65-F5344CB8AC3E}">
-        <p14:creationId xmlns:p14="http://schemas.microsoft.com/office/powerpoint/2010/main" val="1048807599"/>
+        <p14:creationId xmlns:p14="http://schemas.microsoft.com/office/powerpoint/2010/main" val="452861497"/>
       </p:ext>
     </p:extLst>
   </p:cSld>
 </p:sld>
 </file>
 
-<file path=ppt/slides/slide6.xml><?xml version="1.0" encoding="utf-8"?>
+<file path=ppt/slides/slide7.xml><?xml version="1.0" encoding="utf-8"?>
 <p:sld xmlns:p="http://schemas.openxmlformats.org/presentationml/2006/main">
   <p:cSld>
     <p:bg>
@@ -11409,7 +13381,7 @@
           <p:cNvPr id="7" name="">
             <a:extLst xmlns:a="http://schemas.openxmlformats.org/drawingml/2006/main">
               <a:ext uri="{FF2B5EF4-FFF2-40B4-BE49-F238E27FC236}">
-                <a16:creationId xmlns:a16="http://schemas.microsoft.com/office/drawing/2014/main" id="{5D4C4896-4E4B-4D51-9FF8-12885823CCF3}"/>
+                <a16:creationId xmlns:a16="http://schemas.microsoft.com/office/drawing/2014/main" id="{783839ED-DEF6-4078-8AAB-302BB689532C}"/>
               </a:ext>
             </a:extLst>
           </p:cNvPr>
@@ -11565,7 +13537,7 @@
           <p:cNvPr id="2" name="">
             <a:extLst xmlns:a="http://schemas.openxmlformats.org/drawingml/2006/main">
               <a:ext uri="{FF2B5EF4-FFF2-40B4-BE49-F238E27FC236}">
-                <a16:creationId xmlns:a16="http://schemas.microsoft.com/office/drawing/2014/main" id="{E3E3555F-C1DE-4662-9642-0C24209C37FE}"/>
+                <a16:creationId xmlns:a16="http://schemas.microsoft.com/office/drawing/2014/main" id="{B8FF94B1-81E8-45BB-88AD-6430F8EE2E7D}"/>
               </a:ext>
             </a:extLst>
           </p:cNvPr>
@@ -11711,7 +13683,7 @@
                 <a:ea typeface="Arial"/>
                 <a:cs typeface="Arial"/>
               </a:rPr>
-              <a:t>06</a:t>
+              <a:t>07</a:t>
             </a:r>
           </a:p>
         </p:txBody>
@@ -11721,7 +13693,7 @@
           <p:cNvPr id="3" name="">
             <a:extLst xmlns:a="http://schemas.openxmlformats.org/drawingml/2006/main">
               <a:ext uri="{FF2B5EF4-FFF2-40B4-BE49-F238E27FC236}">
-                <a16:creationId xmlns:a16="http://schemas.microsoft.com/office/drawing/2014/main" id="{136B9C0B-ED81-4623-AA99-17BE23D3B92F}"/>
+                <a16:creationId xmlns:a16="http://schemas.microsoft.com/office/drawing/2014/main" id="{63EFAECF-88C4-4791-84FE-30163277B064}"/>
               </a:ext>
             </a:extLst>
           </p:cNvPr>
@@ -11877,7 +13849,7 @@
           <p:cNvPr id="4" name="">
             <a:extLst xmlns:a="http://schemas.openxmlformats.org/drawingml/2006/main">
               <a:ext uri="{FF2B5EF4-FFF2-40B4-BE49-F238E27FC236}">
-                <a16:creationId xmlns:a16="http://schemas.microsoft.com/office/drawing/2014/main" id="{3A5C04CC-EB73-42A3-9901-E3FBAD882296}"/>
+                <a16:creationId xmlns:a16="http://schemas.microsoft.com/office/drawing/2014/main" id="{1EC61FD6-699E-4050-94FA-46BDA65031C7}"/>
               </a:ext>
             </a:extLst>
           </p:cNvPr>
@@ -12023,7 +13995,7 @@
                 <a:ea typeface="Arial"/>
                 <a:cs typeface="Arial"/>
               </a:rPr>
-              <a:t>87 автоматических тестов пройдено</a:t>
+              <a:t>131 автоматических тестов пройдено</a:t>
             </a:r>
           </a:p>
         </p:txBody>
@@ -12033,7 +14005,7 @@
           <p:cNvPr id="5" name="">
             <a:extLst xmlns:a="http://schemas.openxmlformats.org/drawingml/2006/main">
               <a:ext uri="{FF2B5EF4-FFF2-40B4-BE49-F238E27FC236}">
-                <a16:creationId xmlns:a16="http://schemas.microsoft.com/office/drawing/2014/main" id="{BA8653A7-4B4B-4976-BDE4-0F2AA76CA389}"/>
+                <a16:creationId xmlns:a16="http://schemas.microsoft.com/office/drawing/2014/main" id="{D0D74990-0DDA-4412-A558-551B3B0E714C}"/>
               </a:ext>
             </a:extLst>
           </p:cNvPr>
@@ -12473,7 +14445,7 @@
           <p:cNvPr id="6" name="">
             <a:extLst xmlns:a="http://schemas.openxmlformats.org/drawingml/2006/main">
               <a:ext uri="{FF2B5EF4-FFF2-40B4-BE49-F238E27FC236}">
-                <a16:creationId xmlns:a16="http://schemas.microsoft.com/office/drawing/2014/main" id="{65273078-EFAE-451C-BDE5-45F13703189F}"/>
+                <a16:creationId xmlns:a16="http://schemas.microsoft.com/office/drawing/2014/main" id="{30D42BFA-12FB-4F44-A7FB-63F8A1232E78}"/>
               </a:ext>
             </a:extLst>
           </p:cNvPr>
@@ -12650,14 +14622,14 @@
     </p:spTree>
     <p:extLst>
       <p:ext uri="{BB962C8B-B14F-4D97-AF65-F5344CB8AC3E}">
-        <p14:creationId xmlns:p14="http://schemas.microsoft.com/office/powerpoint/2010/main" val="2137771699"/>
+        <p14:creationId xmlns:p14="http://schemas.microsoft.com/office/powerpoint/2010/main" val="291755623"/>
       </p:ext>
     </p:extLst>
   </p:cSld>
 </p:sld>
 </file>
 
-<file path=ppt/slides/slide7.xml><?xml version="1.0" encoding="utf-8"?>
+<file path=ppt/slides/slide8.xml><?xml version="1.0" encoding="utf-8"?>
 <p:sld xmlns:p="http://schemas.openxmlformats.org/presentationml/2006/main">
   <p:cSld>
     <p:bg>
@@ -12681,7 +14653,7 @@
           <p:cNvPr id="7" name="">
             <a:extLst xmlns:a="http://schemas.openxmlformats.org/drawingml/2006/main">
               <a:ext uri="{FF2B5EF4-FFF2-40B4-BE49-F238E27FC236}">
-                <a16:creationId xmlns:a16="http://schemas.microsoft.com/office/drawing/2014/main" id="{B15F59D6-B3AB-4091-AE86-72A5351673A2}"/>
+                <a16:creationId xmlns:a16="http://schemas.microsoft.com/office/drawing/2014/main" id="{8754C068-FF30-4213-92D0-3DF2FB872912}"/>
               </a:ext>
             </a:extLst>
           </p:cNvPr>
@@ -12837,7 +14809,7 @@
           <p:cNvPr id="2" name="">
             <a:extLst xmlns:a="http://schemas.openxmlformats.org/drawingml/2006/main">
               <a:ext uri="{FF2B5EF4-FFF2-40B4-BE49-F238E27FC236}">
-                <a16:creationId xmlns:a16="http://schemas.microsoft.com/office/drawing/2014/main" id="{F311032E-51DB-4861-9C93-8BEE581CC6EF}"/>
+                <a16:creationId xmlns:a16="http://schemas.microsoft.com/office/drawing/2014/main" id="{7F039D54-673E-4F4A-A2B8-0EC2EA7EEBD1}"/>
               </a:ext>
             </a:extLst>
           </p:cNvPr>
@@ -12983,7 +14955,7 @@
                 <a:ea typeface="Arial"/>
                 <a:cs typeface="Arial"/>
               </a:rPr>
-              <a:t>07</a:t>
+              <a:t>08</a:t>
             </a:r>
           </a:p>
         </p:txBody>
@@ -12993,7 +14965,7 @@
           <p:cNvPr id="3" name="">
             <a:extLst xmlns:a="http://schemas.openxmlformats.org/drawingml/2006/main">
               <a:ext uri="{FF2B5EF4-FFF2-40B4-BE49-F238E27FC236}">
-                <a16:creationId xmlns:a16="http://schemas.microsoft.com/office/drawing/2014/main" id="{E4E9BED9-81D3-4F02-AE10-179A581BA747}"/>
+                <a16:creationId xmlns:a16="http://schemas.microsoft.com/office/drawing/2014/main" id="{DABBD966-04B1-436A-8D55-0036C7469E65}"/>
               </a:ext>
             </a:extLst>
           </p:cNvPr>
@@ -13149,7 +15121,7 @@
           <p:cNvPr id="4" name="">
             <a:extLst xmlns:a="http://schemas.openxmlformats.org/drawingml/2006/main">
               <a:ext uri="{FF2B5EF4-FFF2-40B4-BE49-F238E27FC236}">
-                <a16:creationId xmlns:a16="http://schemas.microsoft.com/office/drawing/2014/main" id="{0DD30EFA-4D0A-4A50-9178-0BEC338D180E}"/>
+                <a16:creationId xmlns:a16="http://schemas.microsoft.com/office/drawing/2014/main" id="{2B905CE6-085E-409F-BF39-82E2AFC80C75}"/>
               </a:ext>
             </a:extLst>
           </p:cNvPr>
@@ -13295,7 +15267,7 @@
                 <a:ea typeface="Arial"/>
                 <a:cs typeface="Arial"/>
               </a:rPr>
-              <a:t>Без аккаунта, истории прогулок и аналитики</a:t>
+              <a:t>Запросы и координаты не сохраняются приложением</a:t>
             </a:r>
           </a:p>
           <a:p xmlns:a="http://schemas.openxmlformats.org/drawingml/2006/main">
@@ -13318,7 +15290,7 @@
                 <a:ea typeface="Arial"/>
                 <a:cs typeface="Arial"/>
               </a:rPr>
-              <a:t>Запросы и координаты не сохраняются приложением</a:t>
+              <a:t>Внешние тайлы получают IP и область просмотра</a:t>
             </a:r>
           </a:p>
         </p:txBody>
@@ -13328,7 +15300,7 @@
           <p:cNvPr id="5" name="">
             <a:extLst xmlns:a="http://schemas.openxmlformats.org/drawingml/2006/main">
               <a:ext uri="{FF2B5EF4-FFF2-40B4-BE49-F238E27FC236}">
-                <a16:creationId xmlns:a16="http://schemas.microsoft.com/office/drawing/2014/main" id="{BA6C71BF-65B1-4332-A7D2-6D68D9436302}"/>
+                <a16:creationId xmlns:a16="http://schemas.microsoft.com/office/drawing/2014/main" id="{23EC4F20-8ECA-4088-A097-F32666975272}"/>
               </a:ext>
             </a:extLst>
           </p:cNvPr>
@@ -13484,7 +15456,7 @@
           <p:cNvPr id="6" name="">
             <a:extLst xmlns:a="http://schemas.openxmlformats.org/drawingml/2006/main">
               <a:ext uri="{FF2B5EF4-FFF2-40B4-BE49-F238E27FC236}">
-                <a16:creationId xmlns:a16="http://schemas.microsoft.com/office/drawing/2014/main" id="{27424F80-ADEE-4BFE-82BE-28DB101ED7FE}"/>
+                <a16:creationId xmlns:a16="http://schemas.microsoft.com/office/drawing/2014/main" id="{3A137E92-4E25-42A2-94F1-FDB79C48B5CF}"/>
               </a:ext>
             </a:extLst>
           </p:cNvPr>
@@ -13661,14 +15633,14 @@
     </p:spTree>
     <p:extLst>
       <p:ext uri="{BB962C8B-B14F-4D97-AF65-F5344CB8AC3E}">
-        <p14:creationId xmlns:p14="http://schemas.microsoft.com/office/powerpoint/2010/main" val="1643546175"/>
+        <p14:creationId xmlns:p14="http://schemas.microsoft.com/office/powerpoint/2010/main" val="1863077832"/>
       </p:ext>
     </p:extLst>
   </p:cSld>
 </p:sld>
 </file>
 
-<file path=ppt/slides/slide8.xml><?xml version="1.0" encoding="utf-8"?>
+<file path=ppt/slides/slide9.xml><?xml version="1.0" encoding="utf-8"?>
 <p:sld xmlns:p="http://schemas.openxmlformats.org/presentationml/2006/main">
   <p:cSld>
     <p:bg>
@@ -13692,7 +15664,7 @@
           <p:cNvPr id="8" name="">
             <a:extLst xmlns:a="http://schemas.openxmlformats.org/drawingml/2006/main">
               <a:ext uri="{FF2B5EF4-FFF2-40B4-BE49-F238E27FC236}">
-                <a16:creationId xmlns:a16="http://schemas.microsoft.com/office/drawing/2014/main" id="{3197761E-A6FE-4E5E-8AFB-D8959B39F544}"/>
+                <a16:creationId xmlns:a16="http://schemas.microsoft.com/office/drawing/2014/main" id="{24A7912D-0D02-4EF1-AB61-5BDB285122A1}"/>
               </a:ext>
             </a:extLst>
           </p:cNvPr>
@@ -13848,7 +15820,7 @@
           <p:cNvPr id="2" name="">
             <a:extLst xmlns:a="http://schemas.openxmlformats.org/drawingml/2006/main">
               <a:ext uri="{FF2B5EF4-FFF2-40B4-BE49-F238E27FC236}">
-                <a16:creationId xmlns:a16="http://schemas.microsoft.com/office/drawing/2014/main" id="{85A6D6E2-2CCC-4AC8-8CCC-79BD24D385C1}"/>
+                <a16:creationId xmlns:a16="http://schemas.microsoft.com/office/drawing/2014/main" id="{78DA4679-8967-4B24-AA0D-B6D96985079B}"/>
               </a:ext>
             </a:extLst>
           </p:cNvPr>
@@ -13994,7 +15966,7 @@
                 <a:ea typeface="Arial"/>
                 <a:cs typeface="Arial"/>
               </a:rPr>
-              <a:t>08</a:t>
+              <a:t>09</a:t>
             </a:r>
           </a:p>
         </p:txBody>
@@ -14004,7 +15976,7 @@
           <p:cNvPr id="3" name="">
             <a:extLst xmlns:a="http://schemas.openxmlformats.org/drawingml/2006/main">
               <a:ext uri="{FF2B5EF4-FFF2-40B4-BE49-F238E27FC236}">
-                <a16:creationId xmlns:a16="http://schemas.microsoft.com/office/drawing/2014/main" id="{266696BD-CDAD-442D-9160-61AEA0EC749D}"/>
+                <a16:creationId xmlns:a16="http://schemas.microsoft.com/office/drawing/2014/main" id="{41FBD0B9-6AC9-44D7-A954-8A1EE39EC83A}"/>
               </a:ext>
             </a:extLst>
           </p:cNvPr>
@@ -14183,7 +16155,7 @@
           <p:cNvPr id="4" name="">
             <a:extLst xmlns:a="http://schemas.openxmlformats.org/drawingml/2006/main">
               <a:ext uri="{FF2B5EF4-FFF2-40B4-BE49-F238E27FC236}">
-                <a16:creationId xmlns:a16="http://schemas.microsoft.com/office/drawing/2014/main" id="{FBFC14F7-6D04-41AC-960A-214A529EC29B}"/>
+                <a16:creationId xmlns:a16="http://schemas.microsoft.com/office/drawing/2014/main" id="{E653F4B1-9D19-4607-B402-FC028583A107}"/>
               </a:ext>
             </a:extLst>
           </p:cNvPr>
@@ -14362,7 +16334,7 @@
           <p:cNvPr id="5" name="">
             <a:extLst xmlns:a="http://schemas.openxmlformats.org/drawingml/2006/main">
               <a:ext uri="{FF2B5EF4-FFF2-40B4-BE49-F238E27FC236}">
-                <a16:creationId xmlns:a16="http://schemas.microsoft.com/office/drawing/2014/main" id="{E575CA6D-2CCC-440A-B8E7-831FC8EB8A6B}"/>
+                <a16:creationId xmlns:a16="http://schemas.microsoft.com/office/drawing/2014/main" id="{77213319-15DD-4F97-B0D7-43974E41F3C5}"/>
               </a:ext>
             </a:extLst>
           </p:cNvPr>
@@ -14518,7 +16490,7 @@
           <p:cNvPr id="6" name="">
             <a:extLst xmlns:a="http://schemas.openxmlformats.org/drawingml/2006/main">
               <a:ext uri="{FF2B5EF4-FFF2-40B4-BE49-F238E27FC236}">
-                <a16:creationId xmlns:a16="http://schemas.microsoft.com/office/drawing/2014/main" id="{3ABD2B09-E029-4CCB-BC9F-17A491C1192B}"/>
+                <a16:creationId xmlns:a16="http://schemas.microsoft.com/office/drawing/2014/main" id="{007710A1-33A2-432D-B6BD-D557474B8F81}"/>
               </a:ext>
             </a:extLst>
           </p:cNvPr>
@@ -14743,7 +16715,7 @@
           <p:cNvPr id="7" name="">
             <a:extLst xmlns:a="http://schemas.openxmlformats.org/drawingml/2006/main">
               <a:ext uri="{FF2B5EF4-FFF2-40B4-BE49-F238E27FC236}">
-                <a16:creationId xmlns:a16="http://schemas.microsoft.com/office/drawing/2014/main" id="{D3944F81-52BB-4861-A089-4C2D1C1E15C3}"/>
+                <a16:creationId xmlns:a16="http://schemas.microsoft.com/office/drawing/2014/main" id="{92B6EC28-555B-468B-A16B-C69678E4C346}"/>
               </a:ext>
             </a:extLst>
           </p:cNvPr>
@@ -14897,954 +16869,7 @@
     </p:spTree>
     <p:extLst>
       <p:ext uri="{BB962C8B-B14F-4D97-AF65-F5344CB8AC3E}">
-        <p14:creationId xmlns:p14="http://schemas.microsoft.com/office/powerpoint/2010/main" val="1172342710"/>
-      </p:ext>
-    </p:extLst>
-  </p:cSld>
-</p:sld>
-</file>
-
-<file path=ppt/slides/slide9.xml><?xml version="1.0" encoding="utf-8"?>
-<p:sld xmlns:p="http://schemas.openxmlformats.org/presentationml/2006/main">
-  <p:cSld>
-    <p:bg>
-      <p:bgPr>
-        <a:solidFill xmlns:a="http://schemas.openxmlformats.org/drawingml/2006/main">
-          <a:srgbClr val="F4F0E5"/>
-        </a:solidFill>
-      </p:bgPr>
-    </p:bg>
-    <p:spTree>
-      <p:nvGrpSpPr>
-        <p:cNvPr id="1" name=""/>
-        <p:cNvGrpSpPr/>
-        <p:nvPr/>
-      </p:nvGrpSpPr>
-      <p:grpSpPr>
-        <a:xfrm xmlns:a="http://schemas.openxmlformats.org/drawingml/2006/main"/>
-      </p:grpSpPr>
-      <p:sp>
-        <p:nvSpPr>
-          <p:cNvPr id="6" name="">
-            <a:extLst xmlns:a="http://schemas.openxmlformats.org/drawingml/2006/main">
-              <a:ext uri="{FF2B5EF4-FFF2-40B4-BE49-F238E27FC236}">
-                <a16:creationId xmlns:a16="http://schemas.microsoft.com/office/drawing/2014/main" id="{0D9C551E-8588-41B3-88D6-94F817980AE2}"/>
-              </a:ext>
-            </a:extLst>
-          </p:cNvPr>
-          <p:cNvSpPr>
-            <a:spLocks xmlns:a="http://schemas.openxmlformats.org/drawingml/2006/main" noGrp="1"/>
-          </p:cNvSpPr>
-          <p:nvPr/>
-        </p:nvSpPr>
-        <p:spPr>
-          <a:xfrm xmlns:a="http://schemas.openxmlformats.org/drawingml/2006/main">
-            <a:off x="685800" y="504825"/>
-            <a:ext cx="10820400" cy="857250"/>
-          </a:xfrm>
-          <a:prstGeom xmlns:a="http://schemas.openxmlformats.org/drawingml/2006/main" prst="rect">
-            <a:avLst/>
-          </a:prstGeom>
-          <a:noFill xmlns:a="http://schemas.openxmlformats.org/drawingml/2006/main"/>
-          <a:ln xmlns:a="http://schemas.openxmlformats.org/drawingml/2006/main" w="0">
-            <a:noFill/>
-          </a:ln>
-        </p:spPr>
-        <p:txBody>
-          <a:bodyPr xmlns:a="http://schemas.openxmlformats.org/drawingml/2006/main" wrap="square" lIns="0" tIns="0" rIns="0" bIns="0" anchor="t"/>
-          <a:lstStyle xmlns:a="http://schemas.openxmlformats.org/drawingml/2006/main">
-            <a:defPPr algn="l">
-              <a:defRPr sz="3600" b="1">
-                <a:solidFill>
-                  <a:srgbClr val="123C3B"/>
-                </a:solidFill>
-                <a:latin typeface="Arial"/>
-                <a:ea typeface="Arial"/>
-                <a:cs typeface="Arial"/>
-              </a:defRPr>
-            </a:defPPr>
-            <a:lvl1pPr algn="l">
-              <a:defRPr sz="3600" b="1">
-                <a:solidFill>
-                  <a:srgbClr val="123C3B"/>
-                </a:solidFill>
-                <a:latin typeface="Arial"/>
-                <a:ea typeface="Arial"/>
-                <a:cs typeface="Arial"/>
-              </a:defRPr>
-            </a:lvl1pPr>
-            <a:lvl2pPr algn="l">
-              <a:defRPr sz="3600" b="1">
-                <a:solidFill>
-                  <a:srgbClr val="123C3B"/>
-                </a:solidFill>
-                <a:latin typeface="Arial"/>
-                <a:ea typeface="Arial"/>
-                <a:cs typeface="Arial"/>
-              </a:defRPr>
-            </a:lvl2pPr>
-            <a:lvl3pPr algn="l">
-              <a:defRPr sz="3600" b="1">
-                <a:solidFill>
-                  <a:srgbClr val="123C3B"/>
-                </a:solidFill>
-                <a:latin typeface="Arial"/>
-                <a:ea typeface="Arial"/>
-                <a:cs typeface="Arial"/>
-              </a:defRPr>
-            </a:lvl3pPr>
-            <a:lvl4pPr algn="l">
-              <a:defRPr sz="3600" b="1">
-                <a:solidFill>
-                  <a:srgbClr val="123C3B"/>
-                </a:solidFill>
-                <a:latin typeface="Arial"/>
-                <a:ea typeface="Arial"/>
-                <a:cs typeface="Arial"/>
-              </a:defRPr>
-            </a:lvl4pPr>
-            <a:lvl5pPr algn="l">
-              <a:defRPr sz="3600" b="1">
-                <a:solidFill>
-                  <a:srgbClr val="123C3B"/>
-                </a:solidFill>
-                <a:latin typeface="Arial"/>
-                <a:ea typeface="Arial"/>
-                <a:cs typeface="Arial"/>
-              </a:defRPr>
-            </a:lvl5pPr>
-            <a:lvl6pPr algn="l">
-              <a:defRPr sz="3600" b="1">
-                <a:solidFill>
-                  <a:srgbClr val="123C3B"/>
-                </a:solidFill>
-                <a:latin typeface="Arial"/>
-                <a:ea typeface="Arial"/>
-                <a:cs typeface="Arial"/>
-              </a:defRPr>
-            </a:lvl6pPr>
-            <a:lvl7pPr algn="l">
-              <a:defRPr sz="3600" b="1">
-                <a:solidFill>
-                  <a:srgbClr val="123C3B"/>
-                </a:solidFill>
-                <a:latin typeface="Arial"/>
-                <a:ea typeface="Arial"/>
-                <a:cs typeface="Arial"/>
-              </a:defRPr>
-            </a:lvl7pPr>
-            <a:lvl8pPr algn="l">
-              <a:defRPr sz="3600" b="1">
-                <a:solidFill>
-                  <a:srgbClr val="123C3B"/>
-                </a:solidFill>
-                <a:latin typeface="Arial"/>
-                <a:ea typeface="Arial"/>
-                <a:cs typeface="Arial"/>
-              </a:defRPr>
-            </a:lvl8pPr>
-            <a:lvl9pPr algn="l">
-              <a:defRPr sz="3600" b="1">
-                <a:solidFill>
-                  <a:srgbClr val="123C3B"/>
-                </a:solidFill>
-                <a:latin typeface="Arial"/>
-                <a:ea typeface="Arial"/>
-                <a:cs typeface="Arial"/>
-              </a:defRPr>
-            </a:lvl9pPr>
-          </a:lstStyle>
-          <a:p xmlns:a="http://schemas.openxmlformats.org/drawingml/2006/main">
-            <a:pPr algn="l">
-              <a:defRPr sz="3600" b="1">
-                <a:solidFill>
-                  <a:srgbClr val="123C3B"/>
-                </a:solidFill>
-                <a:latin typeface="Arial"/>
-                <a:ea typeface="Arial"/>
-                <a:cs typeface="Arial"/>
-              </a:defRPr>
-            </a:pPr>
-            <a:r>
-              <a:rPr sz="3600" b="1">
-                <a:solidFill>
-                  <a:srgbClr val="123C3B"/>
-                </a:solidFill>
-                <a:latin typeface="Arial"/>
-                <a:ea typeface="Arial"/>
-                <a:cs typeface="Arial"/>
-              </a:rPr>
-              <a:t>Материалы проекта</a:t>
-            </a:r>
-          </a:p>
-        </p:txBody>
-      </p:sp>
-      <p:sp>
-        <p:nvSpPr>
-          <p:cNvPr id="2" name="">
-            <a:extLst xmlns:a="http://schemas.openxmlformats.org/drawingml/2006/main">
-              <a:ext uri="{FF2B5EF4-FFF2-40B4-BE49-F238E27FC236}">
-                <a16:creationId xmlns:a16="http://schemas.microsoft.com/office/drawing/2014/main" id="{E5B126D2-9F5C-48E7-B5FE-E7DF4AD57A4A}"/>
-              </a:ext>
-            </a:extLst>
-          </p:cNvPr>
-          <p:cNvSpPr>
-            <a:spLocks xmlns:a="http://schemas.openxmlformats.org/drawingml/2006/main" noGrp="1"/>
-          </p:cNvSpPr>
-          <p:nvPr/>
-        </p:nvSpPr>
-        <p:spPr>
-          <a:xfrm xmlns:a="http://schemas.openxmlformats.org/drawingml/2006/main">
-            <a:off x="11068050" y="6267450"/>
-            <a:ext cx="438150" cy="285750"/>
-          </a:xfrm>
-          <a:prstGeom xmlns:a="http://schemas.openxmlformats.org/drawingml/2006/main" prst="rect">
-            <a:avLst/>
-          </a:prstGeom>
-          <a:noFill xmlns:a="http://schemas.openxmlformats.org/drawingml/2006/main"/>
-          <a:ln xmlns:a="http://schemas.openxmlformats.org/drawingml/2006/main" w="0">
-            <a:noFill/>
-          </a:ln>
-        </p:spPr>
-        <p:txBody>
-          <a:bodyPr xmlns:a="http://schemas.openxmlformats.org/drawingml/2006/main" wrap="square" lIns="0" tIns="0" rIns="0" bIns="0" anchor="t"/>
-          <a:lstStyle xmlns:a="http://schemas.openxmlformats.org/drawingml/2006/main">
-            <a:defPPr algn="l">
-              <a:defRPr sz="1275" b="0">
-                <a:solidFill>
-                  <a:srgbClr val="55716A"/>
-                </a:solidFill>
-                <a:latin typeface="Arial"/>
-                <a:ea typeface="Arial"/>
-                <a:cs typeface="Arial"/>
-              </a:defRPr>
-            </a:defPPr>
-            <a:lvl1pPr algn="l">
-              <a:defRPr sz="1275" b="0">
-                <a:solidFill>
-                  <a:srgbClr val="55716A"/>
-                </a:solidFill>
-                <a:latin typeface="Arial"/>
-                <a:ea typeface="Arial"/>
-                <a:cs typeface="Arial"/>
-              </a:defRPr>
-            </a:lvl1pPr>
-            <a:lvl2pPr algn="l">
-              <a:defRPr sz="1275" b="0">
-                <a:solidFill>
-                  <a:srgbClr val="55716A"/>
-                </a:solidFill>
-                <a:latin typeface="Arial"/>
-                <a:ea typeface="Arial"/>
-                <a:cs typeface="Arial"/>
-              </a:defRPr>
-            </a:lvl2pPr>
-            <a:lvl3pPr algn="l">
-              <a:defRPr sz="1275" b="0">
-                <a:solidFill>
-                  <a:srgbClr val="55716A"/>
-                </a:solidFill>
-                <a:latin typeface="Arial"/>
-                <a:ea typeface="Arial"/>
-                <a:cs typeface="Arial"/>
-              </a:defRPr>
-            </a:lvl3pPr>
-            <a:lvl4pPr algn="l">
-              <a:defRPr sz="1275" b="0">
-                <a:solidFill>
-                  <a:srgbClr val="55716A"/>
-                </a:solidFill>
-                <a:latin typeface="Arial"/>
-                <a:ea typeface="Arial"/>
-                <a:cs typeface="Arial"/>
-              </a:defRPr>
-            </a:lvl4pPr>
-            <a:lvl5pPr algn="l">
-              <a:defRPr sz="1275" b="0">
-                <a:solidFill>
-                  <a:srgbClr val="55716A"/>
-                </a:solidFill>
-                <a:latin typeface="Arial"/>
-                <a:ea typeface="Arial"/>
-                <a:cs typeface="Arial"/>
-              </a:defRPr>
-            </a:lvl5pPr>
-            <a:lvl6pPr algn="l">
-              <a:defRPr sz="1275" b="0">
-                <a:solidFill>
-                  <a:srgbClr val="55716A"/>
-                </a:solidFill>
-                <a:latin typeface="Arial"/>
-                <a:ea typeface="Arial"/>
-                <a:cs typeface="Arial"/>
-              </a:defRPr>
-            </a:lvl6pPr>
-            <a:lvl7pPr algn="l">
-              <a:defRPr sz="1275" b="0">
-                <a:solidFill>
-                  <a:srgbClr val="55716A"/>
-                </a:solidFill>
-                <a:latin typeface="Arial"/>
-                <a:ea typeface="Arial"/>
-                <a:cs typeface="Arial"/>
-              </a:defRPr>
-            </a:lvl7pPr>
-            <a:lvl8pPr algn="l">
-              <a:defRPr sz="1275" b="0">
-                <a:solidFill>
-                  <a:srgbClr val="55716A"/>
-                </a:solidFill>
-                <a:latin typeface="Arial"/>
-                <a:ea typeface="Arial"/>
-                <a:cs typeface="Arial"/>
-              </a:defRPr>
-            </a:lvl8pPr>
-            <a:lvl9pPr algn="l">
-              <a:defRPr sz="1275" b="0">
-                <a:solidFill>
-                  <a:srgbClr val="55716A"/>
-                </a:solidFill>
-                <a:latin typeface="Arial"/>
-                <a:ea typeface="Arial"/>
-                <a:cs typeface="Arial"/>
-              </a:defRPr>
-            </a:lvl9pPr>
-          </a:lstStyle>
-          <a:p xmlns:a="http://schemas.openxmlformats.org/drawingml/2006/main">
-            <a:pPr algn="l">
-              <a:defRPr sz="1275" b="0">
-                <a:solidFill>
-                  <a:srgbClr val="55716A"/>
-                </a:solidFill>
-                <a:latin typeface="Arial"/>
-                <a:ea typeface="Arial"/>
-                <a:cs typeface="Arial"/>
-              </a:defRPr>
-            </a:pPr>
-            <a:r>
-              <a:rPr sz="1275" b="0">
-                <a:solidFill>
-                  <a:srgbClr val="55716A"/>
-                </a:solidFill>
-                <a:latin typeface="Arial"/>
-                <a:ea typeface="Arial"/>
-                <a:cs typeface="Arial"/>
-              </a:rPr>
-              <a:t>09</a:t>
-            </a:r>
-          </a:p>
-        </p:txBody>
-      </p:sp>
-      <p:sp>
-        <p:nvSpPr>
-          <p:cNvPr id="3" name="">
-            <a:extLst xmlns:a="http://schemas.openxmlformats.org/drawingml/2006/main">
-              <a:ext uri="{FF2B5EF4-FFF2-40B4-BE49-F238E27FC236}">
-                <a16:creationId xmlns:a16="http://schemas.microsoft.com/office/drawing/2014/main" id="{D19F2C0B-12E5-4184-A8D3-7AA35964D9B2}"/>
-              </a:ext>
-            </a:extLst>
-          </p:cNvPr>
-          <p:cNvSpPr>
-            <a:spLocks xmlns:a="http://schemas.openxmlformats.org/drawingml/2006/main" noGrp="1"/>
-          </p:cNvSpPr>
-          <p:nvPr/>
-        </p:nvSpPr>
-        <p:spPr>
-          <a:xfrm xmlns:a="http://schemas.openxmlformats.org/drawingml/2006/main">
-            <a:off x="685800" y="1828800"/>
-            <a:ext cx="10572750" cy="2409825"/>
-          </a:xfrm>
-          <a:prstGeom xmlns:a="http://schemas.openxmlformats.org/drawingml/2006/main" prst="rect">
-            <a:avLst/>
-          </a:prstGeom>
-          <a:noFill xmlns:a="http://schemas.openxmlformats.org/drawingml/2006/main"/>
-          <a:ln xmlns:a="http://schemas.openxmlformats.org/drawingml/2006/main" w="0">
-            <a:noFill/>
-          </a:ln>
-        </p:spPr>
-        <p:txBody>
-          <a:bodyPr xmlns:a="http://schemas.openxmlformats.org/drawingml/2006/main" wrap="square" lIns="0" tIns="0" rIns="0" bIns="0" anchor="t"/>
-          <a:lstStyle xmlns:a="http://schemas.openxmlformats.org/drawingml/2006/main">
-            <a:defPPr algn="l">
-              <a:defRPr sz="3225" b="1">
-                <a:solidFill>
-                  <a:srgbClr val="123C3B"/>
-                </a:solidFill>
-                <a:latin typeface="Arial"/>
-                <a:ea typeface="Arial"/>
-                <a:cs typeface="Arial"/>
-              </a:defRPr>
-            </a:defPPr>
-            <a:lvl1pPr algn="l">
-              <a:defRPr sz="3225" b="1">
-                <a:solidFill>
-                  <a:srgbClr val="123C3B"/>
-                </a:solidFill>
-                <a:latin typeface="Arial"/>
-                <a:ea typeface="Arial"/>
-                <a:cs typeface="Arial"/>
-              </a:defRPr>
-            </a:lvl1pPr>
-            <a:lvl2pPr algn="l">
-              <a:defRPr sz="3225" b="1">
-                <a:solidFill>
-                  <a:srgbClr val="123C3B"/>
-                </a:solidFill>
-                <a:latin typeface="Arial"/>
-                <a:ea typeface="Arial"/>
-                <a:cs typeface="Arial"/>
-              </a:defRPr>
-            </a:lvl2pPr>
-            <a:lvl3pPr algn="l">
-              <a:defRPr sz="3225" b="1">
-                <a:solidFill>
-                  <a:srgbClr val="123C3B"/>
-                </a:solidFill>
-                <a:latin typeface="Arial"/>
-                <a:ea typeface="Arial"/>
-                <a:cs typeface="Arial"/>
-              </a:defRPr>
-            </a:lvl3pPr>
-            <a:lvl4pPr algn="l">
-              <a:defRPr sz="3225" b="1">
-                <a:solidFill>
-                  <a:srgbClr val="123C3B"/>
-                </a:solidFill>
-                <a:latin typeface="Arial"/>
-                <a:ea typeface="Arial"/>
-                <a:cs typeface="Arial"/>
-              </a:defRPr>
-            </a:lvl4pPr>
-            <a:lvl5pPr algn="l">
-              <a:defRPr sz="3225" b="1">
-                <a:solidFill>
-                  <a:srgbClr val="123C3B"/>
-                </a:solidFill>
-                <a:latin typeface="Arial"/>
-                <a:ea typeface="Arial"/>
-                <a:cs typeface="Arial"/>
-              </a:defRPr>
-            </a:lvl5pPr>
-            <a:lvl6pPr algn="l">
-              <a:defRPr sz="3225" b="1">
-                <a:solidFill>
-                  <a:srgbClr val="123C3B"/>
-                </a:solidFill>
-                <a:latin typeface="Arial"/>
-                <a:ea typeface="Arial"/>
-                <a:cs typeface="Arial"/>
-              </a:defRPr>
-            </a:lvl6pPr>
-            <a:lvl7pPr algn="l">
-              <a:defRPr sz="3225" b="1">
-                <a:solidFill>
-                  <a:srgbClr val="123C3B"/>
-                </a:solidFill>
-                <a:latin typeface="Arial"/>
-                <a:ea typeface="Arial"/>
-                <a:cs typeface="Arial"/>
-              </a:defRPr>
-            </a:lvl7pPr>
-            <a:lvl8pPr algn="l">
-              <a:defRPr sz="3225" b="1">
-                <a:solidFill>
-                  <a:srgbClr val="123C3B"/>
-                </a:solidFill>
-                <a:latin typeface="Arial"/>
-                <a:ea typeface="Arial"/>
-                <a:cs typeface="Arial"/>
-              </a:defRPr>
-            </a:lvl8pPr>
-            <a:lvl9pPr algn="l">
-              <a:defRPr sz="3225" b="1">
-                <a:solidFill>
-                  <a:srgbClr val="123C3B"/>
-                </a:solidFill>
-                <a:latin typeface="Arial"/>
-                <a:ea typeface="Arial"/>
-                <a:cs typeface="Arial"/>
-              </a:defRPr>
-            </a:lvl9pPr>
-          </a:lstStyle>
-          <a:p xmlns:a="http://schemas.openxmlformats.org/drawingml/2006/main">
-            <a:pPr algn="l">
-              <a:defRPr sz="3225" b="1">
-                <a:solidFill>
-                  <a:srgbClr val="123C3B"/>
-                </a:solidFill>
-                <a:latin typeface="Arial"/>
-                <a:ea typeface="Arial"/>
-                <a:cs typeface="Arial"/>
-              </a:defRPr>
-            </a:pPr>
-            <a:r>
-              <a:rPr sz="3225" b="1">
-                <a:solidFill>
-                  <a:srgbClr val="123C3B"/>
-                </a:solidFill>
-                <a:latin typeface="Arial"/>
-                <a:ea typeface="Arial"/>
-                <a:cs typeface="Arial"/>
-              </a:rPr>
-              <a:t>Мобильный прототип и PWA</a:t>
-            </a:r>
-          </a:p>
-          <a:p xmlns:a="http://schemas.openxmlformats.org/drawingml/2006/main">
-            <a:pPr algn="l">
-              <a:defRPr sz="3225" b="1">
-                <a:solidFill>
-                  <a:srgbClr val="123C3B"/>
-                </a:solidFill>
-                <a:latin typeface="Arial"/>
-                <a:ea typeface="Arial"/>
-                <a:cs typeface="Arial"/>
-              </a:defRPr>
-            </a:pPr>
-            <a:r>
-              <a:rPr sz="3225" b="1">
-                <a:solidFill>
-                  <a:srgbClr val="123C3B"/>
-                </a:solidFill>
-                <a:latin typeface="Arial"/>
-                <a:ea typeface="Arial"/>
-                <a:cs typeface="Arial"/>
-              </a:rPr>
-              <a:t>Воспроизводимый сбор POI</a:t>
-            </a:r>
-          </a:p>
-          <a:p xmlns:a="http://schemas.openxmlformats.org/drawingml/2006/main">
-            <a:pPr algn="l">
-              <a:defRPr sz="3225" b="1">
-                <a:solidFill>
-                  <a:srgbClr val="123C3B"/>
-                </a:solidFill>
-                <a:latin typeface="Arial"/>
-                <a:ea typeface="Arial"/>
-                <a:cs typeface="Arial"/>
-              </a:defRPr>
-            </a:pPr>
-            <a:r>
-              <a:rPr sz="3225" b="1">
-                <a:solidFill>
-                  <a:srgbClr val="123C3B"/>
-                </a:solidFill>
-                <a:latin typeface="Arial"/>
-                <a:ea typeface="Arial"/>
-                <a:cs typeface="Arial"/>
-              </a:rPr>
-              <a:t>Сценарии и ограничения</a:t>
-            </a:r>
-          </a:p>
-          <a:p xmlns:a="http://schemas.openxmlformats.org/drawingml/2006/main">
-            <a:pPr algn="l">
-              <a:defRPr sz="3225" b="1">
-                <a:solidFill>
-                  <a:srgbClr val="123C3B"/>
-                </a:solidFill>
-                <a:latin typeface="Arial"/>
-                <a:ea typeface="Arial"/>
-                <a:cs typeface="Arial"/>
-              </a:defRPr>
-            </a:pPr>
-            <a:r>
-              <a:rPr sz="3225" b="1">
-                <a:solidFill>
-                  <a:srgbClr val="123C3B"/>
-                </a:solidFill>
-                <a:latin typeface="Arial"/>
-                <a:ea typeface="Arial"/>
-                <a:cs typeface="Arial"/>
-              </a:rPr>
-              <a:t>Презентация и демо</a:t>
-            </a:r>
-          </a:p>
-        </p:txBody>
-      </p:sp>
-      <p:sp>
-        <p:nvSpPr>
-          <p:cNvPr id="4" name="">
-            <a:extLst xmlns:a="http://schemas.openxmlformats.org/drawingml/2006/main">
-              <a:ext uri="{FF2B5EF4-FFF2-40B4-BE49-F238E27FC236}">
-                <a16:creationId xmlns:a16="http://schemas.microsoft.com/office/drawing/2014/main" id="{AB524778-2D93-4CC7-886B-5C31E46697E1}"/>
-              </a:ext>
-            </a:extLst>
-          </p:cNvPr>
-          <p:cNvSpPr>
-            <a:spLocks xmlns:a="http://schemas.openxmlformats.org/drawingml/2006/main" noGrp="1"/>
-          </p:cNvSpPr>
-          <p:nvPr/>
-        </p:nvSpPr>
-        <p:spPr>
-          <a:xfrm xmlns:a="http://schemas.openxmlformats.org/drawingml/2006/main">
-            <a:off x="685800" y="4495800"/>
-            <a:ext cx="10572750" cy="1371600"/>
-          </a:xfrm>
-          <a:prstGeom xmlns:a="http://schemas.openxmlformats.org/drawingml/2006/main" prst="rect">
-            <a:avLst/>
-          </a:prstGeom>
-          <a:noFill xmlns:a="http://schemas.openxmlformats.org/drawingml/2006/main"/>
-          <a:ln xmlns:a="http://schemas.openxmlformats.org/drawingml/2006/main" w="0">
-            <a:noFill/>
-          </a:ln>
-        </p:spPr>
-        <p:txBody>
-          <a:bodyPr xmlns:a="http://schemas.openxmlformats.org/drawingml/2006/main" wrap="square" lIns="0" tIns="0" rIns="0" bIns="0" anchor="t"/>
-          <a:lstStyle xmlns:a="http://schemas.openxmlformats.org/drawingml/2006/main">
-            <a:defPPr algn="l">
-              <a:defRPr sz="2025" b="0">
-                <a:solidFill>
-                  <a:srgbClr val="55716A"/>
-                </a:solidFill>
-                <a:latin typeface="Arial"/>
-                <a:ea typeface="Arial"/>
-                <a:cs typeface="Arial"/>
-              </a:defRPr>
-            </a:defPPr>
-            <a:lvl1pPr algn="l">
-              <a:defRPr sz="2025" b="0">
-                <a:solidFill>
-                  <a:srgbClr val="55716A"/>
-                </a:solidFill>
-                <a:latin typeface="Arial"/>
-                <a:ea typeface="Arial"/>
-                <a:cs typeface="Arial"/>
-              </a:defRPr>
-            </a:lvl1pPr>
-            <a:lvl2pPr algn="l">
-              <a:defRPr sz="2025" b="0">
-                <a:solidFill>
-                  <a:srgbClr val="55716A"/>
-                </a:solidFill>
-                <a:latin typeface="Arial"/>
-                <a:ea typeface="Arial"/>
-                <a:cs typeface="Arial"/>
-              </a:defRPr>
-            </a:lvl2pPr>
-            <a:lvl3pPr algn="l">
-              <a:defRPr sz="2025" b="0">
-                <a:solidFill>
-                  <a:srgbClr val="55716A"/>
-                </a:solidFill>
-                <a:latin typeface="Arial"/>
-                <a:ea typeface="Arial"/>
-                <a:cs typeface="Arial"/>
-              </a:defRPr>
-            </a:lvl3pPr>
-            <a:lvl4pPr algn="l">
-              <a:defRPr sz="2025" b="0">
-                <a:solidFill>
-                  <a:srgbClr val="55716A"/>
-                </a:solidFill>
-                <a:latin typeface="Arial"/>
-                <a:ea typeface="Arial"/>
-                <a:cs typeface="Arial"/>
-              </a:defRPr>
-            </a:lvl4pPr>
-            <a:lvl5pPr algn="l">
-              <a:defRPr sz="2025" b="0">
-                <a:solidFill>
-                  <a:srgbClr val="55716A"/>
-                </a:solidFill>
-                <a:latin typeface="Arial"/>
-                <a:ea typeface="Arial"/>
-                <a:cs typeface="Arial"/>
-              </a:defRPr>
-            </a:lvl5pPr>
-            <a:lvl6pPr algn="l">
-              <a:defRPr sz="2025" b="0">
-                <a:solidFill>
-                  <a:srgbClr val="55716A"/>
-                </a:solidFill>
-                <a:latin typeface="Arial"/>
-                <a:ea typeface="Arial"/>
-                <a:cs typeface="Arial"/>
-              </a:defRPr>
-            </a:lvl6pPr>
-            <a:lvl7pPr algn="l">
-              <a:defRPr sz="2025" b="0">
-                <a:solidFill>
-                  <a:srgbClr val="55716A"/>
-                </a:solidFill>
-                <a:latin typeface="Arial"/>
-                <a:ea typeface="Arial"/>
-                <a:cs typeface="Arial"/>
-              </a:defRPr>
-            </a:lvl7pPr>
-            <a:lvl8pPr algn="l">
-              <a:defRPr sz="2025" b="0">
-                <a:solidFill>
-                  <a:srgbClr val="55716A"/>
-                </a:solidFill>
-                <a:latin typeface="Arial"/>
-                <a:ea typeface="Arial"/>
-                <a:cs typeface="Arial"/>
-              </a:defRPr>
-            </a:lvl8pPr>
-            <a:lvl9pPr algn="l">
-              <a:defRPr sz="2025" b="0">
-                <a:solidFill>
-                  <a:srgbClr val="55716A"/>
-                </a:solidFill>
-                <a:latin typeface="Arial"/>
-                <a:ea typeface="Arial"/>
-                <a:cs typeface="Arial"/>
-              </a:defRPr>
-            </a:lvl9pPr>
-          </a:lstStyle>
-          <a:p xmlns:a="http://schemas.openxmlformats.org/drawingml/2006/main">
-            <a:pPr algn="l">
-              <a:defRPr sz="2025" b="0">
-                <a:solidFill>
-                  <a:srgbClr val="55716A"/>
-                </a:solidFill>
-                <a:latin typeface="Arial"/>
-                <a:ea typeface="Arial"/>
-                <a:cs typeface="Arial"/>
-              </a:defRPr>
-            </a:pPr>
-            <a:r>
-              <a:rPr sz="2025" b="0">
-                <a:solidFill>
-                  <a:srgbClr val="55716A"/>
-                </a:solidFill>
-                <a:latin typeface="Arial"/>
-                <a:ea typeface="Arial"/>
-                <a:cs typeface="Arial"/>
-              </a:rPr>
-              <a:t>Ограничения: приблизительный путь, неполные POI,</a:t>
-            </a:r>
-          </a:p>
-          <a:p xmlns:a="http://schemas.openxmlformats.org/drawingml/2006/main">
-            <a:pPr algn="l">
-              <a:defRPr sz="2025" b="0">
-                <a:solidFill>
-                  <a:srgbClr val="55716A"/>
-                </a:solidFill>
-                <a:latin typeface="Arial"/>
-                <a:ea typeface="Arial"/>
-                <a:cs typeface="Arial"/>
-              </a:defRPr>
-            </a:pPr>
-            <a:r>
-              <a:rPr sz="2025" b="0">
-                <a:solidFill>
-                  <a:srgbClr val="55716A"/>
-                </a:solidFill>
-                <a:latin typeface="Arial"/>
-                <a:ea typeface="Arial"/>
-                <a:cs typeface="Arial"/>
-              </a:rPr>
-              <a:t>нет текущих событий и проверки безопасности</a:t>
-            </a:r>
-          </a:p>
-          <a:p xmlns:a="http://schemas.openxmlformats.org/drawingml/2006/main">
-            <a:pPr algn="l">
-              <a:defRPr sz="2025" b="0">
-                <a:solidFill>
-                  <a:srgbClr val="55716A"/>
-                </a:solidFill>
-                <a:latin typeface="Arial"/>
-                <a:ea typeface="Arial"/>
-                <a:cs typeface="Arial"/>
-              </a:defRPr>
-            </a:pPr>
-            <a:r>
-              <a:rPr sz="2025" b="0">
-                <a:solidFill>
-                  <a:srgbClr val="55716A"/>
-                </a:solidFill>
-                <a:latin typeface="Arial"/>
-                <a:ea typeface="Arial"/>
-                <a:cs typeface="Arial"/>
-              </a:rPr>
-              <a:t>Офлайн: оболочка PWA. Подбор требует сервера</a:t>
-            </a:r>
-          </a:p>
-          <a:p xmlns:a="http://schemas.openxmlformats.org/drawingml/2006/main">
-            <a:pPr algn="l">
-              <a:defRPr sz="2025" b="0">
-                <a:solidFill>
-                  <a:srgbClr val="55716A"/>
-                </a:solidFill>
-                <a:latin typeface="Arial"/>
-                <a:ea typeface="Arial"/>
-                <a:cs typeface="Arial"/>
-              </a:defRPr>
-            </a:pPr>
-            <a:r>
-              <a:rPr sz="2025" b="0">
-                <a:solidFill>
-                  <a:srgbClr val="55716A"/>
-                </a:solidFill>
-                <a:latin typeface="Arial"/>
-                <a:ea typeface="Arial"/>
-                <a:cs typeface="Arial"/>
-              </a:rPr>
-              <a:t>Демо зависит от включённых ПК и туннеля</a:t>
-            </a:r>
-          </a:p>
-        </p:txBody>
-      </p:sp>
-      <p:sp>
-        <p:nvSpPr>
-          <p:cNvPr id="5" name="">
-            <a:extLst xmlns:a="http://schemas.openxmlformats.org/drawingml/2006/main">
-              <a:ext uri="{FF2B5EF4-FFF2-40B4-BE49-F238E27FC236}">
-                <a16:creationId xmlns:a16="http://schemas.microsoft.com/office/drawing/2014/main" id="{8ED0623B-315B-4BB0-9A57-6D8A9C1EEB65}"/>
-              </a:ext>
-            </a:extLst>
-          </p:cNvPr>
-          <p:cNvSpPr>
-            <a:spLocks xmlns:a="http://schemas.openxmlformats.org/drawingml/2006/main" noGrp="1"/>
-          </p:cNvSpPr>
-          <p:nvPr/>
-        </p:nvSpPr>
-        <p:spPr>
-          <a:xfrm xmlns:a="http://schemas.openxmlformats.org/drawingml/2006/main">
-            <a:off x="685800" y="6000750"/>
-            <a:ext cx="10096500" cy="419100"/>
-          </a:xfrm>
-          <a:prstGeom xmlns:a="http://schemas.openxmlformats.org/drawingml/2006/main" prst="rect">
-            <a:avLst/>
-          </a:prstGeom>
-          <a:noFill xmlns:a="http://schemas.openxmlformats.org/drawingml/2006/main"/>
-          <a:ln xmlns:a="http://schemas.openxmlformats.org/drawingml/2006/main" w="0">
-            <a:noFill/>
-          </a:ln>
-        </p:spPr>
-        <p:txBody>
-          <a:bodyPr xmlns:a="http://schemas.openxmlformats.org/drawingml/2006/main" wrap="square" lIns="0" tIns="0" rIns="0" bIns="0" anchor="t"/>
-          <a:lstStyle xmlns:a="http://schemas.openxmlformats.org/drawingml/2006/main">
-            <a:defPPr algn="l">
-              <a:defRPr sz="2025" b="0">
-                <a:solidFill>
-                  <a:srgbClr val="123C3B"/>
-                </a:solidFill>
-                <a:latin typeface="Arial"/>
-                <a:ea typeface="Arial"/>
-                <a:cs typeface="Arial"/>
-              </a:defRPr>
-            </a:defPPr>
-            <a:lvl1pPr algn="l">
-              <a:defRPr sz="2025" b="0">
-                <a:solidFill>
-                  <a:srgbClr val="123C3B"/>
-                </a:solidFill>
-                <a:latin typeface="Arial"/>
-                <a:ea typeface="Arial"/>
-                <a:cs typeface="Arial"/>
-              </a:defRPr>
-            </a:lvl1pPr>
-            <a:lvl2pPr algn="l">
-              <a:defRPr sz="2025" b="0">
-                <a:solidFill>
-                  <a:srgbClr val="123C3B"/>
-                </a:solidFill>
-                <a:latin typeface="Arial"/>
-                <a:ea typeface="Arial"/>
-                <a:cs typeface="Arial"/>
-              </a:defRPr>
-            </a:lvl2pPr>
-            <a:lvl3pPr algn="l">
-              <a:defRPr sz="2025" b="0">
-                <a:solidFill>
-                  <a:srgbClr val="123C3B"/>
-                </a:solidFill>
-                <a:latin typeface="Arial"/>
-                <a:ea typeface="Arial"/>
-                <a:cs typeface="Arial"/>
-              </a:defRPr>
-            </a:lvl3pPr>
-            <a:lvl4pPr algn="l">
-              <a:defRPr sz="2025" b="0">
-                <a:solidFill>
-                  <a:srgbClr val="123C3B"/>
-                </a:solidFill>
-                <a:latin typeface="Arial"/>
-                <a:ea typeface="Arial"/>
-                <a:cs typeface="Arial"/>
-              </a:defRPr>
-            </a:lvl4pPr>
-            <a:lvl5pPr algn="l">
-              <a:defRPr sz="2025" b="0">
-                <a:solidFill>
-                  <a:srgbClr val="123C3B"/>
-                </a:solidFill>
-                <a:latin typeface="Arial"/>
-                <a:ea typeface="Arial"/>
-                <a:cs typeface="Arial"/>
-              </a:defRPr>
-            </a:lvl5pPr>
-            <a:lvl6pPr algn="l">
-              <a:defRPr sz="2025" b="0">
-                <a:solidFill>
-                  <a:srgbClr val="123C3B"/>
-                </a:solidFill>
-                <a:latin typeface="Arial"/>
-                <a:ea typeface="Arial"/>
-                <a:cs typeface="Arial"/>
-              </a:defRPr>
-            </a:lvl6pPr>
-            <a:lvl7pPr algn="l">
-              <a:defRPr sz="2025" b="0">
-                <a:solidFill>
-                  <a:srgbClr val="123C3B"/>
-                </a:solidFill>
-                <a:latin typeface="Arial"/>
-                <a:ea typeface="Arial"/>
-                <a:cs typeface="Arial"/>
-              </a:defRPr>
-            </a:lvl7pPr>
-            <a:lvl8pPr algn="l">
-              <a:defRPr sz="2025" b="0">
-                <a:solidFill>
-                  <a:srgbClr val="123C3B"/>
-                </a:solidFill>
-                <a:latin typeface="Arial"/>
-                <a:ea typeface="Arial"/>
-                <a:cs typeface="Arial"/>
-              </a:defRPr>
-            </a:lvl8pPr>
-            <a:lvl9pPr algn="l">
-              <a:defRPr sz="2025" b="0">
-                <a:solidFill>
-                  <a:srgbClr val="123C3B"/>
-                </a:solidFill>
-                <a:latin typeface="Arial"/>
-                <a:ea typeface="Arial"/>
-                <a:cs typeface="Arial"/>
-              </a:defRPr>
-            </a:lvl9pPr>
-          </a:lstStyle>
-          <a:p xmlns:a="http://schemas.openxmlformats.org/drawingml/2006/main">
-            <a:pPr algn="l">
-              <a:defRPr sz="2025" b="0">
-                <a:solidFill>
-                  <a:srgbClr val="123C3B"/>
-                </a:solidFill>
-                <a:latin typeface="Arial"/>
-                <a:ea typeface="Arial"/>
-                <a:cs typeface="Arial"/>
-              </a:defRPr>
-            </a:pPr>
-            <a:r>
-              <a:rPr sz="2025" b="0">
-                <a:solidFill>
-                  <a:srgbClr val="123C3B"/>
-                </a:solidFill>
-                <a:latin typeface="Arial"/>
-                <a:ea typeface="Arial"/>
-                <a:cs typeface="Arial"/>
-              </a:rPr>
-              <a:t>Временно: entire-burn-cricket-ashley.trycloudflare.com</a:t>
-            </a:r>
-          </a:p>
-        </p:txBody>
-      </p:sp>
-    </p:spTree>
-    <p:extLst>
-      <p:ext uri="{BB962C8B-B14F-4D97-AF65-F5344CB8AC3E}">
-        <p14:creationId xmlns:p14="http://schemas.microsoft.com/office/powerpoint/2010/main" val="1843411091"/>
+        <p14:creationId xmlns:p14="http://schemas.microsoft.com/office/powerpoint/2010/main" val="1701909557"/>
       </p:ext>
     </p:extLst>
   </p:cSld>

--- a/output/presentations/astana-walks.pptx
+++ b/output/presentations/astana-walks.pptx
@@ -2,22 +2,22 @@
 <file path=ppt/presentation.xml><?xml version="1.0" encoding="utf-8"?>
 <p:presentation xmlns:p="http://schemas.openxmlformats.org/presentationml/2006/main">
   <p:sldMasterIdLst>
-    <p:sldMasterId xmlns:r="http://schemas.openxmlformats.org/officeDocument/2006/relationships" id="2147483648" r:id="R81721dbcb59f4ed3"/>
+    <p:sldMasterId xmlns:r="http://schemas.openxmlformats.org/officeDocument/2006/relationships" id="2147483648" r:id="R0b1c40b3698c47d0"/>
   </p:sldMasterIdLst>
   <p:notesMasterIdLst>
-    <p:notesMasterId xmlns:r="http://schemas.openxmlformats.org/officeDocument/2006/relationships" r:id="R7b9768ecd9034ee1"/>
+    <p:notesMasterId xmlns:r="http://schemas.openxmlformats.org/officeDocument/2006/relationships" r:id="R60e5c3e4d6d04e99"/>
   </p:notesMasterIdLst>
   <p:sldIdLst>
-    <p:sldId xmlns:r="http://schemas.openxmlformats.org/officeDocument/2006/relationships" id="256" r:id="R4c462ac7ce754e2e"/>
-    <p:sldId xmlns:r="http://schemas.openxmlformats.org/officeDocument/2006/relationships" id="257" r:id="R1cdfd47e214d41e3"/>
-    <p:sldId xmlns:r="http://schemas.openxmlformats.org/officeDocument/2006/relationships" id="258" r:id="R63b1e67466b04161"/>
-    <p:sldId xmlns:r="http://schemas.openxmlformats.org/officeDocument/2006/relationships" id="259" r:id="R1c08ae3cfd824346"/>
-    <p:sldId xmlns:r="http://schemas.openxmlformats.org/officeDocument/2006/relationships" id="260" r:id="R9ad51ebed64e481c"/>
-    <p:sldId xmlns:r="http://schemas.openxmlformats.org/officeDocument/2006/relationships" id="261" r:id="Rc7f2c822f7b44a57"/>
-    <p:sldId xmlns:r="http://schemas.openxmlformats.org/officeDocument/2006/relationships" id="262" r:id="Ra02485f6a0774ae5"/>
-    <p:sldId xmlns:r="http://schemas.openxmlformats.org/officeDocument/2006/relationships" id="263" r:id="Rc433028e13974cae"/>
-    <p:sldId xmlns:r="http://schemas.openxmlformats.org/officeDocument/2006/relationships" id="264" r:id="R57d57c4a5cbf4cdc"/>
-    <p:sldId xmlns:r="http://schemas.openxmlformats.org/officeDocument/2006/relationships" id="265" r:id="R07374f3e5fd7498a"/>
+    <p:sldId xmlns:r="http://schemas.openxmlformats.org/officeDocument/2006/relationships" id="256" r:id="R3ebf23eea9bb4517"/>
+    <p:sldId xmlns:r="http://schemas.openxmlformats.org/officeDocument/2006/relationships" id="257" r:id="R12ee0350da5d4e71"/>
+    <p:sldId xmlns:r="http://schemas.openxmlformats.org/officeDocument/2006/relationships" id="258" r:id="R5a2751a4a81d4f05"/>
+    <p:sldId xmlns:r="http://schemas.openxmlformats.org/officeDocument/2006/relationships" id="259" r:id="R5ca544170f004cae"/>
+    <p:sldId xmlns:r="http://schemas.openxmlformats.org/officeDocument/2006/relationships" id="260" r:id="R3a4f1a47b82143a2"/>
+    <p:sldId xmlns:r="http://schemas.openxmlformats.org/officeDocument/2006/relationships" id="261" r:id="Rf7ae5056b45847bc"/>
+    <p:sldId xmlns:r="http://schemas.openxmlformats.org/officeDocument/2006/relationships" id="262" r:id="R18fcac53be914c77"/>
+    <p:sldId xmlns:r="http://schemas.openxmlformats.org/officeDocument/2006/relationships" id="263" r:id="R99320511d9b44a66"/>
+    <p:sldId xmlns:r="http://schemas.openxmlformats.org/officeDocument/2006/relationships" id="264" r:id="R7650e150908d4496"/>
+    <p:sldId xmlns:r="http://schemas.openxmlformats.org/officeDocument/2006/relationships" id="265" r:id="Rdba542f9768149f7"/>
   </p:sldIdLst>
   <p:sldSz cx="12192000" cy="6858000"/>
   <p:notesSz cx="6858000" cy="9144000"/>
@@ -541,7 +541,7 @@
           <a:lstStyle xmlns:a="http://schemas.openxmlformats.org/drawingml/2006/main"/>
           <a:p xmlns:a="http://schemas.openxmlformats.org/drawingml/2006/main">
             <a:r>
-              <a:t>Для передачи подготовлены исходники, данные с происхождением, сценарии, ограничения и материалы запуска. Прежний снимок сохранён отдельно от расширенной версии. YouTube-публикацию пользователь решил выполнить самостоятельно позже, поэтому ссылка не подменяется вымышленным адресом. Временный сайт зависит от включённого компьютера и туннеля. Проект остаётся прототипом: путь приблизителен, полевой проверки и гарантии безопасности нет. Спасибо, готовы показать фактический сценарий.</a:t>
+              <a:t>Для передачи подготовлены исходники, данные с происхождением, сценарии, ограничения и материалы запуска. Прежний снимок сохранён отдельно от расширенной версии. Принят локальный MP4 длительностью 4:10,64: реальные состояния мобильного интерфейса, с отдельной подписанной вставкой прежней инструкции установки. YouTube-публикацию пользователь решил выполнить самостоятельно позже, поэтому ссылка не подменяется вымышленным адресом. Временный сайт зависит от включённого компьютера и туннеля. Проект остаётся прототипом: путь приблизителен, полевой проверки и гарантии безопасности нет. Спасибо, готовы показать фактический сценарий.</a:t>
             </a:r>
           </a:p>
           <a:p xmlns:a="http://schemas.openxmlformats.org/drawingml/2006/main">
@@ -571,12 +571,27 @@
           </a:p>
           <a:p xmlns:a="http://schemas.openxmlformats.org/drawingml/2006/main">
             <a:r>
+              <a:t>output/video/final/astana-walks-demo.mp4</a:t>
+            </a:r>
+          </a:p>
+          <a:p xmlns:a="http://schemas.openxmlformats.org/drawingml/2006/main">
+            <a:r>
+              <a:t>output/video/final-review.json</a:t>
+            </a:r>
+          </a:p>
+          <a:p xmlns:a="http://schemas.openxmlformats.org/drawingml/2006/main">
+            <a:r>
+              <a:t>One sequential real Chrome tab UI pass, target2fps screenshots. Actual observation timestamps are retained; gaps repeat the last observed frame at real elapsed time. Not a native full-frame screen recording. No desktop or browser chrome captured.</a:t>
+            </a:r>
+          </a:p>
+          <a:p xmlns:a="http://schemas.openxmlformats.org/drawingml/2006/main">
+            <a:r>
               <a:t>Пользователь выбрал самостоятельную загрузку позже; публикация YouTube не подтверждена.</a:t>
             </a:r>
           </a:p>
           <a:p xmlns:a="http://schemas.openxmlformats.org/drawingml/2006/main">
             <a:r>
-              <a:t>Снимок материалов: 2026-10-20T03:12:28+05:00</a:t>
+              <a:t>Снимок материалов: 2026-10-20T03:33:37+05:00</a:t>
             </a:r>
           </a:p>
         </p:txBody>
@@ -1453,7 +1468,7 @@
           <p:cNvPr id="3" name="Title">
             <a:extLst xmlns:a="http://schemas.openxmlformats.org/drawingml/2006/main">
               <a:ext uri="{FF2B5EF4-FFF2-40B4-BE49-F238E27FC236}">
-                <a16:creationId xmlns:a16="http://schemas.microsoft.com/office/drawing/2014/main" id="{107D009A-7CFC-4859-93DA-892050DBB845}"/>
+                <a16:creationId xmlns:a16="http://schemas.microsoft.com/office/drawing/2014/main" id="{0E082BF1-F183-46B6-B1DF-8BCB950FB36D}"/>
               </a:ext>
             </a:extLst>
           </p:cNvPr>
@@ -1682,7 +1697,7 @@
           <p:cNvPr id="2" name="Subtitle">
             <a:extLst xmlns:a="http://schemas.openxmlformats.org/drawingml/2006/main">
               <a:ext uri="{FF2B5EF4-FFF2-40B4-BE49-F238E27FC236}">
-                <a16:creationId xmlns:a16="http://schemas.microsoft.com/office/drawing/2014/main" id="{56581531-6E38-4E0C-93C2-37330BE132BA}"/>
+                <a16:creationId xmlns:a16="http://schemas.microsoft.com/office/drawing/2014/main" id="{19D39664-1C66-47E9-A196-5A9EAA639F17}"/>
               </a:ext>
             </a:extLst>
           </p:cNvPr>
@@ -1928,7 +1943,7 @@
           <p:cNvPr id="2" name="Section title">
             <a:extLst xmlns:a="http://schemas.openxmlformats.org/drawingml/2006/main">
               <a:ext uri="{FF2B5EF4-FFF2-40B4-BE49-F238E27FC236}">
-                <a16:creationId xmlns:a16="http://schemas.microsoft.com/office/drawing/2014/main" id="{17BFA982-1C6E-4ECA-97FC-DBCAF2943091}"/>
+                <a16:creationId xmlns:a16="http://schemas.microsoft.com/office/drawing/2014/main" id="{57252887-EBC9-4BEA-A8D5-CAB92B00D483}"/>
               </a:ext>
             </a:extLst>
           </p:cNvPr>
@@ -2174,7 +2189,7 @@
           <p:cNvPr id="3" name="Title">
             <a:extLst xmlns:a="http://schemas.openxmlformats.org/drawingml/2006/main">
               <a:ext uri="{FF2B5EF4-FFF2-40B4-BE49-F238E27FC236}">
-                <a16:creationId xmlns:a16="http://schemas.microsoft.com/office/drawing/2014/main" id="{93C24B1A-7CCC-436A-9B88-700C7EBDBA80}"/>
+                <a16:creationId xmlns:a16="http://schemas.microsoft.com/office/drawing/2014/main" id="{EF622ED8-665C-4587-94EA-786DBAF67D63}"/>
               </a:ext>
             </a:extLst>
           </p:cNvPr>
@@ -2403,7 +2418,7 @@
           <p:cNvPr id="2" name="Body">
             <a:extLst xmlns:a="http://schemas.openxmlformats.org/drawingml/2006/main">
               <a:ext uri="{FF2B5EF4-FFF2-40B4-BE49-F238E27FC236}">
-                <a16:creationId xmlns:a16="http://schemas.microsoft.com/office/drawing/2014/main" id="{D8057C59-92FD-4CA7-883E-8484CF1ABEDE}"/>
+                <a16:creationId xmlns:a16="http://schemas.microsoft.com/office/drawing/2014/main" id="{E7387EDB-D7FB-4752-8114-E89048F99514}"/>
               </a:ext>
             </a:extLst>
           </p:cNvPr>
@@ -2649,7 +2664,7 @@
           <p:cNvPr id="4" name="Title">
             <a:extLst xmlns:a="http://schemas.openxmlformats.org/drawingml/2006/main">
               <a:ext uri="{FF2B5EF4-FFF2-40B4-BE49-F238E27FC236}">
-                <a16:creationId xmlns:a16="http://schemas.microsoft.com/office/drawing/2014/main" id="{AC16BC51-5137-4A82-A793-229D17DE295D}"/>
+                <a16:creationId xmlns:a16="http://schemas.microsoft.com/office/drawing/2014/main" id="{3D099F4A-EF4E-4CD2-A1C8-CA3A92974FA4}"/>
               </a:ext>
             </a:extLst>
           </p:cNvPr>
@@ -2878,7 +2893,7 @@
           <p:cNvPr id="2" name="Left column">
             <a:extLst xmlns:a="http://schemas.openxmlformats.org/drawingml/2006/main">
               <a:ext uri="{FF2B5EF4-FFF2-40B4-BE49-F238E27FC236}">
-                <a16:creationId xmlns:a16="http://schemas.microsoft.com/office/drawing/2014/main" id="{D4A39316-1FD5-40C9-A86F-D1FB1B827CAD}"/>
+                <a16:creationId xmlns:a16="http://schemas.microsoft.com/office/drawing/2014/main" id="{C32998EF-0BE8-41FC-9B6A-1C874E0AEAF7}"/>
               </a:ext>
             </a:extLst>
           </p:cNvPr>
@@ -3107,7 +3122,7 @@
           <p:cNvPr id="3" name="Right column">
             <a:extLst xmlns:a="http://schemas.openxmlformats.org/drawingml/2006/main">
               <a:ext uri="{FF2B5EF4-FFF2-40B4-BE49-F238E27FC236}">
-                <a16:creationId xmlns:a16="http://schemas.microsoft.com/office/drawing/2014/main" id="{FE307B69-57D3-4F8F-BDD7-ACF80251BD80}"/>
+                <a16:creationId xmlns:a16="http://schemas.microsoft.com/office/drawing/2014/main" id="{1A00A750-4FDA-478F-868F-B05D400F2FE7}"/>
               </a:ext>
             </a:extLst>
           </p:cNvPr>
@@ -3353,7 +3368,7 @@
           <p:cNvPr id="3" name="Title">
             <a:extLst xmlns:a="http://schemas.openxmlformats.org/drawingml/2006/main">
               <a:ext uri="{FF2B5EF4-FFF2-40B4-BE49-F238E27FC236}">
-                <a16:creationId xmlns:a16="http://schemas.microsoft.com/office/drawing/2014/main" id="{DE248D3D-C41A-411E-9BC4-9A6507467ABD}"/>
+                <a16:creationId xmlns:a16="http://schemas.microsoft.com/office/drawing/2014/main" id="{CBE33ACD-1A32-45BF-BEB3-DCE33AEEA395}"/>
               </a:ext>
             </a:extLst>
           </p:cNvPr>
@@ -3582,7 +3597,7 @@
           <p:cNvPr id="2" name="Left column">
             <a:extLst xmlns:a="http://schemas.openxmlformats.org/drawingml/2006/main">
               <a:ext uri="{FF2B5EF4-FFF2-40B4-BE49-F238E27FC236}">
-                <a16:creationId xmlns:a16="http://schemas.microsoft.com/office/drawing/2014/main" id="{6E5CC414-F49C-4F5A-98D9-B4EB72830F76}"/>
+                <a16:creationId xmlns:a16="http://schemas.microsoft.com/office/drawing/2014/main" id="{866B8E42-FEA2-400F-9FFC-E4BA6E172F88}"/>
               </a:ext>
             </a:extLst>
           </p:cNvPr>
@@ -3849,12 +3864,12 @@
   </p:cSld>
   <p:clrMap bg1="lt1" tx1="dk1" bg2="lt2" tx2="dk2" accent1="accent1" accent2="accent2" accent3="accent3" accent4="accent4" accent5="accent5" accent6="accent6" hlink="hlink" folHlink="folHlink"/>
   <p:sldLayoutIdLst>
-    <p:sldLayoutId xmlns:r="http://schemas.openxmlformats.org/officeDocument/2006/relationships" id="2147483649" r:id="R804b95f7dd6a460b"/>
-    <p:sldLayoutId xmlns:r="http://schemas.openxmlformats.org/officeDocument/2006/relationships" id="2147483650" r:id="Ra903abb7c165482f"/>
-    <p:sldLayoutId xmlns:r="http://schemas.openxmlformats.org/officeDocument/2006/relationships" id="2147483651" r:id="R8129a54959ad425c"/>
-    <p:sldLayoutId xmlns:r="http://schemas.openxmlformats.org/officeDocument/2006/relationships" id="2147483652" r:id="R411e7ba65f0048a4"/>
-    <p:sldLayoutId xmlns:r="http://schemas.openxmlformats.org/officeDocument/2006/relationships" id="2147483653" r:id="Re4ddd2190577451a"/>
-    <p:sldLayoutId xmlns:r="http://schemas.openxmlformats.org/officeDocument/2006/relationships" id="2147483654" r:id="Re520e588eac9431a"/>
+    <p:sldLayoutId xmlns:r="http://schemas.openxmlformats.org/officeDocument/2006/relationships" id="2147483649" r:id="Re1caf310d84f48e9"/>
+    <p:sldLayoutId xmlns:r="http://schemas.openxmlformats.org/officeDocument/2006/relationships" id="2147483650" r:id="Rb087abac35fd4336"/>
+    <p:sldLayoutId xmlns:r="http://schemas.openxmlformats.org/officeDocument/2006/relationships" id="2147483651" r:id="R3cd693e90d154eff"/>
+    <p:sldLayoutId xmlns:r="http://schemas.openxmlformats.org/officeDocument/2006/relationships" id="2147483652" r:id="R3ae81cc43f1842dd"/>
+    <p:sldLayoutId xmlns:r="http://schemas.openxmlformats.org/officeDocument/2006/relationships" id="2147483653" r:id="R2635c3ffbc1b43cb"/>
+    <p:sldLayoutId xmlns:r="http://schemas.openxmlformats.org/officeDocument/2006/relationships" id="2147483654" r:id="Re5180cc907a14525"/>
   </p:sldLayoutIdLst>
   <p:txStyles>
     <p:titleStyle>
@@ -4405,7 +4420,7 @@
           <p:cNvPr id="5" name="">
             <a:extLst xmlns:a="http://schemas.openxmlformats.org/drawingml/2006/main">
               <a:ext uri="{FF2B5EF4-FFF2-40B4-BE49-F238E27FC236}">
-                <a16:creationId xmlns:a16="http://schemas.microsoft.com/office/drawing/2014/main" id="{09DE3DE9-FE3D-445A-BFD7-F027EE4AC361}"/>
+                <a16:creationId xmlns:a16="http://schemas.microsoft.com/office/drawing/2014/main" id="{358DE123-2894-49C7-A7AB-0EA36D095023}"/>
               </a:ext>
             </a:extLst>
           </p:cNvPr>
@@ -4561,7 +4576,7 @@
           <p:cNvPr id="2" name="">
             <a:extLst xmlns:a="http://schemas.openxmlformats.org/drawingml/2006/main">
               <a:ext uri="{FF2B5EF4-FFF2-40B4-BE49-F238E27FC236}">
-                <a16:creationId xmlns:a16="http://schemas.microsoft.com/office/drawing/2014/main" id="{98916371-3B05-41DC-BC20-B0FE2BEC7685}"/>
+                <a16:creationId xmlns:a16="http://schemas.microsoft.com/office/drawing/2014/main" id="{FC64914D-03DF-4135-B95F-52FA39A18D1D}"/>
               </a:ext>
             </a:extLst>
           </p:cNvPr>
@@ -4717,7 +4732,7 @@
           <p:cNvPr id="3" name="">
             <a:extLst xmlns:a="http://schemas.openxmlformats.org/drawingml/2006/main">
               <a:ext uri="{FF2B5EF4-FFF2-40B4-BE49-F238E27FC236}">
-                <a16:creationId xmlns:a16="http://schemas.microsoft.com/office/drawing/2014/main" id="{BA86985D-6765-46CE-BCEE-337381F0E826}"/>
+                <a16:creationId xmlns:a16="http://schemas.microsoft.com/office/drawing/2014/main" id="{4E3765A4-84CA-49B7-8DB9-4847EB65D9DF}"/>
               </a:ext>
             </a:extLst>
           </p:cNvPr>
@@ -4896,7 +4911,7 @@
           <p:cNvPr id="4" name="">
             <a:extLst xmlns:a="http://schemas.openxmlformats.org/drawingml/2006/main">
               <a:ext uri="{FF2B5EF4-FFF2-40B4-BE49-F238E27FC236}">
-                <a16:creationId xmlns:a16="http://schemas.microsoft.com/office/drawing/2014/main" id="{EB57C898-C163-4776-902B-04336069A168}"/>
+                <a16:creationId xmlns:a16="http://schemas.microsoft.com/office/drawing/2014/main" id="{FA6B2AB0-9EF2-4C48-974E-F16808961C70}"/>
               </a:ext>
             </a:extLst>
           </p:cNvPr>
@@ -5073,7 +5088,7 @@
     </p:spTree>
     <p:extLst>
       <p:ext uri="{BB962C8B-B14F-4D97-AF65-F5344CB8AC3E}">
-        <p14:creationId xmlns:p14="http://schemas.microsoft.com/office/powerpoint/2010/main" val="1742233500"/>
+        <p14:creationId xmlns:p14="http://schemas.microsoft.com/office/powerpoint/2010/main" val="501821061"/>
       </p:ext>
     </p:extLst>
   </p:cSld>
@@ -5104,7 +5119,7 @@
           <p:cNvPr id="6" name="">
             <a:extLst xmlns:a="http://schemas.openxmlformats.org/drawingml/2006/main">
               <a:ext uri="{FF2B5EF4-FFF2-40B4-BE49-F238E27FC236}">
-                <a16:creationId xmlns:a16="http://schemas.microsoft.com/office/drawing/2014/main" id="{3B89308A-ABFC-49E7-927B-B3CBBD19AC8E}"/>
+                <a16:creationId xmlns:a16="http://schemas.microsoft.com/office/drawing/2014/main" id="{FAEDFDD3-C140-43E2-AC51-5AC7C00E34C3}"/>
               </a:ext>
             </a:extLst>
           </p:cNvPr>
@@ -5260,7 +5275,7 @@
           <p:cNvPr id="2" name="">
             <a:extLst xmlns:a="http://schemas.openxmlformats.org/drawingml/2006/main">
               <a:ext uri="{FF2B5EF4-FFF2-40B4-BE49-F238E27FC236}">
-                <a16:creationId xmlns:a16="http://schemas.microsoft.com/office/drawing/2014/main" id="{9DBBD48A-9323-44F6-B508-D3D05CF507A8}"/>
+                <a16:creationId xmlns:a16="http://schemas.microsoft.com/office/drawing/2014/main" id="{C425A968-01C1-4A6B-8923-7CA155ABA429}"/>
               </a:ext>
             </a:extLst>
           </p:cNvPr>
@@ -5416,7 +5431,7 @@
           <p:cNvPr id="3" name="">
             <a:extLst xmlns:a="http://schemas.openxmlformats.org/drawingml/2006/main">
               <a:ext uri="{FF2B5EF4-FFF2-40B4-BE49-F238E27FC236}">
-                <a16:creationId xmlns:a16="http://schemas.microsoft.com/office/drawing/2014/main" id="{8799A5AD-6F02-4855-B4A4-A62A00EA04E8}"/>
+                <a16:creationId xmlns:a16="http://schemas.microsoft.com/office/drawing/2014/main" id="{4EB24E75-07ED-4287-B497-6D4177EFD4BA}"/>
               </a:ext>
             </a:extLst>
           </p:cNvPr>
@@ -5631,7 +5646,7 @@
                 <a:ea typeface="Arial"/>
                 <a:cs typeface="Arial"/>
               </a:rPr>
-              <a:t>Видео: пользователь загрузит позже</a:t>
+              <a:t>MP4 готов; YouTube пользователь загрузит позже</a:t>
             </a:r>
           </a:p>
         </p:txBody>
@@ -5641,7 +5656,7 @@
           <p:cNvPr id="4" name="">
             <a:extLst xmlns:a="http://schemas.openxmlformats.org/drawingml/2006/main">
               <a:ext uri="{FF2B5EF4-FFF2-40B4-BE49-F238E27FC236}">
-                <a16:creationId xmlns:a16="http://schemas.microsoft.com/office/drawing/2014/main" id="{423079FA-1293-4C55-A14C-5816E4ADF757}"/>
+                <a16:creationId xmlns:a16="http://schemas.microsoft.com/office/drawing/2014/main" id="{1A0F7CC6-E093-4894-B085-B6B24E5685F2}"/>
               </a:ext>
             </a:extLst>
           </p:cNvPr>
@@ -5866,7 +5881,7 @@
           <p:cNvPr id="5" name="">
             <a:extLst xmlns:a="http://schemas.openxmlformats.org/drawingml/2006/main">
               <a:ext uri="{FF2B5EF4-FFF2-40B4-BE49-F238E27FC236}">
-                <a16:creationId xmlns:a16="http://schemas.microsoft.com/office/drawing/2014/main" id="{433703DE-DBA1-4FAB-8C66-19F193C6DF4A}"/>
+                <a16:creationId xmlns:a16="http://schemas.microsoft.com/office/drawing/2014/main" id="{EC4E2138-25E5-4A2A-A438-0FFA19A9C1DB}"/>
               </a:ext>
             </a:extLst>
           </p:cNvPr>
@@ -6020,7 +6035,7 @@
     </p:spTree>
     <p:extLst>
       <p:ext uri="{BB962C8B-B14F-4D97-AF65-F5344CB8AC3E}">
-        <p14:creationId xmlns:p14="http://schemas.microsoft.com/office/powerpoint/2010/main" val="1300593295"/>
+        <p14:creationId xmlns:p14="http://schemas.microsoft.com/office/powerpoint/2010/main" val="769807614"/>
       </p:ext>
     </p:extLst>
   </p:cSld>
@@ -6051,7 +6066,7 @@
           <p:cNvPr id="8" name="">
             <a:extLst xmlns:a="http://schemas.openxmlformats.org/drawingml/2006/main">
               <a:ext uri="{FF2B5EF4-FFF2-40B4-BE49-F238E27FC236}">
-                <a16:creationId xmlns:a16="http://schemas.microsoft.com/office/drawing/2014/main" id="{D8AC4EB2-0800-4961-A708-FE4BEBF4CD62}"/>
+                <a16:creationId xmlns:a16="http://schemas.microsoft.com/office/drawing/2014/main" id="{97BD1214-40C0-4862-A7F5-F11FE00226E6}"/>
               </a:ext>
             </a:extLst>
           </p:cNvPr>
@@ -6207,7 +6222,7 @@
           <p:cNvPr id="2" name="">
             <a:extLst xmlns:a="http://schemas.openxmlformats.org/drawingml/2006/main">
               <a:ext uri="{FF2B5EF4-FFF2-40B4-BE49-F238E27FC236}">
-                <a16:creationId xmlns:a16="http://schemas.microsoft.com/office/drawing/2014/main" id="{ACCBC023-2D7E-4CD5-AC1E-77D3CFA1B7CF}"/>
+                <a16:creationId xmlns:a16="http://schemas.microsoft.com/office/drawing/2014/main" id="{07B018A7-EE7B-4F1F-9EDC-09E7568AFDBB}"/>
               </a:ext>
             </a:extLst>
           </p:cNvPr>
@@ -6363,7 +6378,7 @@
           <p:cNvPr id="3" name="">
             <a:extLst xmlns:a="http://schemas.openxmlformats.org/drawingml/2006/main">
               <a:ext uri="{FF2B5EF4-FFF2-40B4-BE49-F238E27FC236}">
-                <a16:creationId xmlns:a16="http://schemas.microsoft.com/office/drawing/2014/main" id="{CFDCA61D-72CE-407E-B865-20FD472C3D3E}"/>
+                <a16:creationId xmlns:a16="http://schemas.microsoft.com/office/drawing/2014/main" id="{5235CE9E-E7B5-4ABE-B2F9-D2D2844D5FA2}"/>
               </a:ext>
             </a:extLst>
           </p:cNvPr>
@@ -6519,7 +6534,7 @@
           <p:cNvPr id="4" name="">
             <a:extLst xmlns:a="http://schemas.openxmlformats.org/drawingml/2006/main">
               <a:ext uri="{FF2B5EF4-FFF2-40B4-BE49-F238E27FC236}">
-                <a16:creationId xmlns:a16="http://schemas.microsoft.com/office/drawing/2014/main" id="{6CF6E5CF-DF49-49E4-BB4A-63358304BF8A}"/>
+                <a16:creationId xmlns:a16="http://schemas.microsoft.com/office/drawing/2014/main" id="{8D2EC954-67C6-45B5-88CB-52FDC4729AF7}"/>
               </a:ext>
             </a:extLst>
           </p:cNvPr>
@@ -6698,7 +6713,7 @@
           <p:cNvPr id="5" name="">
             <a:extLst xmlns:a="http://schemas.openxmlformats.org/drawingml/2006/main">
               <a:ext uri="{FF2B5EF4-FFF2-40B4-BE49-F238E27FC236}">
-                <a16:creationId xmlns:a16="http://schemas.microsoft.com/office/drawing/2014/main" id="{2F0DCB17-5A85-4E4E-9800-243D00427AB1}"/>
+                <a16:creationId xmlns:a16="http://schemas.microsoft.com/office/drawing/2014/main" id="{93651FED-DDCD-419F-B1A6-65334067459B}"/>
               </a:ext>
             </a:extLst>
           </p:cNvPr>
@@ -6854,7 +6869,7 @@
           <p:cNvPr id="6" name="">
             <a:extLst xmlns:a="http://schemas.openxmlformats.org/drawingml/2006/main">
               <a:ext uri="{FF2B5EF4-FFF2-40B4-BE49-F238E27FC236}">
-                <a16:creationId xmlns:a16="http://schemas.microsoft.com/office/drawing/2014/main" id="{F75B9D5E-4223-464D-9EA4-E8EB96570DEC}"/>
+                <a16:creationId xmlns:a16="http://schemas.microsoft.com/office/drawing/2014/main" id="{2CEF0E74-4437-4A83-B379-D01E57AA2A47}"/>
               </a:ext>
             </a:extLst>
           </p:cNvPr>
@@ -7010,7 +7025,7 @@
           <p:cNvPr id="7" name="">
             <a:extLst xmlns:a="http://schemas.openxmlformats.org/drawingml/2006/main">
               <a:ext uri="{FF2B5EF4-FFF2-40B4-BE49-F238E27FC236}">
-                <a16:creationId xmlns:a16="http://schemas.microsoft.com/office/drawing/2014/main" id="{3A340906-EF2C-4F89-A98A-76AEC12A03E5}"/>
+                <a16:creationId xmlns:a16="http://schemas.microsoft.com/office/drawing/2014/main" id="{593CBC79-E499-4FB8-9EA6-B7430642EDE7}"/>
               </a:ext>
             </a:extLst>
           </p:cNvPr>
@@ -7187,7 +7202,7 @@
     </p:spTree>
     <p:extLst>
       <p:ext uri="{BB962C8B-B14F-4D97-AF65-F5344CB8AC3E}">
-        <p14:creationId xmlns:p14="http://schemas.microsoft.com/office/powerpoint/2010/main" val="752618075"/>
+        <p14:creationId xmlns:p14="http://schemas.microsoft.com/office/powerpoint/2010/main" val="2010043524"/>
       </p:ext>
     </p:extLst>
   </p:cSld>
@@ -7218,7 +7233,7 @@
           <p:cNvPr id="10" name="">
             <a:extLst xmlns:a="http://schemas.openxmlformats.org/drawingml/2006/main">
               <a:ext uri="{FF2B5EF4-FFF2-40B4-BE49-F238E27FC236}">
-                <a16:creationId xmlns:a16="http://schemas.microsoft.com/office/drawing/2014/main" id="{B052F7A8-90E8-4344-A6EB-00FC4B30B1C7}"/>
+                <a16:creationId xmlns:a16="http://schemas.microsoft.com/office/drawing/2014/main" id="{2ADEFD8A-1AC3-419A-B20C-F72969CD3B84}"/>
               </a:ext>
             </a:extLst>
           </p:cNvPr>
@@ -7374,7 +7389,7 @@
           <p:cNvPr id="2" name="">
             <a:extLst xmlns:a="http://schemas.openxmlformats.org/drawingml/2006/main">
               <a:ext uri="{FF2B5EF4-FFF2-40B4-BE49-F238E27FC236}">
-                <a16:creationId xmlns:a16="http://schemas.microsoft.com/office/drawing/2014/main" id="{5C1AB58C-72BA-4FE6-B6A7-31390B8251E5}"/>
+                <a16:creationId xmlns:a16="http://schemas.microsoft.com/office/drawing/2014/main" id="{EB5E17EF-286A-4B8D-92AE-B18CBAB78E87}"/>
               </a:ext>
             </a:extLst>
           </p:cNvPr>
@@ -7530,7 +7545,7 @@
           <p:cNvPr id="3" name="">
             <a:extLst xmlns:a="http://schemas.openxmlformats.org/drawingml/2006/main">
               <a:ext uri="{FF2B5EF4-FFF2-40B4-BE49-F238E27FC236}">
-                <a16:creationId xmlns:a16="http://schemas.microsoft.com/office/drawing/2014/main" id="{B7C58010-9D4B-417E-A47F-9BD12318DFDB}"/>
+                <a16:creationId xmlns:a16="http://schemas.microsoft.com/office/drawing/2014/main" id="{0C9D667D-5E3F-446B-B740-C5A69AB6A07E}"/>
               </a:ext>
             </a:extLst>
           </p:cNvPr>
@@ -7540,7 +7555,7 @@
           <p:nvPr/>
         </p:nvPicPr>
         <p:blipFill>
-          <a:blip xmlns:r="http://schemas.openxmlformats.org/officeDocument/2006/relationships" xmlns:a="http://schemas.openxmlformats.org/drawingml/2006/main" r:embed="R0bbbd413c9374a5d"/>
+          <a:blip xmlns:r="http://schemas.openxmlformats.org/officeDocument/2006/relationships" xmlns:a="http://schemas.openxmlformats.org/drawingml/2006/main" r:embed="R5fb158ffb65049f9"/>
           <a:srcRect xmlns:a="http://schemas.openxmlformats.org/drawingml/2006/main" l="32500" t="49000" r="6500" b="1500"/>
           <a:stretch xmlns:a="http://schemas.openxmlformats.org/drawingml/2006/main"/>
         </p:blipFill>
@@ -7559,7 +7574,7 @@
           <p:cNvPr id="4" name="">
             <a:extLst xmlns:a="http://schemas.openxmlformats.org/drawingml/2006/main">
               <a:ext uri="{FF2B5EF4-FFF2-40B4-BE49-F238E27FC236}">
-                <a16:creationId xmlns:a16="http://schemas.microsoft.com/office/drawing/2014/main" id="{6C479907-7CEB-415E-A53A-A2674C72565B}"/>
+                <a16:creationId xmlns:a16="http://schemas.microsoft.com/office/drawing/2014/main" id="{7C0360F0-8CCA-4DBA-AE53-08BC72F68A41}"/>
               </a:ext>
             </a:extLst>
           </p:cNvPr>
@@ -7569,7 +7584,7 @@
           <p:nvPr/>
         </p:nvPicPr>
         <p:blipFill>
-          <a:blip xmlns:r="http://schemas.openxmlformats.org/officeDocument/2006/relationships" xmlns:a="http://schemas.openxmlformats.org/drawingml/2006/main" r:embed="R84510873cd114380"/>
+          <a:blip xmlns:r="http://schemas.openxmlformats.org/officeDocument/2006/relationships" xmlns:a="http://schemas.openxmlformats.org/drawingml/2006/main" r:embed="R57e9926ca0984468"/>
           <a:stretch xmlns:a="http://schemas.openxmlformats.org/drawingml/2006/main"/>
         </p:blipFill>
         <p:spPr>
@@ -7587,7 +7602,7 @@
           <p:cNvPr id="5" name="">
             <a:extLst xmlns:a="http://schemas.openxmlformats.org/drawingml/2006/main">
               <a:ext uri="{FF2B5EF4-FFF2-40B4-BE49-F238E27FC236}">
-                <a16:creationId xmlns:a16="http://schemas.microsoft.com/office/drawing/2014/main" id="{43418A71-E005-4119-90EC-059923E4A4FC}"/>
+                <a16:creationId xmlns:a16="http://schemas.microsoft.com/office/drawing/2014/main" id="{4648CFC5-810E-41D8-9132-0B1D3FF3601C}"/>
               </a:ext>
             </a:extLst>
           </p:cNvPr>
@@ -7766,7 +7781,7 @@
           <p:cNvPr id="6" name="">
             <a:extLst xmlns:a="http://schemas.openxmlformats.org/drawingml/2006/main">
               <a:ext uri="{FF2B5EF4-FFF2-40B4-BE49-F238E27FC236}">
-                <a16:creationId xmlns:a16="http://schemas.microsoft.com/office/drawing/2014/main" id="{6BD962EB-1CFE-497D-9CB1-8DACF6F6F171}"/>
+                <a16:creationId xmlns:a16="http://schemas.microsoft.com/office/drawing/2014/main" id="{917C6CF8-2641-4C49-B27D-B7A421A67FA9}"/>
               </a:ext>
             </a:extLst>
           </p:cNvPr>
@@ -7922,7 +7937,7 @@
           <p:cNvPr id="7" name="">
             <a:extLst xmlns:a="http://schemas.openxmlformats.org/drawingml/2006/main">
               <a:ext uri="{FF2B5EF4-FFF2-40B4-BE49-F238E27FC236}">
-                <a16:creationId xmlns:a16="http://schemas.microsoft.com/office/drawing/2014/main" id="{39FD079B-4C3A-463D-A48E-FDD8B92F605D}"/>
+                <a16:creationId xmlns:a16="http://schemas.microsoft.com/office/drawing/2014/main" id="{860B2CB9-1317-4E11-86A9-42444B7B7136}"/>
               </a:ext>
             </a:extLst>
           </p:cNvPr>
@@ -8078,7 +8093,7 @@
           <p:cNvPr id="8" name="">
             <a:extLst xmlns:a="http://schemas.openxmlformats.org/drawingml/2006/main">
               <a:ext uri="{FF2B5EF4-FFF2-40B4-BE49-F238E27FC236}">
-                <a16:creationId xmlns:a16="http://schemas.microsoft.com/office/drawing/2014/main" id="{1891D894-3CC3-487D-848D-35682C28CF45}"/>
+                <a16:creationId xmlns:a16="http://schemas.microsoft.com/office/drawing/2014/main" id="{39C669D6-A0C9-4205-AF65-2F71843A4829}"/>
               </a:ext>
             </a:extLst>
           </p:cNvPr>
@@ -8234,7 +8249,7 @@
           <p:cNvPr id="9" name="">
             <a:extLst xmlns:a="http://schemas.openxmlformats.org/drawingml/2006/main">
               <a:ext uri="{FF2B5EF4-FFF2-40B4-BE49-F238E27FC236}">
-                <a16:creationId xmlns:a16="http://schemas.microsoft.com/office/drawing/2014/main" id="{AD08E961-516C-4727-9772-FB2E3DEEDEDC}"/>
+                <a16:creationId xmlns:a16="http://schemas.microsoft.com/office/drawing/2014/main" id="{1058A630-0F55-4E00-9E37-05BD55DC5B24}"/>
               </a:ext>
             </a:extLst>
           </p:cNvPr>
@@ -8388,7 +8403,7 @@
     </p:spTree>
     <p:extLst>
       <p:ext uri="{BB962C8B-B14F-4D97-AF65-F5344CB8AC3E}">
-        <p14:creationId xmlns:p14="http://schemas.microsoft.com/office/powerpoint/2010/main" val="1561823019"/>
+        <p14:creationId xmlns:p14="http://schemas.microsoft.com/office/powerpoint/2010/main" val="1700307742"/>
       </p:ext>
     </p:extLst>
   </p:cSld>
@@ -8419,7 +8434,7 @@
           <p:cNvPr id="5" name="">
             <a:extLst xmlns:a="http://schemas.openxmlformats.org/drawingml/2006/main">
               <a:ext uri="{FF2B5EF4-FFF2-40B4-BE49-F238E27FC236}">
-                <a16:creationId xmlns:a16="http://schemas.microsoft.com/office/drawing/2014/main" id="{67060300-47ED-4157-A09E-C8B1283E13FC}"/>
+                <a16:creationId xmlns:a16="http://schemas.microsoft.com/office/drawing/2014/main" id="{2D343BAA-1E10-4414-82E9-5F42F5BF324E}"/>
               </a:ext>
             </a:extLst>
           </p:cNvPr>
@@ -8575,7 +8590,7 @@
           <p:cNvPr id="2" name="">
             <a:extLst xmlns:a="http://schemas.openxmlformats.org/drawingml/2006/main">
               <a:ext uri="{FF2B5EF4-FFF2-40B4-BE49-F238E27FC236}">
-                <a16:creationId xmlns:a16="http://schemas.microsoft.com/office/drawing/2014/main" id="{917025F6-0CE7-4C4A-9C2D-44C5A733DD6A}"/>
+                <a16:creationId xmlns:a16="http://schemas.microsoft.com/office/drawing/2014/main" id="{ECA99CF6-7FF5-4954-83FA-9DFCF42AEEBE}"/>
               </a:ext>
             </a:extLst>
           </p:cNvPr>
@@ -8731,7 +8746,7 @@
           <p:cNvPr id="3" name="">
             <a:extLst xmlns:a="http://schemas.openxmlformats.org/drawingml/2006/main">
               <a:ext uri="{FF2B5EF4-FFF2-40B4-BE49-F238E27FC236}">
-                <a16:creationId xmlns:a16="http://schemas.microsoft.com/office/drawing/2014/main" id="{0AA0FF51-3D9D-4F58-809C-F60CF35517AB}"/>
+                <a16:creationId xmlns:a16="http://schemas.microsoft.com/office/drawing/2014/main" id="{BEE2FA20-FE86-483B-9D8E-4B34552BC211}"/>
               </a:ext>
             </a:extLst>
           </p:cNvPr>
@@ -8741,7 +8756,7 @@
           <p:nvPr/>
         </p:nvPicPr>
         <p:blipFill>
-          <a:blip xmlns:r="http://schemas.openxmlformats.org/officeDocument/2006/relationships" xmlns:a="http://schemas.openxmlformats.org/drawingml/2006/main" r:embed="Rbf11055cfa94417e"/>
+          <a:blip xmlns:r="http://schemas.openxmlformats.org/officeDocument/2006/relationships" xmlns:a="http://schemas.openxmlformats.org/drawingml/2006/main" r:embed="R0c16dcf02c964620"/>
           <a:srcRect xmlns:a="http://schemas.openxmlformats.org/drawingml/2006/main" l="32500" t="9800" r="6500" b="55200"/>
           <a:stretch xmlns:a="http://schemas.openxmlformats.org/drawingml/2006/main"/>
         </p:blipFill>
@@ -8760,7 +8775,7 @@
           <p:cNvPr id="4" name="">
             <a:extLst xmlns:a="http://schemas.openxmlformats.org/drawingml/2006/main">
               <a:ext uri="{FF2B5EF4-FFF2-40B4-BE49-F238E27FC236}">
-                <a16:creationId xmlns:a16="http://schemas.microsoft.com/office/drawing/2014/main" id="{F5C02387-D252-435C-B062-51AE03FD695D}"/>
+                <a16:creationId xmlns:a16="http://schemas.microsoft.com/office/drawing/2014/main" id="{C6D6D526-7F28-42B8-9646-DA4708DEA1B6}"/>
               </a:ext>
             </a:extLst>
           </p:cNvPr>
@@ -8937,7 +8952,7 @@
     </p:spTree>
     <p:extLst>
       <p:ext uri="{BB962C8B-B14F-4D97-AF65-F5344CB8AC3E}">
-        <p14:creationId xmlns:p14="http://schemas.microsoft.com/office/powerpoint/2010/main" val="1066490268"/>
+        <p14:creationId xmlns:p14="http://schemas.microsoft.com/office/powerpoint/2010/main" val="761561215"/>
       </p:ext>
     </p:extLst>
   </p:cSld>
@@ -8968,7 +8983,7 @@
           <p:cNvPr id="17" name="">
             <a:extLst xmlns:a="http://schemas.openxmlformats.org/drawingml/2006/main">
               <a:ext uri="{FF2B5EF4-FFF2-40B4-BE49-F238E27FC236}">
-                <a16:creationId xmlns:a16="http://schemas.microsoft.com/office/drawing/2014/main" id="{5F1C4DAC-CDDC-47CB-A367-858941C1C314}"/>
+                <a16:creationId xmlns:a16="http://schemas.microsoft.com/office/drawing/2014/main" id="{F4E7D8FD-FC69-4A2B-B0ED-049266280F91}"/>
               </a:ext>
             </a:extLst>
           </p:cNvPr>
@@ -9124,7 +9139,7 @@
           <p:cNvPr id="2" name="">
             <a:extLst xmlns:a="http://schemas.openxmlformats.org/drawingml/2006/main">
               <a:ext uri="{FF2B5EF4-FFF2-40B4-BE49-F238E27FC236}">
-                <a16:creationId xmlns:a16="http://schemas.microsoft.com/office/drawing/2014/main" id="{F3051754-C950-4CF2-A807-B371096D9D77}"/>
+                <a16:creationId xmlns:a16="http://schemas.microsoft.com/office/drawing/2014/main" id="{13F6D45F-3F04-4942-9117-74121D23D0FC}"/>
               </a:ext>
             </a:extLst>
           </p:cNvPr>
@@ -9280,7 +9295,7 @@
           <p:cNvPr id="3" name="">
             <a:extLst xmlns:a="http://schemas.openxmlformats.org/drawingml/2006/main">
               <a:ext uri="{FF2B5EF4-FFF2-40B4-BE49-F238E27FC236}">
-                <a16:creationId xmlns:a16="http://schemas.microsoft.com/office/drawing/2014/main" id="{61F8F1B8-6490-41F9-A7BE-9851875E693D}"/>
+                <a16:creationId xmlns:a16="http://schemas.microsoft.com/office/drawing/2014/main" id="{2AE66628-5F69-4C11-A743-E37DCB2117A8}"/>
               </a:ext>
             </a:extLst>
           </p:cNvPr>
@@ -9436,7 +9451,7 @@
           <p:cNvPr id="4" name="">
             <a:extLst xmlns:a="http://schemas.openxmlformats.org/drawingml/2006/main">
               <a:ext uri="{FF2B5EF4-FFF2-40B4-BE49-F238E27FC236}">
-                <a16:creationId xmlns:a16="http://schemas.microsoft.com/office/drawing/2014/main" id="{25FE82FB-09F8-44EF-8042-C3690BE238CE}"/>
+                <a16:creationId xmlns:a16="http://schemas.microsoft.com/office/drawing/2014/main" id="{D7F72015-9D33-4F04-8C7D-7441AE520620}"/>
               </a:ext>
             </a:extLst>
           </p:cNvPr>
@@ -9592,7 +9607,7 @@
           <p:cNvPr id="5" name="">
             <a:extLst xmlns:a="http://schemas.openxmlformats.org/drawingml/2006/main">
               <a:ext uri="{FF2B5EF4-FFF2-40B4-BE49-F238E27FC236}">
-                <a16:creationId xmlns:a16="http://schemas.microsoft.com/office/drawing/2014/main" id="{40732D37-12FF-4B54-9E41-9BFA57DBAD9A}"/>
+                <a16:creationId xmlns:a16="http://schemas.microsoft.com/office/drawing/2014/main" id="{70541156-3A58-4FE1-8EA1-1F2C8CD27A06}"/>
               </a:ext>
             </a:extLst>
           </p:cNvPr>
@@ -9794,7 +9809,7 @@
           <p:cNvPr id="6" name="">
             <a:extLst xmlns:a="http://schemas.openxmlformats.org/drawingml/2006/main">
               <a:ext uri="{FF2B5EF4-FFF2-40B4-BE49-F238E27FC236}">
-                <a16:creationId xmlns:a16="http://schemas.microsoft.com/office/drawing/2014/main" id="{3FA757B8-A0A6-4456-8499-4A566B34478A}"/>
+                <a16:creationId xmlns:a16="http://schemas.microsoft.com/office/drawing/2014/main" id="{D06BFE9E-1FC5-4206-A560-70EA2D411732}"/>
               </a:ext>
             </a:extLst>
           </p:cNvPr>
@@ -9950,7 +9965,7 @@
           <p:cNvPr id="7" name="">
             <a:extLst xmlns:a="http://schemas.openxmlformats.org/drawingml/2006/main">
               <a:ext uri="{FF2B5EF4-FFF2-40B4-BE49-F238E27FC236}">
-                <a16:creationId xmlns:a16="http://schemas.microsoft.com/office/drawing/2014/main" id="{70ECC5AD-CB58-41F8-848E-7BB7DAE85C22}"/>
+                <a16:creationId xmlns:a16="http://schemas.microsoft.com/office/drawing/2014/main" id="{90A08AE4-74C7-4AFD-8832-283D7BD805EC}"/>
               </a:ext>
             </a:extLst>
           </p:cNvPr>
@@ -10106,7 +10121,7 @@
           <p:cNvPr id="8" name="">
             <a:extLst xmlns:a="http://schemas.openxmlformats.org/drawingml/2006/main">
               <a:ext uri="{FF2B5EF4-FFF2-40B4-BE49-F238E27FC236}">
-                <a16:creationId xmlns:a16="http://schemas.microsoft.com/office/drawing/2014/main" id="{C358AB71-7A5B-4B99-8342-B8DA810143B4}"/>
+                <a16:creationId xmlns:a16="http://schemas.microsoft.com/office/drawing/2014/main" id="{92CF4C89-7E8D-4AD5-8BF8-CAB5681C3EFE}"/>
               </a:ext>
             </a:extLst>
           </p:cNvPr>
@@ -10308,7 +10323,7 @@
           <p:cNvPr id="9" name="">
             <a:extLst xmlns:a="http://schemas.openxmlformats.org/drawingml/2006/main">
               <a:ext uri="{FF2B5EF4-FFF2-40B4-BE49-F238E27FC236}">
-                <a16:creationId xmlns:a16="http://schemas.microsoft.com/office/drawing/2014/main" id="{CD093717-F4E0-41D1-8639-8C112107228D}"/>
+                <a16:creationId xmlns:a16="http://schemas.microsoft.com/office/drawing/2014/main" id="{EEA0E980-64C2-4D20-989B-872CB8A1C19C}"/>
               </a:ext>
             </a:extLst>
           </p:cNvPr>
@@ -10464,7 +10479,7 @@
           <p:cNvPr id="10" name="">
             <a:extLst xmlns:a="http://schemas.openxmlformats.org/drawingml/2006/main">
               <a:ext uri="{FF2B5EF4-FFF2-40B4-BE49-F238E27FC236}">
-                <a16:creationId xmlns:a16="http://schemas.microsoft.com/office/drawing/2014/main" id="{6C221EFA-EE9F-4C01-818E-3CB35FBFD020}"/>
+                <a16:creationId xmlns:a16="http://schemas.microsoft.com/office/drawing/2014/main" id="{FB3BB836-BC6D-4FF7-BAAF-E071F2EE8E19}"/>
               </a:ext>
             </a:extLst>
           </p:cNvPr>
@@ -10620,7 +10635,7 @@
           <p:cNvPr id="11" name="">
             <a:extLst xmlns:a="http://schemas.openxmlformats.org/drawingml/2006/main">
               <a:ext uri="{FF2B5EF4-FFF2-40B4-BE49-F238E27FC236}">
-                <a16:creationId xmlns:a16="http://schemas.microsoft.com/office/drawing/2014/main" id="{ED66D6FA-BA36-4522-8B7B-78454514BEC8}"/>
+                <a16:creationId xmlns:a16="http://schemas.microsoft.com/office/drawing/2014/main" id="{F3F7F63C-7277-4EAB-9E31-BD6B513A1AE8}"/>
               </a:ext>
             </a:extLst>
           </p:cNvPr>
@@ -10822,7 +10837,7 @@
           <p:cNvPr id="12" name="">
             <a:extLst xmlns:a="http://schemas.openxmlformats.org/drawingml/2006/main">
               <a:ext uri="{FF2B5EF4-FFF2-40B4-BE49-F238E27FC236}">
-                <a16:creationId xmlns:a16="http://schemas.microsoft.com/office/drawing/2014/main" id="{678D4D56-1896-4F8A-9A6C-66C47680E71B}"/>
+                <a16:creationId xmlns:a16="http://schemas.microsoft.com/office/drawing/2014/main" id="{9A357609-10DC-4BE8-B418-66F81583DA7B}"/>
               </a:ext>
             </a:extLst>
           </p:cNvPr>
@@ -10978,7 +10993,7 @@
           <p:cNvPr id="13" name="">
             <a:extLst xmlns:a="http://schemas.openxmlformats.org/drawingml/2006/main">
               <a:ext uri="{FF2B5EF4-FFF2-40B4-BE49-F238E27FC236}">
-                <a16:creationId xmlns:a16="http://schemas.microsoft.com/office/drawing/2014/main" id="{91DB8428-CD47-4A15-A7D0-1F21790F4300}"/>
+                <a16:creationId xmlns:a16="http://schemas.microsoft.com/office/drawing/2014/main" id="{FF868694-01D3-40A6-AF01-381291A8F40D}"/>
               </a:ext>
             </a:extLst>
           </p:cNvPr>
@@ -11134,7 +11149,7 @@
           <p:cNvPr id="14" name="">
             <a:extLst xmlns:a="http://schemas.openxmlformats.org/drawingml/2006/main">
               <a:ext uri="{FF2B5EF4-FFF2-40B4-BE49-F238E27FC236}">
-                <a16:creationId xmlns:a16="http://schemas.microsoft.com/office/drawing/2014/main" id="{9B8F67D7-EA71-43A2-A3ED-8A326B7490AC}"/>
+                <a16:creationId xmlns:a16="http://schemas.microsoft.com/office/drawing/2014/main" id="{BA27C47B-1F53-4460-9F7C-4D9D3941FCB8}"/>
               </a:ext>
             </a:extLst>
           </p:cNvPr>
@@ -11336,7 +11351,7 @@
           <p:cNvPr id="15" name="">
             <a:extLst xmlns:a="http://schemas.openxmlformats.org/drawingml/2006/main">
               <a:ext uri="{FF2B5EF4-FFF2-40B4-BE49-F238E27FC236}">
-                <a16:creationId xmlns:a16="http://schemas.microsoft.com/office/drawing/2014/main" id="{15AA109B-F19E-405A-BB85-AC31D70575C0}"/>
+                <a16:creationId xmlns:a16="http://schemas.microsoft.com/office/drawing/2014/main" id="{689AB319-71F9-4A24-9E44-BD4E49830218}"/>
               </a:ext>
             </a:extLst>
           </p:cNvPr>
@@ -11492,7 +11507,7 @@
           <p:cNvPr id="16" name="">
             <a:extLst xmlns:a="http://schemas.openxmlformats.org/drawingml/2006/main">
               <a:ext uri="{FF2B5EF4-FFF2-40B4-BE49-F238E27FC236}">
-                <a16:creationId xmlns:a16="http://schemas.microsoft.com/office/drawing/2014/main" id="{6505937B-4C4B-4481-9856-1565709FF4AC}"/>
+                <a16:creationId xmlns:a16="http://schemas.microsoft.com/office/drawing/2014/main" id="{81292942-32B6-49FA-A5FD-97652E68368F}"/>
               </a:ext>
             </a:extLst>
           </p:cNvPr>
@@ -11646,7 +11661,7 @@
     </p:spTree>
     <p:extLst>
       <p:ext uri="{BB962C8B-B14F-4D97-AF65-F5344CB8AC3E}">
-        <p14:creationId xmlns:p14="http://schemas.microsoft.com/office/powerpoint/2010/main" val="945979573"/>
+        <p14:creationId xmlns:p14="http://schemas.microsoft.com/office/powerpoint/2010/main" val="785782989"/>
       </p:ext>
     </p:extLst>
   </p:cSld>
@@ -11677,7 +11692,7 @@
           <p:cNvPr id="11" name="">
             <a:extLst xmlns:a="http://schemas.openxmlformats.org/drawingml/2006/main">
               <a:ext uri="{FF2B5EF4-FFF2-40B4-BE49-F238E27FC236}">
-                <a16:creationId xmlns:a16="http://schemas.microsoft.com/office/drawing/2014/main" id="{2F78741A-56F8-49D2-B35A-FBAC1145E952}"/>
+                <a16:creationId xmlns:a16="http://schemas.microsoft.com/office/drawing/2014/main" id="{3C99E623-C841-4454-B6CF-A0E9E3B86A16}"/>
               </a:ext>
             </a:extLst>
           </p:cNvPr>
@@ -11833,7 +11848,7 @@
           <p:cNvPr id="2" name="">
             <a:extLst xmlns:a="http://schemas.openxmlformats.org/drawingml/2006/main">
               <a:ext uri="{FF2B5EF4-FFF2-40B4-BE49-F238E27FC236}">
-                <a16:creationId xmlns:a16="http://schemas.microsoft.com/office/drawing/2014/main" id="{B98E1764-1C1E-44D0-B225-E33195DCA2FE}"/>
+                <a16:creationId xmlns:a16="http://schemas.microsoft.com/office/drawing/2014/main" id="{2D8E8E9D-074F-49E6-8D04-8BB52D20D2B8}"/>
               </a:ext>
             </a:extLst>
           </p:cNvPr>
@@ -11989,7 +12004,7 @@
           <p:cNvPr id="3" name="">
             <a:extLst xmlns:a="http://schemas.openxmlformats.org/drawingml/2006/main">
               <a:ext uri="{FF2B5EF4-FFF2-40B4-BE49-F238E27FC236}">
-                <a16:creationId xmlns:a16="http://schemas.microsoft.com/office/drawing/2014/main" id="{C47D6776-9AA6-492A-80CF-6097D554845E}"/>
+                <a16:creationId xmlns:a16="http://schemas.microsoft.com/office/drawing/2014/main" id="{25F56729-0B4B-4EA7-B51C-58257B70EF68}"/>
               </a:ext>
             </a:extLst>
           </p:cNvPr>
@@ -12145,7 +12160,7 @@
           <p:cNvPr id="4" name="">
             <a:extLst xmlns:a="http://schemas.openxmlformats.org/drawingml/2006/main">
               <a:ext uri="{FF2B5EF4-FFF2-40B4-BE49-F238E27FC236}">
-                <a16:creationId xmlns:a16="http://schemas.microsoft.com/office/drawing/2014/main" id="{B7940C94-A49F-4E38-90A5-457ACA48D5E1}"/>
+                <a16:creationId xmlns:a16="http://schemas.microsoft.com/office/drawing/2014/main" id="{55CD0C0F-61B5-4F0F-9A7F-3A70C82D90EE}"/>
               </a:ext>
             </a:extLst>
           </p:cNvPr>
@@ -12301,7 +12316,7 @@
           <p:cNvPr id="5" name="">
             <a:extLst xmlns:a="http://schemas.openxmlformats.org/drawingml/2006/main">
               <a:ext uri="{FF2B5EF4-FFF2-40B4-BE49-F238E27FC236}">
-                <a16:creationId xmlns:a16="http://schemas.microsoft.com/office/drawing/2014/main" id="{76AB3726-8DEE-47D7-9BB5-6CFDC8341B6E}"/>
+                <a16:creationId xmlns:a16="http://schemas.microsoft.com/office/drawing/2014/main" id="{3F497EC3-BE59-4C55-B178-DAC216810C2F}"/>
               </a:ext>
             </a:extLst>
           </p:cNvPr>
@@ -12457,7 +12472,7 @@
           <p:cNvPr id="6" name="">
             <a:extLst xmlns:a="http://schemas.openxmlformats.org/drawingml/2006/main">
               <a:ext uri="{FF2B5EF4-FFF2-40B4-BE49-F238E27FC236}">
-                <a16:creationId xmlns:a16="http://schemas.microsoft.com/office/drawing/2014/main" id="{1A15F388-0597-4D4B-99D3-B283627E1C20}"/>
+                <a16:creationId xmlns:a16="http://schemas.microsoft.com/office/drawing/2014/main" id="{FF7B3EBD-4E4D-4528-978E-6966D5AB3121}"/>
               </a:ext>
             </a:extLst>
           </p:cNvPr>
@@ -12613,7 +12628,7 @@
           <p:cNvPr id="7" name="">
             <a:extLst xmlns:a="http://schemas.openxmlformats.org/drawingml/2006/main">
               <a:ext uri="{FF2B5EF4-FFF2-40B4-BE49-F238E27FC236}">
-                <a16:creationId xmlns:a16="http://schemas.microsoft.com/office/drawing/2014/main" id="{2B53E29B-BCCF-419B-9D12-D0BA6CC967E6}"/>
+                <a16:creationId xmlns:a16="http://schemas.microsoft.com/office/drawing/2014/main" id="{1B04C6BF-F201-43C7-8430-90451327FE23}"/>
               </a:ext>
             </a:extLst>
           </p:cNvPr>
@@ -12792,7 +12807,7 @@
           <p:cNvPr id="8" name="">
             <a:extLst xmlns:a="http://schemas.openxmlformats.org/drawingml/2006/main">
               <a:ext uri="{FF2B5EF4-FFF2-40B4-BE49-F238E27FC236}">
-                <a16:creationId xmlns:a16="http://schemas.microsoft.com/office/drawing/2014/main" id="{BCB3FF9F-D45C-446A-92C6-92955952EE10}"/>
+                <a16:creationId xmlns:a16="http://schemas.microsoft.com/office/drawing/2014/main" id="{C63A9C75-3B71-45B5-BECB-FA9F7E9D52CA}"/>
               </a:ext>
             </a:extLst>
           </p:cNvPr>
@@ -12948,7 +12963,7 @@
           <p:cNvPr id="9" name="">
             <a:extLst xmlns:a="http://schemas.openxmlformats.org/drawingml/2006/main">
               <a:ext uri="{FF2B5EF4-FFF2-40B4-BE49-F238E27FC236}">
-                <a16:creationId xmlns:a16="http://schemas.microsoft.com/office/drawing/2014/main" id="{C8207DB8-25B3-4418-A0E0-567D63C93930}"/>
+                <a16:creationId xmlns:a16="http://schemas.microsoft.com/office/drawing/2014/main" id="{3C2D3CF1-864E-4AEF-9EC2-EDE5B03317D3}"/>
               </a:ext>
             </a:extLst>
           </p:cNvPr>
@@ -13173,7 +13188,7 @@
           <p:cNvPr id="10" name="">
             <a:extLst xmlns:a="http://schemas.openxmlformats.org/drawingml/2006/main">
               <a:ext uri="{FF2B5EF4-FFF2-40B4-BE49-F238E27FC236}">
-                <a16:creationId xmlns:a16="http://schemas.microsoft.com/office/drawing/2014/main" id="{83B7B75D-F5C3-4B5E-B023-8B43F8D7DABA}"/>
+                <a16:creationId xmlns:a16="http://schemas.microsoft.com/office/drawing/2014/main" id="{5C792AD7-3C1B-4276-841B-6E38CC335963}"/>
               </a:ext>
             </a:extLst>
           </p:cNvPr>
@@ -13350,7 +13365,7 @@
     </p:spTree>
     <p:extLst>
       <p:ext uri="{BB962C8B-B14F-4D97-AF65-F5344CB8AC3E}">
-        <p14:creationId xmlns:p14="http://schemas.microsoft.com/office/powerpoint/2010/main" val="452861497"/>
+        <p14:creationId xmlns:p14="http://schemas.microsoft.com/office/powerpoint/2010/main" val="567345988"/>
       </p:ext>
     </p:extLst>
   </p:cSld>
@@ -13381,7 +13396,7 @@
           <p:cNvPr id="7" name="">
             <a:extLst xmlns:a="http://schemas.openxmlformats.org/drawingml/2006/main">
               <a:ext uri="{FF2B5EF4-FFF2-40B4-BE49-F238E27FC236}">
-                <a16:creationId xmlns:a16="http://schemas.microsoft.com/office/drawing/2014/main" id="{783839ED-DEF6-4078-8AAB-302BB689532C}"/>
+                <a16:creationId xmlns:a16="http://schemas.microsoft.com/office/drawing/2014/main" id="{B6EE9A52-9408-4924-9C64-216386C94EAB}"/>
               </a:ext>
             </a:extLst>
           </p:cNvPr>
@@ -13537,7 +13552,7 @@
           <p:cNvPr id="2" name="">
             <a:extLst xmlns:a="http://schemas.openxmlformats.org/drawingml/2006/main">
               <a:ext uri="{FF2B5EF4-FFF2-40B4-BE49-F238E27FC236}">
-                <a16:creationId xmlns:a16="http://schemas.microsoft.com/office/drawing/2014/main" id="{B8FF94B1-81E8-45BB-88AD-6430F8EE2E7D}"/>
+                <a16:creationId xmlns:a16="http://schemas.microsoft.com/office/drawing/2014/main" id="{C50998A8-7F37-4379-9A68-261DA9CAEF6C}"/>
               </a:ext>
             </a:extLst>
           </p:cNvPr>
@@ -13693,7 +13708,7 @@
           <p:cNvPr id="3" name="">
             <a:extLst xmlns:a="http://schemas.openxmlformats.org/drawingml/2006/main">
               <a:ext uri="{FF2B5EF4-FFF2-40B4-BE49-F238E27FC236}">
-                <a16:creationId xmlns:a16="http://schemas.microsoft.com/office/drawing/2014/main" id="{63EFAECF-88C4-4791-84FE-30163277B064}"/>
+                <a16:creationId xmlns:a16="http://schemas.microsoft.com/office/drawing/2014/main" id="{BB617575-13E6-4AAA-B9D9-F3DED3675F20}"/>
               </a:ext>
             </a:extLst>
           </p:cNvPr>
@@ -13849,7 +13864,7 @@
           <p:cNvPr id="4" name="">
             <a:extLst xmlns:a="http://schemas.openxmlformats.org/drawingml/2006/main">
               <a:ext uri="{FF2B5EF4-FFF2-40B4-BE49-F238E27FC236}">
-                <a16:creationId xmlns:a16="http://schemas.microsoft.com/office/drawing/2014/main" id="{1EC61FD6-699E-4050-94FA-46BDA65031C7}"/>
+                <a16:creationId xmlns:a16="http://schemas.microsoft.com/office/drawing/2014/main" id="{DA460CDE-6FBC-4BF7-B3A8-05AE1183D6EC}"/>
               </a:ext>
             </a:extLst>
           </p:cNvPr>
@@ -14005,7 +14020,7 @@
           <p:cNvPr id="5" name="">
             <a:extLst xmlns:a="http://schemas.openxmlformats.org/drawingml/2006/main">
               <a:ext uri="{FF2B5EF4-FFF2-40B4-BE49-F238E27FC236}">
-                <a16:creationId xmlns:a16="http://schemas.microsoft.com/office/drawing/2014/main" id="{D0D74990-0DDA-4412-A558-551B3B0E714C}"/>
+                <a16:creationId xmlns:a16="http://schemas.microsoft.com/office/drawing/2014/main" id="{FD3FD5FF-0672-4E4E-A6C5-02639982F15D}"/>
               </a:ext>
             </a:extLst>
           </p:cNvPr>
@@ -14445,7 +14460,7 @@
           <p:cNvPr id="6" name="">
             <a:extLst xmlns:a="http://schemas.openxmlformats.org/drawingml/2006/main">
               <a:ext uri="{FF2B5EF4-FFF2-40B4-BE49-F238E27FC236}">
-                <a16:creationId xmlns:a16="http://schemas.microsoft.com/office/drawing/2014/main" id="{30D42BFA-12FB-4F44-A7FB-63F8A1232E78}"/>
+                <a16:creationId xmlns:a16="http://schemas.microsoft.com/office/drawing/2014/main" id="{9FB66966-E514-4666-B20D-7AEC4FED008D}"/>
               </a:ext>
             </a:extLst>
           </p:cNvPr>
@@ -14622,7 +14637,7 @@
     </p:spTree>
     <p:extLst>
       <p:ext uri="{BB962C8B-B14F-4D97-AF65-F5344CB8AC3E}">
-        <p14:creationId xmlns:p14="http://schemas.microsoft.com/office/powerpoint/2010/main" val="291755623"/>
+        <p14:creationId xmlns:p14="http://schemas.microsoft.com/office/powerpoint/2010/main" val="702265677"/>
       </p:ext>
     </p:extLst>
   </p:cSld>
@@ -14653,7 +14668,7 @@
           <p:cNvPr id="7" name="">
             <a:extLst xmlns:a="http://schemas.openxmlformats.org/drawingml/2006/main">
               <a:ext uri="{FF2B5EF4-FFF2-40B4-BE49-F238E27FC236}">
-                <a16:creationId xmlns:a16="http://schemas.microsoft.com/office/drawing/2014/main" id="{8754C068-FF30-4213-92D0-3DF2FB872912}"/>
+                <a16:creationId xmlns:a16="http://schemas.microsoft.com/office/drawing/2014/main" id="{3154EBBC-4726-40C8-ACF4-B19ED79B74F5}"/>
               </a:ext>
             </a:extLst>
           </p:cNvPr>
@@ -14809,7 +14824,7 @@
           <p:cNvPr id="2" name="">
             <a:extLst xmlns:a="http://schemas.openxmlformats.org/drawingml/2006/main">
               <a:ext uri="{FF2B5EF4-FFF2-40B4-BE49-F238E27FC236}">
-                <a16:creationId xmlns:a16="http://schemas.microsoft.com/office/drawing/2014/main" id="{7F039D54-673E-4F4A-A2B8-0EC2EA7EEBD1}"/>
+                <a16:creationId xmlns:a16="http://schemas.microsoft.com/office/drawing/2014/main" id="{D3CF2F64-36E5-4EB7-8716-EC59724F7FF7}"/>
               </a:ext>
             </a:extLst>
           </p:cNvPr>
@@ -14965,7 +14980,7 @@
           <p:cNvPr id="3" name="">
             <a:extLst xmlns:a="http://schemas.openxmlformats.org/drawingml/2006/main">
               <a:ext uri="{FF2B5EF4-FFF2-40B4-BE49-F238E27FC236}">
-                <a16:creationId xmlns:a16="http://schemas.microsoft.com/office/drawing/2014/main" id="{DABBD966-04B1-436A-8D55-0036C7469E65}"/>
+                <a16:creationId xmlns:a16="http://schemas.microsoft.com/office/drawing/2014/main" id="{8B39EA5A-1035-4FD9-ADDD-1CB38B52971A}"/>
               </a:ext>
             </a:extLst>
           </p:cNvPr>
@@ -15121,7 +15136,7 @@
           <p:cNvPr id="4" name="">
             <a:extLst xmlns:a="http://schemas.openxmlformats.org/drawingml/2006/main">
               <a:ext uri="{FF2B5EF4-FFF2-40B4-BE49-F238E27FC236}">
-                <a16:creationId xmlns:a16="http://schemas.microsoft.com/office/drawing/2014/main" id="{2B905CE6-085E-409F-BF39-82E2AFC80C75}"/>
+                <a16:creationId xmlns:a16="http://schemas.microsoft.com/office/drawing/2014/main" id="{FC1FF22C-01A1-431B-97B4-1EEAB278702B}"/>
               </a:ext>
             </a:extLst>
           </p:cNvPr>
@@ -15300,7 +15315,7 @@
           <p:cNvPr id="5" name="">
             <a:extLst xmlns:a="http://schemas.openxmlformats.org/drawingml/2006/main">
               <a:ext uri="{FF2B5EF4-FFF2-40B4-BE49-F238E27FC236}">
-                <a16:creationId xmlns:a16="http://schemas.microsoft.com/office/drawing/2014/main" id="{23EC4F20-8ECA-4088-A097-F32666975272}"/>
+                <a16:creationId xmlns:a16="http://schemas.microsoft.com/office/drawing/2014/main" id="{188D0972-560A-48EC-B112-F5A6EA6A25AC}"/>
               </a:ext>
             </a:extLst>
           </p:cNvPr>
@@ -15456,7 +15471,7 @@
           <p:cNvPr id="6" name="">
             <a:extLst xmlns:a="http://schemas.openxmlformats.org/drawingml/2006/main">
               <a:ext uri="{FF2B5EF4-FFF2-40B4-BE49-F238E27FC236}">
-                <a16:creationId xmlns:a16="http://schemas.microsoft.com/office/drawing/2014/main" id="{3A137E92-4E25-42A2-94F1-FDB79C48B5CF}"/>
+                <a16:creationId xmlns:a16="http://schemas.microsoft.com/office/drawing/2014/main" id="{17481754-792D-4313-AC95-3FE6D950D95C}"/>
               </a:ext>
             </a:extLst>
           </p:cNvPr>
@@ -15633,7 +15648,7 @@
     </p:spTree>
     <p:extLst>
       <p:ext uri="{BB962C8B-B14F-4D97-AF65-F5344CB8AC3E}">
-        <p14:creationId xmlns:p14="http://schemas.microsoft.com/office/powerpoint/2010/main" val="1863077832"/>
+        <p14:creationId xmlns:p14="http://schemas.microsoft.com/office/powerpoint/2010/main" val="1621587920"/>
       </p:ext>
     </p:extLst>
   </p:cSld>
@@ -15664,7 +15679,7 @@
           <p:cNvPr id="8" name="">
             <a:extLst xmlns:a="http://schemas.openxmlformats.org/drawingml/2006/main">
               <a:ext uri="{FF2B5EF4-FFF2-40B4-BE49-F238E27FC236}">
-                <a16:creationId xmlns:a16="http://schemas.microsoft.com/office/drawing/2014/main" id="{24A7912D-0D02-4EF1-AB61-5BDB285122A1}"/>
+                <a16:creationId xmlns:a16="http://schemas.microsoft.com/office/drawing/2014/main" id="{296E86DC-F8FA-4F44-B130-F25AB4D91066}"/>
               </a:ext>
             </a:extLst>
           </p:cNvPr>
@@ -15820,7 +15835,7 @@
           <p:cNvPr id="2" name="">
             <a:extLst xmlns:a="http://schemas.openxmlformats.org/drawingml/2006/main">
               <a:ext uri="{FF2B5EF4-FFF2-40B4-BE49-F238E27FC236}">
-                <a16:creationId xmlns:a16="http://schemas.microsoft.com/office/drawing/2014/main" id="{78DA4679-8967-4B24-AA0D-B6D96985079B}"/>
+                <a16:creationId xmlns:a16="http://schemas.microsoft.com/office/drawing/2014/main" id="{D0B21730-13DB-4631-BDF6-764F677A4BEC}"/>
               </a:ext>
             </a:extLst>
           </p:cNvPr>
@@ -15976,7 +15991,7 @@
           <p:cNvPr id="3" name="">
             <a:extLst xmlns:a="http://schemas.openxmlformats.org/drawingml/2006/main">
               <a:ext uri="{FF2B5EF4-FFF2-40B4-BE49-F238E27FC236}">
-                <a16:creationId xmlns:a16="http://schemas.microsoft.com/office/drawing/2014/main" id="{41FBD0B9-6AC9-44D7-A954-8A1EE39EC83A}"/>
+                <a16:creationId xmlns:a16="http://schemas.microsoft.com/office/drawing/2014/main" id="{2DCC6DE2-575B-4F07-B861-0391A85252A7}"/>
               </a:ext>
             </a:extLst>
           </p:cNvPr>
@@ -16155,7 +16170,7 @@
           <p:cNvPr id="4" name="">
             <a:extLst xmlns:a="http://schemas.openxmlformats.org/drawingml/2006/main">
               <a:ext uri="{FF2B5EF4-FFF2-40B4-BE49-F238E27FC236}">
-                <a16:creationId xmlns:a16="http://schemas.microsoft.com/office/drawing/2014/main" id="{E653F4B1-9D19-4607-B402-FC028583A107}"/>
+                <a16:creationId xmlns:a16="http://schemas.microsoft.com/office/drawing/2014/main" id="{ABBDCDA3-3243-446E-935D-1C4A19B5D438}"/>
               </a:ext>
             </a:extLst>
           </p:cNvPr>
@@ -16334,7 +16349,7 @@
           <p:cNvPr id="5" name="">
             <a:extLst xmlns:a="http://schemas.openxmlformats.org/drawingml/2006/main">
               <a:ext uri="{FF2B5EF4-FFF2-40B4-BE49-F238E27FC236}">
-                <a16:creationId xmlns:a16="http://schemas.microsoft.com/office/drawing/2014/main" id="{77213319-15DD-4F97-B0D7-43974E41F3C5}"/>
+                <a16:creationId xmlns:a16="http://schemas.microsoft.com/office/drawing/2014/main" id="{F6A37F92-AAF6-45BA-B1F9-D6171FABEF5F}"/>
               </a:ext>
             </a:extLst>
           </p:cNvPr>
@@ -16490,7 +16505,7 @@
           <p:cNvPr id="6" name="">
             <a:extLst xmlns:a="http://schemas.openxmlformats.org/drawingml/2006/main">
               <a:ext uri="{FF2B5EF4-FFF2-40B4-BE49-F238E27FC236}">
-                <a16:creationId xmlns:a16="http://schemas.microsoft.com/office/drawing/2014/main" id="{007710A1-33A2-432D-B6BD-D557474B8F81}"/>
+                <a16:creationId xmlns:a16="http://schemas.microsoft.com/office/drawing/2014/main" id="{8708BC1D-AE26-45D1-89E4-62AB1B281EF2}"/>
               </a:ext>
             </a:extLst>
           </p:cNvPr>
@@ -16715,7 +16730,7 @@
           <p:cNvPr id="7" name="">
             <a:extLst xmlns:a="http://schemas.openxmlformats.org/drawingml/2006/main">
               <a:ext uri="{FF2B5EF4-FFF2-40B4-BE49-F238E27FC236}">
-                <a16:creationId xmlns:a16="http://schemas.microsoft.com/office/drawing/2014/main" id="{92B6EC28-555B-468B-A16B-C69678E4C346}"/>
+                <a16:creationId xmlns:a16="http://schemas.microsoft.com/office/drawing/2014/main" id="{CCF455E3-DF82-40E1-A352-F68BD780BF4E}"/>
               </a:ext>
             </a:extLst>
           </p:cNvPr>
@@ -16869,7 +16884,7 @@
     </p:spTree>
     <p:extLst>
       <p:ext uri="{BB962C8B-B14F-4D97-AF65-F5344CB8AC3E}">
-        <p14:creationId xmlns:p14="http://schemas.microsoft.com/office/powerpoint/2010/main" val="1701909557"/>
+        <p14:creationId xmlns:p14="http://schemas.microsoft.com/office/powerpoint/2010/main" val="853239542"/>
       </p:ext>
     </p:extLst>
   </p:cSld>
